--- a/decks/test-deck/ai-automation-deck.pptx
+++ b/decks/test-deck/ai-automation-deck.pptx
@@ -1226,7 +1226,7 @@
       </p:grpSpPr>
       <p:pic>
         <p:nvPicPr>
-          <p:cNvPr id="2" name="Image 0" descr="/tmp/slide-1787840460945-u7ahtnnoaw.png">    </p:cNvPr>
+          <p:cNvPr id="2" name="Image 0" descr="/tmp/slide-1787841980343-v156d5g40z9.png">    </p:cNvPr>
           <p:cNvPicPr>
             <a:picLocks noChangeAspect="1"/>
           </p:cNvPicPr>
@@ -1275,7 +1275,7 @@
       </p:grpSpPr>
       <p:pic>
         <p:nvPicPr>
-          <p:cNvPr id="2" name="Image 0" descr="/tmp/slide-1787840461412-71t7ej4yk6.png">    </p:cNvPr>
+          <p:cNvPr id="2" name="Image 0" descr="/tmp/slide-1787841980877-pnol26j9c8g.png">    </p:cNvPr>
           <p:cNvPicPr>
             <a:picLocks noChangeAspect="1"/>
           </p:cNvPicPr>
@@ -1324,7 +1324,7 @@
       </p:grpSpPr>
       <p:pic>
         <p:nvPicPr>
-          <p:cNvPr id="2" name="Image 0" descr="/tmp/slide-1787840461899-6flihn63ctm.png">    </p:cNvPr>
+          <p:cNvPr id="2" name="Image 0" descr="/tmp/slide-1787841981320-nb42ptrsam.png">    </p:cNvPr>
           <p:cNvPicPr>
             <a:picLocks noChangeAspect="1"/>
           </p:cNvPicPr>
@@ -1373,7 +1373,7 @@
       </p:grpSpPr>
       <p:pic>
         <p:nvPicPr>
-          <p:cNvPr id="2" name="Image 0" descr="/tmp/slide-1787840462601-bsdue7cy5gj.png">    </p:cNvPr>
+          <p:cNvPr id="2" name="Image 0" descr="/tmp/slide-1787841981789-skex152chal.png">    </p:cNvPr>
           <p:cNvPicPr>
             <a:picLocks noChangeAspect="1"/>
           </p:cNvPicPr>
@@ -1422,7 +1422,7 @@
       </p:grpSpPr>
       <p:pic>
         <p:nvPicPr>
-          <p:cNvPr id="2" name="Image 0" descr="/tmp/slide-1787840463150-4ofh2mnr8uh.png">    </p:cNvPr>
+          <p:cNvPr id="2" name="Image 0" descr="/tmp/slide-1787841982292-oy1q9yxez4.png">    </p:cNvPr>
           <p:cNvPicPr>
             <a:picLocks noChangeAspect="1"/>
           </p:cNvPicPr>

--- a/decks/test-deck/ai-automation-deck.pptx
+++ b/decks/test-deck/ai-automation-deck.pptx
@@ -1210,6 +1210,13 @@
 <file path=ppt/slides/slide1.xml><?xml version="1.0" encoding="utf-8"?>
 <p:sld xmlns:a="http://schemas.openxmlformats.org/drawingml/2006/main" xmlns:r="http://schemas.openxmlformats.org/officeDocument/2006/relationships" xmlns:p="http://schemas.openxmlformats.org/presentationml/2006/main">
   <p:cSld name="Slide 1">
+    <p:bg>
+      <p:bgPr>
+        <a:solidFill>
+          <a:srgbClr val="0B2C5C"/>
+        </a:solidFill>
+      </p:bgPr>
+    </p:bg>
     <p:spTree>
       <p:nvGrpSpPr>
         <p:cNvPr id="1" name=""/>
@@ -1224,30 +1231,478 @@
           <a:chExt cx="0" cy="0"/>
         </a:xfrm>
       </p:grpSpPr>
-      <p:pic>
-        <p:nvPicPr>
-          <p:cNvPr id="2" name="Image 0" descr="/tmp/slide-1787841980343-v156d5g40z9.png">    </p:cNvPr>
-          <p:cNvPicPr>
-            <a:picLocks noChangeAspect="1"/>
-          </p:cNvPicPr>
-          <p:nvPr/>
-        </p:nvPicPr>
-        <p:blipFill>
-          <a:blip r:embed="rId1"/>
-          <a:stretch>
-            <a:fillRect/>
-          </a:stretch>
-        </p:blipFill>
-        <p:spPr>
-          <a:xfrm>
-            <a:off x="0" y="0"/>
-            <a:ext cx="12188952" cy="6858000"/>
-          </a:xfrm>
-          <a:prstGeom prst="rect">
-            <a:avLst/>
-          </a:prstGeom>
-        </p:spPr>
-      </p:pic>
+      <p:sp>
+        <p:nvSpPr>
+          <p:cNvPr id="2" name="Text 0"/>
+          <p:cNvSpPr/>
+          <p:nvPr/>
+        </p:nvSpPr>
+        <p:spPr>
+          <a:xfrm>
+            <a:off x="643174" y="575667"/>
+            <a:ext cx="1564685" cy="397669"/>
+          </a:xfrm>
+          <a:prstGeom prst="rect">
+            <a:avLst/>
+          </a:prstGeom>
+          <a:solidFill>
+            <a:srgbClr val="1B66C9"/>
+          </a:solidFill>
+          <a:ln/>
+        </p:spPr>
+        <p:txBody>
+          <a:bodyPr wrap="square" rtlCol="0" anchor="ctr"/>
+          <a:lstStyle/>
+          <a:p>
+            <a:pPr indent="0" marL="0">
+              <a:buNone/>
+            </a:pPr>
+            <a:endParaRPr lang="en-US" dirty="0"/>
+          </a:p>
+        </p:txBody>
+      </p:sp>
+      <p:sp>
+        <p:nvSpPr>
+          <p:cNvPr id="3" name="Text 1"/>
+          <p:cNvSpPr/>
+          <p:nvPr/>
+        </p:nvSpPr>
+        <p:spPr>
+          <a:xfrm>
+            <a:off x="829261" y="660202"/>
+            <a:ext cx="1216360" cy="228600"/>
+          </a:xfrm>
+          <a:prstGeom prst="rect">
+            <a:avLst/>
+          </a:prstGeom>
+          <a:noFill/>
+          <a:ln/>
+        </p:spPr>
+        <p:txBody>
+          <a:bodyPr wrap="square" lIns="0" tIns="0" rIns="0" bIns="0" rtlCol="0" anchor="t"/>
+          <a:lstStyle/>
+          <a:p>
+            <a:pPr algn="l" indent="0" marL="0">
+              <a:buNone/>
+            </a:pPr>
+            <a:r>
+              <a:rPr lang="en-US" sz="1466" b="1" dirty="0">
+                <a:solidFill>
+                  <a:srgbClr val="FFFFFF"/>
+                </a:solidFill>
+                <a:latin typeface="Pretendard" pitchFamily="34" charset="0"/>
+                <a:ea typeface="Pretendard" pitchFamily="34" charset="-122"/>
+                <a:cs typeface="Pretendard" pitchFamily="34" charset="-120"/>
+              </a:rPr>
+              <a:t>AI 전환 브리핑</a:t>
+            </a:r>
+            <a:endParaRPr lang="en-US" sz="1466" dirty="0"/>
+          </a:p>
+        </p:txBody>
+      </p:sp>
+      <p:sp>
+        <p:nvSpPr>
+          <p:cNvPr id="4" name="Text 2"/>
+          <p:cNvSpPr/>
+          <p:nvPr/>
+        </p:nvSpPr>
+        <p:spPr>
+          <a:xfrm>
+            <a:off x="643174" y="2164953"/>
+            <a:ext cx="67650" cy="2265363"/>
+          </a:xfrm>
+          <a:prstGeom prst="rect">
+            <a:avLst/>
+          </a:prstGeom>
+          <a:solidFill>
+            <a:srgbClr val="1B66C9"/>
+          </a:solidFill>
+          <a:ln/>
+        </p:spPr>
+        <p:txBody>
+          <a:bodyPr wrap="square" rtlCol="0" anchor="ctr"/>
+          <a:lstStyle/>
+          <a:p>
+            <a:pPr indent="0" marL="0">
+              <a:buNone/>
+            </a:pPr>
+            <a:endParaRPr lang="en-US" dirty="0"/>
+          </a:p>
+        </p:txBody>
+      </p:sp>
+      <p:sp>
+        <p:nvSpPr>
+          <p:cNvPr id="5" name="Text 3"/>
+          <p:cNvSpPr/>
+          <p:nvPr/>
+        </p:nvSpPr>
+        <p:spPr>
+          <a:xfrm>
+            <a:off x="1049274" y="2164953"/>
+            <a:ext cx="4869486" cy="1647428"/>
+          </a:xfrm>
+          <a:prstGeom prst="rect">
+            <a:avLst/>
+          </a:prstGeom>
+          <a:noFill/>
+          <a:ln/>
+        </p:spPr>
+        <p:txBody>
+          <a:bodyPr wrap="square" lIns="0" tIns="0" rIns="0" bIns="0" rtlCol="0" anchor="t"/>
+          <a:lstStyle/>
+          <a:p>
+            <a:pPr algn="l" indent="0" marL="0">
+              <a:lnSpc>
+                <a:spcPts val="6485"/>
+              </a:lnSpc>
+              <a:buNone/>
+            </a:pPr>
+            <a:r>
+              <a:rPr lang="en-US" sz="5066" dirty="0">
+                <a:solidFill>
+                  <a:srgbClr val="FFFFFF"/>
+                </a:solidFill>
+                <a:latin typeface="Pretendard" pitchFamily="34" charset="0"/>
+                <a:ea typeface="Pretendard" pitchFamily="34" charset="-122"/>
+                <a:cs typeface="Pretendard" pitchFamily="34" charset="-120"/>
+              </a:rPr>
+              <a:t>인공지능의 미래와</a:t>
+            </a:r>
+            <a:endParaRPr lang="en-US" sz="5066" dirty="0"/>
+          </a:p>
+          <a:p>
+            <a:pPr algn="l" indent="0" marL="0">
+              <a:lnSpc>
+                <a:spcPts val="6485"/>
+              </a:lnSpc>
+              <a:buNone/>
+            </a:pPr>
+            <a:r>
+              <a:rPr lang="en-US" sz="5066" dirty="0">
+                <a:solidFill>
+                  <a:srgbClr val="FFFFFF"/>
+                </a:solidFill>
+                <a:latin typeface="Pretendard" pitchFamily="34" charset="0"/>
+                <a:ea typeface="Pretendard" pitchFamily="34" charset="-122"/>
+                <a:cs typeface="Pretendard" pitchFamily="34" charset="-120"/>
+              </a:rPr>
+              <a:t>업무 자동화</a:t>
+            </a:r>
+            <a:endParaRPr lang="en-US" sz="5066" dirty="0"/>
+          </a:p>
+        </p:txBody>
+      </p:sp>
+      <p:sp>
+        <p:nvSpPr>
+          <p:cNvPr id="6" name="Text 4"/>
+          <p:cNvSpPr/>
+          <p:nvPr/>
+        </p:nvSpPr>
+        <p:spPr>
+          <a:xfrm>
+            <a:off x="1049274" y="4049316"/>
+            <a:ext cx="4869486" cy="381000"/>
+          </a:xfrm>
+          <a:prstGeom prst="rect">
+            <a:avLst/>
+          </a:prstGeom>
+          <a:noFill/>
+          <a:ln/>
+        </p:spPr>
+        <p:txBody>
+          <a:bodyPr wrap="square" lIns="0" tIns="0" rIns="0" bIns="0" rtlCol="0" anchor="t"/>
+          <a:lstStyle/>
+          <a:p>
+            <a:pPr algn="l" indent="0" marL="0">
+              <a:lnSpc>
+                <a:spcPts val="3000"/>
+              </a:lnSpc>
+              <a:spcBef>
+                <a:spcPts val="1866"/>
+              </a:spcBef>
+              <a:buNone/>
+            </a:pPr>
+            <a:r>
+              <a:rPr lang="en-US" sz="2000" dirty="0">
+                <a:solidFill>
+                  <a:srgbClr val="C5D2E3"/>
+                </a:solidFill>
+                <a:latin typeface="Pretendard" pitchFamily="34" charset="0"/>
+                <a:ea typeface="Pretendard" pitchFamily="34" charset="-122"/>
+                <a:cs typeface="Pretendard" pitchFamily="34" charset="-120"/>
+              </a:rPr>
+              <a:t>생성형 AI 이후, 일하는 방식은 어떻게 재편되는가</a:t>
+            </a:r>
+            <a:endParaRPr lang="en-US" sz="2000" dirty="0"/>
+          </a:p>
+        </p:txBody>
+      </p:sp>
+      <p:sp>
+        <p:nvSpPr>
+          <p:cNvPr id="7" name="Shape 5"/>
+          <p:cNvSpPr/>
+          <p:nvPr/>
+        </p:nvSpPr>
+        <p:spPr>
+          <a:xfrm>
+            <a:off x="643174" y="5628283"/>
+            <a:ext cx="10902605" cy="0"/>
+          </a:xfrm>
+          <a:prstGeom prst="line">
+            <a:avLst/>
+          </a:prstGeom>
+          <a:noFill/>
+          <a:ln w="12698">
+            <a:solidFill>
+              <a:srgbClr val="3A5B87"/>
+            </a:solidFill>
+            <a:prstDash val="solid"/>
+          </a:ln>
+        </p:spPr>
+      </p:sp>
+      <p:sp>
+        <p:nvSpPr>
+          <p:cNvPr id="8" name="Text 6"/>
+          <p:cNvSpPr/>
+          <p:nvPr/>
+        </p:nvSpPr>
+        <p:spPr>
+          <a:xfrm>
+            <a:off x="643174" y="5837833"/>
+            <a:ext cx="1061962" cy="203200"/>
+          </a:xfrm>
+          <a:prstGeom prst="rect">
+            <a:avLst/>
+          </a:prstGeom>
+          <a:noFill/>
+          <a:ln/>
+        </p:spPr>
+        <p:txBody>
+          <a:bodyPr wrap="square" lIns="0" tIns="0" rIns="0" bIns="0" rtlCol="0" anchor="t"/>
+          <a:lstStyle/>
+          <a:p>
+            <a:pPr algn="l" indent="0" marL="0">
+              <a:spcAft>
+                <a:spcPts val="533"/>
+              </a:spcAft>
+              <a:buNone/>
+            </a:pPr>
+            <a:r>
+              <a:rPr lang="en-US" sz="1333" dirty="0">
+                <a:solidFill>
+                  <a:srgbClr val="8FA6C4"/>
+                </a:solidFill>
+                <a:latin typeface="Pretendard" pitchFamily="34" charset="0"/>
+                <a:ea typeface="Pretendard" pitchFamily="34" charset="-122"/>
+                <a:cs typeface="Pretendard" pitchFamily="34" charset="-120"/>
+              </a:rPr>
+              <a:t>발표</a:t>
+            </a:r>
+            <a:endParaRPr lang="en-US" sz="1333" dirty="0"/>
+          </a:p>
+        </p:txBody>
+      </p:sp>
+      <p:sp>
+        <p:nvSpPr>
+          <p:cNvPr id="9" name="Text 7"/>
+          <p:cNvSpPr/>
+          <p:nvPr/>
+        </p:nvSpPr>
+        <p:spPr>
+          <a:xfrm>
+            <a:off x="643174" y="6108700"/>
+            <a:ext cx="1061962" cy="241300"/>
+          </a:xfrm>
+          <a:prstGeom prst="rect">
+            <a:avLst/>
+          </a:prstGeom>
+          <a:noFill/>
+          <a:ln/>
+        </p:spPr>
+        <p:txBody>
+          <a:bodyPr wrap="square" lIns="0" tIns="0" rIns="0" bIns="0" rtlCol="0" anchor="t"/>
+          <a:lstStyle/>
+          <a:p>
+            <a:pPr algn="l" indent="0" marL="0">
+              <a:buNone/>
+            </a:pPr>
+            <a:r>
+              <a:rPr lang="en-US" sz="1600" b="1" dirty="0">
+                <a:solidFill>
+                  <a:srgbClr val="E8F1FB"/>
+                </a:solidFill>
+                <a:latin typeface="Pretendard" pitchFamily="34" charset="0"/>
+                <a:ea typeface="Pretendard" pitchFamily="34" charset="-122"/>
+                <a:cs typeface="Pretendard" pitchFamily="34" charset="-120"/>
+              </a:rPr>
+              <a:t>발표자 · 소속</a:t>
+            </a:r>
+            <a:endParaRPr lang="en-US" sz="1600" dirty="0"/>
+          </a:p>
+        </p:txBody>
+      </p:sp>
+      <p:sp>
+        <p:nvSpPr>
+          <p:cNvPr id="10" name="Text 8"/>
+          <p:cNvSpPr/>
+          <p:nvPr/>
+        </p:nvSpPr>
+        <p:spPr>
+          <a:xfrm>
+            <a:off x="2462986" y="5837833"/>
+            <a:ext cx="932455" cy="203200"/>
+          </a:xfrm>
+          <a:prstGeom prst="rect">
+            <a:avLst/>
+          </a:prstGeom>
+          <a:noFill/>
+          <a:ln/>
+        </p:spPr>
+        <p:txBody>
+          <a:bodyPr wrap="square" lIns="0" tIns="0" rIns="0" bIns="0" rtlCol="0" anchor="t"/>
+          <a:lstStyle/>
+          <a:p>
+            <a:pPr algn="l" indent="0" marL="0">
+              <a:spcAft>
+                <a:spcPts val="533"/>
+              </a:spcAft>
+              <a:buNone/>
+            </a:pPr>
+            <a:r>
+              <a:rPr lang="en-US" sz="1333" dirty="0">
+                <a:solidFill>
+                  <a:srgbClr val="8FA6C4"/>
+                </a:solidFill>
+                <a:latin typeface="Pretendard" pitchFamily="34" charset="0"/>
+                <a:ea typeface="Pretendard" pitchFamily="34" charset="-122"/>
+                <a:cs typeface="Pretendard" pitchFamily="34" charset="-120"/>
+              </a:rPr>
+              <a:t>일자</a:t>
+            </a:r>
+            <a:endParaRPr lang="en-US" sz="1333" dirty="0"/>
+          </a:p>
+        </p:txBody>
+      </p:sp>
+      <p:sp>
+        <p:nvSpPr>
+          <p:cNvPr id="11" name="Text 9"/>
+          <p:cNvSpPr/>
+          <p:nvPr/>
+        </p:nvSpPr>
+        <p:spPr>
+          <a:xfrm>
+            <a:off x="2462986" y="6108700"/>
+            <a:ext cx="932455" cy="241300"/>
+          </a:xfrm>
+          <a:prstGeom prst="rect">
+            <a:avLst/>
+          </a:prstGeom>
+          <a:noFill/>
+          <a:ln/>
+        </p:spPr>
+        <p:txBody>
+          <a:bodyPr wrap="square" lIns="0" tIns="0" rIns="0" bIns="0" rtlCol="0" anchor="t"/>
+          <a:lstStyle/>
+          <a:p>
+            <a:pPr algn="l" indent="0" marL="0">
+              <a:buNone/>
+            </a:pPr>
+            <a:r>
+              <a:rPr lang="en-US" sz="1600" b="1" dirty="0">
+                <a:solidFill>
+                  <a:srgbClr val="E8F1FB"/>
+                </a:solidFill>
+                <a:latin typeface="Pretendard" pitchFamily="34" charset="0"/>
+                <a:ea typeface="Pretendard" pitchFamily="34" charset="-122"/>
+                <a:cs typeface="Pretendard" pitchFamily="34" charset="-120"/>
+              </a:rPr>
+              <a:t>2026. 08</a:t>
+            </a:r>
+            <a:endParaRPr lang="en-US" sz="1600" dirty="0"/>
+          </a:p>
+        </p:txBody>
+      </p:sp>
+      <p:sp>
+        <p:nvSpPr>
+          <p:cNvPr id="12" name="Text 10"/>
+          <p:cNvSpPr/>
+          <p:nvPr/>
+        </p:nvSpPr>
+        <p:spPr>
+          <a:xfrm>
+            <a:off x="4155830" y="5837833"/>
+            <a:ext cx="958356" cy="203200"/>
+          </a:xfrm>
+          <a:prstGeom prst="rect">
+            <a:avLst/>
+          </a:prstGeom>
+          <a:noFill/>
+          <a:ln/>
+        </p:spPr>
+        <p:txBody>
+          <a:bodyPr wrap="square" lIns="0" tIns="0" rIns="0" bIns="0" rtlCol="0" anchor="t"/>
+          <a:lstStyle/>
+          <a:p>
+            <a:pPr algn="l" indent="0" marL="0">
+              <a:spcAft>
+                <a:spcPts val="533"/>
+              </a:spcAft>
+              <a:buNone/>
+            </a:pPr>
+            <a:r>
+              <a:rPr lang="en-US" sz="1333" dirty="0">
+                <a:solidFill>
+                  <a:srgbClr val="8FA6C4"/>
+                </a:solidFill>
+                <a:latin typeface="Pretendard" pitchFamily="34" charset="0"/>
+                <a:ea typeface="Pretendard" pitchFamily="34" charset="-122"/>
+                <a:cs typeface="Pretendard" pitchFamily="34" charset="-120"/>
+              </a:rPr>
+              <a:t>구분</a:t>
+            </a:r>
+            <a:endParaRPr lang="en-US" sz="1333" dirty="0"/>
+          </a:p>
+        </p:txBody>
+      </p:sp>
+      <p:sp>
+        <p:nvSpPr>
+          <p:cNvPr id="13" name="Text 11"/>
+          <p:cNvSpPr/>
+          <p:nvPr/>
+        </p:nvSpPr>
+        <p:spPr>
+          <a:xfrm>
+            <a:off x="4155830" y="6108700"/>
+            <a:ext cx="958356" cy="241300"/>
+          </a:xfrm>
+          <a:prstGeom prst="rect">
+            <a:avLst/>
+          </a:prstGeom>
+          <a:noFill/>
+          <a:ln/>
+        </p:spPr>
+        <p:txBody>
+          <a:bodyPr wrap="square" lIns="0" tIns="0" rIns="0" bIns="0" rtlCol="0" anchor="t"/>
+          <a:lstStyle/>
+          <a:p>
+            <a:pPr algn="l" indent="0" marL="0">
+              <a:buNone/>
+            </a:pPr>
+            <a:r>
+              <a:rPr lang="en-US" sz="1600" b="1" dirty="0">
+                <a:solidFill>
+                  <a:srgbClr val="E8F1FB"/>
+                </a:solidFill>
+                <a:latin typeface="Pretendard" pitchFamily="34" charset="0"/>
+                <a:ea typeface="Pretendard" pitchFamily="34" charset="-122"/>
+                <a:cs typeface="Pretendard" pitchFamily="34" charset="-120"/>
+              </a:rPr>
+              <a:t>사내 공유용</a:t>
+            </a:r>
+            <a:endParaRPr lang="en-US" sz="1600" dirty="0"/>
+          </a:p>
+        </p:txBody>
+      </p:sp>
     </p:spTree>
   </p:cSld>
   <p:clrMapOvr>
@@ -1259,6 +1714,13 @@
 <file path=ppt/slides/slide2.xml><?xml version="1.0" encoding="utf-8"?>
 <p:sld xmlns:a="http://schemas.openxmlformats.org/drawingml/2006/main" xmlns:r="http://schemas.openxmlformats.org/officeDocument/2006/relationships" xmlns:p="http://schemas.openxmlformats.org/presentationml/2006/main">
   <p:cSld name="Slide 2">
+    <p:bg>
+      <p:bgPr>
+        <a:solidFill>
+          <a:srgbClr val="FFFFFF"/>
+        </a:solidFill>
+      </p:bgPr>
+    </p:bg>
     <p:spTree>
       <p:nvGrpSpPr>
         <p:cNvPr id="1" name=""/>
@@ -1273,30 +1735,1113 @@
           <a:chExt cx="0" cy="0"/>
         </a:xfrm>
       </p:grpSpPr>
-      <p:pic>
-        <p:nvPicPr>
-          <p:cNvPr id="2" name="Image 0" descr="/tmp/slide-1787841980877-pnol26j9c8g.png">    </p:cNvPr>
-          <p:cNvPicPr>
-            <a:picLocks noChangeAspect="1"/>
-          </p:cNvPicPr>
-          <p:nvPr/>
-        </p:nvPicPr>
-        <p:blipFill>
-          <a:blip r:embed="rId1"/>
-          <a:stretch>
-            <a:fillRect/>
-          </a:stretch>
-        </p:blipFill>
+      <p:sp>
+        <p:nvSpPr>
+          <p:cNvPr id="2" name="Text 0"/>
+          <p:cNvSpPr/>
+          <p:nvPr/>
+        </p:nvSpPr>
         <p:spPr>
           <a:xfrm>
             <a:off x="0" y="0"/>
-            <a:ext cx="12188952" cy="6858000"/>
-          </a:xfrm>
-          <a:prstGeom prst="rect">
-            <a:avLst/>
-          </a:prstGeom>
-        </p:spPr>
-      </p:pic>
+            <a:ext cx="12188952" cy="822920"/>
+          </a:xfrm>
+          <a:prstGeom prst="rect">
+            <a:avLst/>
+          </a:prstGeom>
+          <a:solidFill>
+            <a:srgbClr val="0B2C5C"/>
+          </a:solidFill>
+          <a:ln/>
+        </p:spPr>
+        <p:txBody>
+          <a:bodyPr wrap="square" rtlCol="0" anchor="ctr"/>
+          <a:lstStyle/>
+          <a:p>
+            <a:pPr indent="0" marL="0">
+              <a:buNone/>
+            </a:pPr>
+            <a:endParaRPr lang="en-US" dirty="0"/>
+          </a:p>
+        </p:txBody>
+      </p:sp>
+      <p:sp>
+        <p:nvSpPr>
+          <p:cNvPr id="3" name="Text 1"/>
+          <p:cNvSpPr/>
+          <p:nvPr/>
+        </p:nvSpPr>
+        <p:spPr>
+          <a:xfrm>
+            <a:off x="643174" y="191294"/>
+            <a:ext cx="440024" cy="440134"/>
+          </a:xfrm>
+          <a:prstGeom prst="rect">
+            <a:avLst/>
+          </a:prstGeom>
+          <a:solidFill>
+            <a:srgbClr val="1B66C9"/>
+          </a:solidFill>
+          <a:ln/>
+        </p:spPr>
+        <p:txBody>
+          <a:bodyPr wrap="square" rtlCol="0" anchor="ctr"/>
+          <a:lstStyle/>
+          <a:p>
+            <a:pPr indent="0" marL="0">
+              <a:buNone/>
+            </a:pPr>
+            <a:endParaRPr lang="en-US" dirty="0"/>
+          </a:p>
+        </p:txBody>
+      </p:sp>
+      <p:sp>
+        <p:nvSpPr>
+          <p:cNvPr id="4" name="Text 2"/>
+          <p:cNvSpPr/>
+          <p:nvPr/>
+        </p:nvSpPr>
+        <p:spPr>
+          <a:xfrm>
+            <a:off x="736217" y="284361"/>
+            <a:ext cx="259015" cy="254000"/>
+          </a:xfrm>
+          <a:prstGeom prst="rect">
+            <a:avLst/>
+          </a:prstGeom>
+          <a:noFill/>
+          <a:ln/>
+        </p:spPr>
+        <p:txBody>
+          <a:bodyPr wrap="square" lIns="0" tIns="0" rIns="0" bIns="0" rtlCol="0" anchor="t"/>
+          <a:lstStyle/>
+          <a:p>
+            <a:pPr algn="l" indent="0" marL="0">
+              <a:buNone/>
+            </a:pPr>
+            <a:r>
+              <a:rPr lang="en-US" sz="1733" b="1" dirty="0">
+                <a:solidFill>
+                  <a:srgbClr val="FFFFFF"/>
+                </a:solidFill>
+                <a:latin typeface="Pretendard" pitchFamily="34" charset="0"/>
+                <a:ea typeface="Pretendard" pitchFamily="34" charset="-122"/>
+                <a:cs typeface="Pretendard" pitchFamily="34" charset="-120"/>
+              </a:rPr>
+              <a:t>01</a:t>
+            </a:r>
+            <a:endParaRPr lang="en-US" sz="1733" dirty="0"/>
+          </a:p>
+        </p:txBody>
+      </p:sp>
+      <p:sp>
+        <p:nvSpPr>
+          <p:cNvPr id="5" name="Text 3"/>
+          <p:cNvSpPr/>
+          <p:nvPr/>
+        </p:nvSpPr>
+        <p:spPr>
+          <a:xfrm>
+            <a:off x="1303210" y="189111"/>
+            <a:ext cx="3327941" cy="444500"/>
+          </a:xfrm>
+          <a:prstGeom prst="rect">
+            <a:avLst/>
+          </a:prstGeom>
+          <a:noFill/>
+          <a:ln/>
+        </p:spPr>
+        <p:txBody>
+          <a:bodyPr wrap="square" lIns="0" tIns="0" rIns="0" bIns="0" rtlCol="0" anchor="t"/>
+          <a:lstStyle/>
+          <a:p>
+            <a:pPr algn="l" indent="0" marL="0">
+              <a:buNone/>
+            </a:pPr>
+            <a:r>
+              <a:rPr lang="en-US" sz="2933" b="1" dirty="0">
+                <a:solidFill>
+                  <a:srgbClr val="FFFFFF"/>
+                </a:solidFill>
+                <a:latin typeface="Pretendard" pitchFamily="34" charset="0"/>
+                <a:ea typeface="Pretendard" pitchFamily="34" charset="-122"/>
+                <a:cs typeface="Pretendard" pitchFamily="34" charset="-120"/>
+              </a:rPr>
+              <a:t>지금 무엇이 달라졌는가</a:t>
+            </a:r>
+            <a:endParaRPr lang="en-US" sz="2933" dirty="0"/>
+          </a:p>
+        </p:txBody>
+      </p:sp>
+      <p:sp>
+        <p:nvSpPr>
+          <p:cNvPr id="6" name="Text 4"/>
+          <p:cNvSpPr/>
+          <p:nvPr/>
+        </p:nvSpPr>
+        <p:spPr>
+          <a:xfrm>
+            <a:off x="11304539" y="297061"/>
+            <a:ext cx="246064" cy="228600"/>
+          </a:xfrm>
+          <a:prstGeom prst="rect">
+            <a:avLst/>
+          </a:prstGeom>
+          <a:noFill/>
+          <a:ln/>
+        </p:spPr>
+        <p:txBody>
+          <a:bodyPr wrap="square" lIns="0" tIns="0" rIns="0" bIns="0" rtlCol="0" anchor="t"/>
+          <a:lstStyle/>
+          <a:p>
+            <a:pPr algn="l" indent="0" marL="0">
+              <a:buNone/>
+            </a:pPr>
+            <a:r>
+              <a:rPr lang="en-US" sz="1466" b="1" dirty="0">
+                <a:solidFill>
+                  <a:srgbClr val="8FA6C4"/>
+                </a:solidFill>
+                <a:latin typeface="Pretendard" pitchFamily="34" charset="0"/>
+                <a:ea typeface="Pretendard" pitchFamily="34" charset="-122"/>
+                <a:cs typeface="Pretendard" pitchFamily="34" charset="-120"/>
+              </a:rPr>
+              <a:t>02</a:t>
+            </a:r>
+            <a:endParaRPr lang="en-US" sz="1466" dirty="0"/>
+          </a:p>
+        </p:txBody>
+      </p:sp>
+      <p:sp>
+        <p:nvSpPr>
+          <p:cNvPr id="7" name="Text 5"/>
+          <p:cNvSpPr/>
+          <p:nvPr/>
+        </p:nvSpPr>
+        <p:spPr>
+          <a:xfrm>
+            <a:off x="643174" y="1296789"/>
+            <a:ext cx="406298" cy="406400"/>
+          </a:xfrm>
+          <a:prstGeom prst="rect">
+            <a:avLst/>
+          </a:prstGeom>
+          <a:solidFill>
+            <a:srgbClr val="1B66C9"/>
+          </a:solidFill>
+          <a:ln/>
+        </p:spPr>
+        <p:txBody>
+          <a:bodyPr wrap="square" rtlCol="0" anchor="ctr"/>
+          <a:lstStyle/>
+          <a:p>
+            <a:pPr indent="0" marL="0">
+              <a:buNone/>
+            </a:pPr>
+            <a:endParaRPr lang="en-US" dirty="0"/>
+          </a:p>
+        </p:txBody>
+      </p:sp>
+      <p:sp>
+        <p:nvSpPr>
+          <p:cNvPr id="8" name="Text 6"/>
+          <p:cNvSpPr/>
+          <p:nvPr/>
+        </p:nvSpPr>
+        <p:spPr>
+          <a:xfrm>
+            <a:off x="738400" y="1385689"/>
+            <a:ext cx="220163" cy="228600"/>
+          </a:xfrm>
+          <a:prstGeom prst="rect">
+            <a:avLst/>
+          </a:prstGeom>
+          <a:noFill/>
+          <a:ln/>
+        </p:spPr>
+        <p:txBody>
+          <a:bodyPr wrap="square" lIns="0" tIns="0" rIns="0" bIns="0" rtlCol="0" anchor="t"/>
+          <a:lstStyle/>
+          <a:p>
+            <a:pPr algn="l" indent="0" marL="0">
+              <a:buNone/>
+            </a:pPr>
+            <a:r>
+              <a:rPr lang="en-US" sz="1466" b="1" dirty="0">
+                <a:solidFill>
+                  <a:srgbClr val="FFFFFF"/>
+                </a:solidFill>
+                <a:latin typeface="Pretendard" pitchFamily="34" charset="0"/>
+                <a:ea typeface="Pretendard" pitchFamily="34" charset="-122"/>
+                <a:cs typeface="Pretendard" pitchFamily="34" charset="-120"/>
+              </a:rPr>
+              <a:t>01</a:t>
+            </a:r>
+            <a:endParaRPr lang="en-US" sz="1466" dirty="0"/>
+          </a:p>
+        </p:txBody>
+      </p:sp>
+      <p:sp>
+        <p:nvSpPr>
+          <p:cNvPr id="9" name="Text 7"/>
+          <p:cNvSpPr/>
+          <p:nvPr/>
+        </p:nvSpPr>
+        <p:spPr>
+          <a:xfrm>
+            <a:off x="643174" y="1940123"/>
+            <a:ext cx="3326929" cy="381000"/>
+          </a:xfrm>
+          <a:prstGeom prst="rect">
+            <a:avLst/>
+          </a:prstGeom>
+          <a:noFill/>
+          <a:ln/>
+        </p:spPr>
+        <p:txBody>
+          <a:bodyPr wrap="square" lIns="0" tIns="0" rIns="0" bIns="0" rtlCol="0" anchor="t"/>
+          <a:lstStyle/>
+          <a:p>
+            <a:pPr algn="l" indent="0" marL="0">
+              <a:spcAft>
+                <a:spcPts val="1200"/>
+              </a:spcAft>
+              <a:buNone/>
+            </a:pPr>
+            <a:r>
+              <a:rPr lang="en-US" sz="2533" b="1" dirty="0">
+                <a:solidFill>
+                  <a:srgbClr val="0B2C5C"/>
+                </a:solidFill>
+                <a:latin typeface="Pretendard" pitchFamily="34" charset="0"/>
+                <a:ea typeface="Pretendard" pitchFamily="34" charset="-122"/>
+                <a:cs typeface="Pretendard" pitchFamily="34" charset="-120"/>
+              </a:rPr>
+              <a:t>도구에서 동료로</a:t>
+            </a:r>
+            <a:endParaRPr lang="en-US" sz="2533" dirty="0"/>
+          </a:p>
+        </p:txBody>
+      </p:sp>
+      <p:sp>
+        <p:nvSpPr>
+          <p:cNvPr id="10" name="Text 8"/>
+          <p:cNvSpPr/>
+          <p:nvPr/>
+        </p:nvSpPr>
+        <p:spPr>
+          <a:xfrm>
+            <a:off x="643174" y="2473523"/>
+            <a:ext cx="3326929" cy="1234083"/>
+          </a:xfrm>
+          <a:prstGeom prst="rect">
+            <a:avLst/>
+          </a:prstGeom>
+          <a:noFill/>
+          <a:ln/>
+        </p:spPr>
+        <p:txBody>
+          <a:bodyPr wrap="square" lIns="0" tIns="0" rIns="0" bIns="0" rtlCol="0" anchor="t"/>
+          <a:lstStyle/>
+          <a:p>
+            <a:pPr algn="l" indent="0" marL="0">
+              <a:lnSpc>
+                <a:spcPts val="3240"/>
+              </a:lnSpc>
+              <a:buNone/>
+            </a:pPr>
+            <a:r>
+              <a:rPr lang="en-US" sz="2000" dirty="0">
+                <a:solidFill>
+                  <a:srgbClr val="5C6470"/>
+                </a:solidFill>
+                <a:latin typeface="Pretendard" pitchFamily="34" charset="0"/>
+                <a:ea typeface="Pretendard" pitchFamily="34" charset="-122"/>
+                <a:cs typeface="Pretendard" pitchFamily="34" charset="-120"/>
+              </a:rPr>
+              <a:t>결과물을 제안하는 단계를 넘어, 정해진 절차를 스스로 수행하는 단계로 이동한다.</a:t>
+            </a:r>
+            <a:endParaRPr lang="en-US" sz="2000" dirty="0"/>
+          </a:p>
+        </p:txBody>
+      </p:sp>
+      <p:sp>
+        <p:nvSpPr>
+          <p:cNvPr id="11" name="Shape 9"/>
+          <p:cNvSpPr/>
+          <p:nvPr/>
+        </p:nvSpPr>
+        <p:spPr>
+          <a:xfrm>
+            <a:off x="643174" y="3916958"/>
+            <a:ext cx="3261695" cy="0"/>
+          </a:xfrm>
+          <a:prstGeom prst="line">
+            <a:avLst/>
+          </a:prstGeom>
+          <a:noFill/>
+          <a:ln w="12698">
+            <a:solidFill>
+              <a:srgbClr val="C5D2E3"/>
+            </a:solidFill>
+            <a:prstDash val="solid"/>
+          </a:ln>
+        </p:spPr>
+      </p:sp>
+      <p:sp>
+        <p:nvSpPr>
+          <p:cNvPr id="12" name="Text 10"/>
+          <p:cNvSpPr/>
+          <p:nvPr/>
+        </p:nvSpPr>
+        <p:spPr>
+          <a:xfrm>
+            <a:off x="643174" y="4109442"/>
+            <a:ext cx="3326929" cy="284361"/>
+          </a:xfrm>
+          <a:prstGeom prst="rect">
+            <a:avLst/>
+          </a:prstGeom>
+          <a:noFill/>
+          <a:ln/>
+        </p:spPr>
+        <p:txBody>
+          <a:bodyPr wrap="square" lIns="0" tIns="0" rIns="0" bIns="0" rtlCol="0" anchor="t"/>
+          <a:lstStyle/>
+          <a:p>
+            <a:pPr algn="l" indent="0" marL="0">
+              <a:lnSpc>
+                <a:spcPts val="2240"/>
+              </a:lnSpc>
+              <a:spcAft>
+                <a:spcPts val="400"/>
+              </a:spcAft>
+              <a:buNone/>
+            </a:pPr>
+            <a:r>
+              <a:rPr lang="en-US" sz="1600" dirty="0">
+                <a:solidFill>
+                  <a:srgbClr val="5C6470"/>
+                </a:solidFill>
+                <a:latin typeface="Pretendard" pitchFamily="34" charset="0"/>
+                <a:ea typeface="Pretendard" pitchFamily="34" charset="-122"/>
+                <a:cs typeface="Pretendard" pitchFamily="34" charset="-120"/>
+              </a:rPr>
+              <a:t>이동 방향</a:t>
+            </a:r>
+            <a:endParaRPr lang="en-US" sz="1600" dirty="0"/>
+          </a:p>
+        </p:txBody>
+      </p:sp>
+      <p:sp>
+        <p:nvSpPr>
+          <p:cNvPr id="13" name="Text 11"/>
+          <p:cNvSpPr/>
+          <p:nvPr/>
+        </p:nvSpPr>
+        <p:spPr>
+          <a:xfrm>
+            <a:off x="643174" y="4444603"/>
+            <a:ext cx="3326929" cy="284361"/>
+          </a:xfrm>
+          <a:prstGeom prst="rect">
+            <a:avLst/>
+          </a:prstGeom>
+          <a:noFill/>
+          <a:ln/>
+        </p:spPr>
+        <p:txBody>
+          <a:bodyPr wrap="square" lIns="0" tIns="0" rIns="0" bIns="0" rtlCol="0" anchor="t"/>
+          <a:lstStyle/>
+          <a:p>
+            <a:pPr algn="l" indent="0" marL="0">
+              <a:lnSpc>
+                <a:spcPts val="2240"/>
+              </a:lnSpc>
+              <a:buNone/>
+            </a:pPr>
+            <a:r>
+              <a:rPr lang="en-US" sz="1600" b="1" dirty="0">
+                <a:solidFill>
+                  <a:srgbClr val="0B2C5C"/>
+                </a:solidFill>
+                <a:latin typeface="Pretendard" pitchFamily="34" charset="0"/>
+                <a:ea typeface="Pretendard" pitchFamily="34" charset="-122"/>
+                <a:cs typeface="Pretendard" pitchFamily="34" charset="-120"/>
+              </a:rPr>
+              <a:t>초안 보조 → 절차 실행</a:t>
+            </a:r>
+            <a:endParaRPr lang="en-US" sz="1600" dirty="0"/>
+          </a:p>
+        </p:txBody>
+      </p:sp>
+      <p:sp>
+        <p:nvSpPr>
+          <p:cNvPr id="14" name="Shape 12"/>
+          <p:cNvSpPr/>
+          <p:nvPr/>
+        </p:nvSpPr>
+        <p:spPr>
+          <a:xfrm>
+            <a:off x="4283591" y="1263055"/>
+            <a:ext cx="0" cy="3465909"/>
+          </a:xfrm>
+          <a:prstGeom prst="line">
+            <a:avLst/>
+          </a:prstGeom>
+          <a:noFill/>
+          <a:ln w="12698">
+            <a:solidFill>
+              <a:srgbClr val="C5D2E3"/>
+            </a:solidFill>
+            <a:prstDash val="solid"/>
+          </a:ln>
+        </p:spPr>
+      </p:sp>
+      <p:sp>
+        <p:nvSpPr>
+          <p:cNvPr id="15" name="Text 13"/>
+          <p:cNvSpPr/>
+          <p:nvPr/>
+        </p:nvSpPr>
+        <p:spPr>
+          <a:xfrm>
+            <a:off x="4662314" y="1296789"/>
+            <a:ext cx="406298" cy="406400"/>
+          </a:xfrm>
+          <a:prstGeom prst="rect">
+            <a:avLst/>
+          </a:prstGeom>
+          <a:solidFill>
+            <a:srgbClr val="1B66C9"/>
+          </a:solidFill>
+          <a:ln/>
+        </p:spPr>
+        <p:txBody>
+          <a:bodyPr wrap="square" rtlCol="0" anchor="ctr"/>
+          <a:lstStyle/>
+          <a:p>
+            <a:pPr indent="0" marL="0">
+              <a:buNone/>
+            </a:pPr>
+            <a:endParaRPr lang="en-US" dirty="0"/>
+          </a:p>
+        </p:txBody>
+      </p:sp>
+      <p:sp>
+        <p:nvSpPr>
+          <p:cNvPr id="16" name="Text 14"/>
+          <p:cNvSpPr/>
+          <p:nvPr/>
+        </p:nvSpPr>
+        <p:spPr>
+          <a:xfrm>
+            <a:off x="4744843" y="1385689"/>
+            <a:ext cx="246064" cy="228600"/>
+          </a:xfrm>
+          <a:prstGeom prst="rect">
+            <a:avLst/>
+          </a:prstGeom>
+          <a:noFill/>
+          <a:ln/>
+        </p:spPr>
+        <p:txBody>
+          <a:bodyPr wrap="square" lIns="0" tIns="0" rIns="0" bIns="0" rtlCol="0" anchor="t"/>
+          <a:lstStyle/>
+          <a:p>
+            <a:pPr algn="l" indent="0" marL="0">
+              <a:buNone/>
+            </a:pPr>
+            <a:r>
+              <a:rPr lang="en-US" sz="1466" b="1" dirty="0">
+                <a:solidFill>
+                  <a:srgbClr val="FFFFFF"/>
+                </a:solidFill>
+                <a:latin typeface="Pretendard" pitchFamily="34" charset="0"/>
+                <a:ea typeface="Pretendard" pitchFamily="34" charset="-122"/>
+                <a:cs typeface="Pretendard" pitchFamily="34" charset="-120"/>
+              </a:rPr>
+              <a:t>02</a:t>
+            </a:r>
+            <a:endParaRPr lang="en-US" sz="1466" dirty="0"/>
+          </a:p>
+        </p:txBody>
+      </p:sp>
+      <p:sp>
+        <p:nvSpPr>
+          <p:cNvPr id="17" name="Text 15"/>
+          <p:cNvSpPr/>
+          <p:nvPr/>
+        </p:nvSpPr>
+        <p:spPr>
+          <a:xfrm>
+            <a:off x="4662314" y="1940123"/>
+            <a:ext cx="2934157" cy="381000"/>
+          </a:xfrm>
+          <a:prstGeom prst="rect">
+            <a:avLst/>
+          </a:prstGeom>
+          <a:noFill/>
+          <a:ln/>
+        </p:spPr>
+        <p:txBody>
+          <a:bodyPr wrap="square" lIns="0" tIns="0" rIns="0" bIns="0" rtlCol="0" anchor="t"/>
+          <a:lstStyle/>
+          <a:p>
+            <a:pPr algn="l" indent="0" marL="0">
+              <a:spcAft>
+                <a:spcPts val="1200"/>
+              </a:spcAft>
+              <a:buNone/>
+            </a:pPr>
+            <a:r>
+              <a:rPr lang="en-US" sz="2533" b="1" dirty="0">
+                <a:solidFill>
+                  <a:srgbClr val="0B2C5C"/>
+                </a:solidFill>
+                <a:latin typeface="Pretendard" pitchFamily="34" charset="0"/>
+                <a:ea typeface="Pretendard" pitchFamily="34" charset="-122"/>
+                <a:cs typeface="Pretendard" pitchFamily="34" charset="-120"/>
+              </a:rPr>
+              <a:t>문서에서 프로세스로</a:t>
+            </a:r>
+            <a:endParaRPr lang="en-US" sz="2533" dirty="0"/>
+          </a:p>
+        </p:txBody>
+      </p:sp>
+      <p:sp>
+        <p:nvSpPr>
+          <p:cNvPr id="18" name="Text 16"/>
+          <p:cNvSpPr/>
+          <p:nvPr/>
+        </p:nvSpPr>
+        <p:spPr>
+          <a:xfrm>
+            <a:off x="4662314" y="2473523"/>
+            <a:ext cx="2934157" cy="1234083"/>
+          </a:xfrm>
+          <a:prstGeom prst="rect">
+            <a:avLst/>
+          </a:prstGeom>
+          <a:noFill/>
+          <a:ln/>
+        </p:spPr>
+        <p:txBody>
+          <a:bodyPr wrap="square" lIns="0" tIns="0" rIns="0" bIns="0" rtlCol="0" anchor="t"/>
+          <a:lstStyle/>
+          <a:p>
+            <a:pPr algn="l" indent="0" marL="0">
+              <a:lnSpc>
+                <a:spcPts val="3240"/>
+              </a:lnSpc>
+              <a:buNone/>
+            </a:pPr>
+            <a:r>
+              <a:rPr lang="en-US" sz="2000" dirty="0">
+                <a:solidFill>
+                  <a:srgbClr val="5C6470"/>
+                </a:solidFill>
+                <a:latin typeface="Pretendard" pitchFamily="34" charset="0"/>
+                <a:ea typeface="Pretendard" pitchFamily="34" charset="-122"/>
+                <a:cs typeface="Pretendard" pitchFamily="34" charset="-120"/>
+              </a:rPr>
+              <a:t>자동화 대상이 문서 한 건에서 조회·승인·보고로 이어지는 흐름 전체로 넓어진다.</a:t>
+            </a:r>
+            <a:endParaRPr lang="en-US" sz="2000" dirty="0"/>
+          </a:p>
+        </p:txBody>
+      </p:sp>
+      <p:sp>
+        <p:nvSpPr>
+          <p:cNvPr id="19" name="Shape 17"/>
+          <p:cNvSpPr/>
+          <p:nvPr/>
+        </p:nvSpPr>
+        <p:spPr>
+          <a:xfrm>
+            <a:off x="4662314" y="3916958"/>
+            <a:ext cx="2876624" cy="0"/>
+          </a:xfrm>
+          <a:prstGeom prst="line">
+            <a:avLst/>
+          </a:prstGeom>
+          <a:noFill/>
+          <a:ln w="12698">
+            <a:solidFill>
+              <a:srgbClr val="C5D2E3"/>
+            </a:solidFill>
+            <a:prstDash val="solid"/>
+          </a:ln>
+        </p:spPr>
+      </p:sp>
+      <p:sp>
+        <p:nvSpPr>
+          <p:cNvPr id="20" name="Text 18"/>
+          <p:cNvSpPr/>
+          <p:nvPr/>
+        </p:nvSpPr>
+        <p:spPr>
+          <a:xfrm>
+            <a:off x="4662314" y="4109442"/>
+            <a:ext cx="2934157" cy="284361"/>
+          </a:xfrm>
+          <a:prstGeom prst="rect">
+            <a:avLst/>
+          </a:prstGeom>
+          <a:noFill/>
+          <a:ln/>
+        </p:spPr>
+        <p:txBody>
+          <a:bodyPr wrap="square" lIns="0" tIns="0" rIns="0" bIns="0" rtlCol="0" anchor="t"/>
+          <a:lstStyle/>
+          <a:p>
+            <a:pPr algn="l" indent="0" marL="0">
+              <a:lnSpc>
+                <a:spcPts val="2240"/>
+              </a:lnSpc>
+              <a:spcAft>
+                <a:spcPts val="400"/>
+              </a:spcAft>
+              <a:buNone/>
+            </a:pPr>
+            <a:r>
+              <a:rPr lang="en-US" sz="1600" dirty="0">
+                <a:solidFill>
+                  <a:srgbClr val="5C6470"/>
+                </a:solidFill>
+                <a:latin typeface="Pretendard" pitchFamily="34" charset="0"/>
+                <a:ea typeface="Pretendard" pitchFamily="34" charset="-122"/>
+                <a:cs typeface="Pretendard" pitchFamily="34" charset="-120"/>
+              </a:rPr>
+              <a:t>이동 방향</a:t>
+            </a:r>
+            <a:endParaRPr lang="en-US" sz="1600" dirty="0"/>
+          </a:p>
+        </p:txBody>
+      </p:sp>
+      <p:sp>
+        <p:nvSpPr>
+          <p:cNvPr id="21" name="Text 19"/>
+          <p:cNvSpPr/>
+          <p:nvPr/>
+        </p:nvSpPr>
+        <p:spPr>
+          <a:xfrm>
+            <a:off x="4662314" y="4444603"/>
+            <a:ext cx="2934157" cy="284361"/>
+          </a:xfrm>
+          <a:prstGeom prst="rect">
+            <a:avLst/>
+          </a:prstGeom>
+          <a:noFill/>
+          <a:ln/>
+        </p:spPr>
+        <p:txBody>
+          <a:bodyPr wrap="square" lIns="0" tIns="0" rIns="0" bIns="0" rtlCol="0" anchor="t"/>
+          <a:lstStyle/>
+          <a:p>
+            <a:pPr algn="l" indent="0" marL="0">
+              <a:lnSpc>
+                <a:spcPts val="2240"/>
+              </a:lnSpc>
+              <a:buNone/>
+            </a:pPr>
+            <a:r>
+              <a:rPr lang="en-US" sz="1600" b="1" dirty="0">
+                <a:solidFill>
+                  <a:srgbClr val="0B2C5C"/>
+                </a:solidFill>
+                <a:latin typeface="Pretendard" pitchFamily="34" charset="0"/>
+                <a:ea typeface="Pretendard" pitchFamily="34" charset="-122"/>
+                <a:cs typeface="Pretendard" pitchFamily="34" charset="-120"/>
+              </a:rPr>
+              <a:t>문서 한 건 → 업무 흐름</a:t>
+            </a:r>
+            <a:endParaRPr lang="en-US" sz="1600" dirty="0"/>
+          </a:p>
+        </p:txBody>
+      </p:sp>
+      <p:sp>
+        <p:nvSpPr>
+          <p:cNvPr id="22" name="Shape 20"/>
+          <p:cNvSpPr/>
+          <p:nvPr/>
+        </p:nvSpPr>
+        <p:spPr>
+          <a:xfrm>
+            <a:off x="7917661" y="1263055"/>
+            <a:ext cx="0" cy="3465909"/>
+          </a:xfrm>
+          <a:prstGeom prst="line">
+            <a:avLst/>
+          </a:prstGeom>
+          <a:noFill/>
+          <a:ln w="12698">
+            <a:solidFill>
+              <a:srgbClr val="C5D2E3"/>
+            </a:solidFill>
+            <a:prstDash val="solid"/>
+          </a:ln>
+        </p:spPr>
+      </p:sp>
+      <p:sp>
+        <p:nvSpPr>
+          <p:cNvPr id="23" name="Text 21"/>
+          <p:cNvSpPr/>
+          <p:nvPr/>
+        </p:nvSpPr>
+        <p:spPr>
+          <a:xfrm>
+            <a:off x="8296383" y="1296789"/>
+            <a:ext cx="406298" cy="406400"/>
+          </a:xfrm>
+          <a:prstGeom prst="rect">
+            <a:avLst/>
+          </a:prstGeom>
+          <a:solidFill>
+            <a:srgbClr val="1B66C9"/>
+          </a:solidFill>
+          <a:ln/>
+        </p:spPr>
+        <p:txBody>
+          <a:bodyPr wrap="square" rtlCol="0" anchor="ctr"/>
+          <a:lstStyle/>
+          <a:p>
+            <a:pPr indent="0" marL="0">
+              <a:buNone/>
+            </a:pPr>
+            <a:endParaRPr lang="en-US" dirty="0"/>
+          </a:p>
+        </p:txBody>
+      </p:sp>
+      <p:sp>
+        <p:nvSpPr>
+          <p:cNvPr id="24" name="Text 22"/>
+          <p:cNvSpPr/>
+          <p:nvPr/>
+        </p:nvSpPr>
+        <p:spPr>
+          <a:xfrm>
+            <a:off x="8378913" y="1385689"/>
+            <a:ext cx="246064" cy="228600"/>
+          </a:xfrm>
+          <a:prstGeom prst="rect">
+            <a:avLst/>
+          </a:prstGeom>
+          <a:noFill/>
+          <a:ln/>
+        </p:spPr>
+        <p:txBody>
+          <a:bodyPr wrap="square" lIns="0" tIns="0" rIns="0" bIns="0" rtlCol="0" anchor="t"/>
+          <a:lstStyle/>
+          <a:p>
+            <a:pPr algn="l" indent="0" marL="0">
+              <a:buNone/>
+            </a:pPr>
+            <a:r>
+              <a:rPr lang="en-US" sz="1466" b="1" dirty="0">
+                <a:solidFill>
+                  <a:srgbClr val="FFFFFF"/>
+                </a:solidFill>
+                <a:latin typeface="Pretendard" pitchFamily="34" charset="0"/>
+                <a:ea typeface="Pretendard" pitchFamily="34" charset="-122"/>
+                <a:cs typeface="Pretendard" pitchFamily="34" charset="-120"/>
+              </a:rPr>
+              <a:t>03</a:t>
+            </a:r>
+            <a:endParaRPr lang="en-US" sz="1466" dirty="0"/>
+          </a:p>
+        </p:txBody>
+      </p:sp>
+      <p:sp>
+        <p:nvSpPr>
+          <p:cNvPr id="25" name="Text 23"/>
+          <p:cNvSpPr/>
+          <p:nvPr/>
+        </p:nvSpPr>
+        <p:spPr>
+          <a:xfrm>
+            <a:off x="8296383" y="1940123"/>
+            <a:ext cx="3313978" cy="381000"/>
+          </a:xfrm>
+          <a:prstGeom prst="rect">
+            <a:avLst/>
+          </a:prstGeom>
+          <a:noFill/>
+          <a:ln/>
+        </p:spPr>
+        <p:txBody>
+          <a:bodyPr wrap="square" lIns="0" tIns="0" rIns="0" bIns="0" rtlCol="0" anchor="t"/>
+          <a:lstStyle/>
+          <a:p>
+            <a:pPr algn="l" indent="0" marL="0">
+              <a:spcAft>
+                <a:spcPts val="1200"/>
+              </a:spcAft>
+              <a:buNone/>
+            </a:pPr>
+            <a:r>
+              <a:rPr lang="en-US" sz="2533" b="1" dirty="0">
+                <a:solidFill>
+                  <a:srgbClr val="0B2C5C"/>
+                </a:solidFill>
+                <a:latin typeface="Pretendard" pitchFamily="34" charset="0"/>
+                <a:ea typeface="Pretendard" pitchFamily="34" charset="-122"/>
+                <a:cs typeface="Pretendard" pitchFamily="34" charset="-120"/>
+              </a:rPr>
+              <a:t>IT에서 현업으로</a:t>
+            </a:r>
+            <a:endParaRPr lang="en-US" sz="2533" dirty="0"/>
+          </a:p>
+        </p:txBody>
+      </p:sp>
+      <p:sp>
+        <p:nvSpPr>
+          <p:cNvPr id="26" name="Text 24"/>
+          <p:cNvSpPr/>
+          <p:nvPr/>
+        </p:nvSpPr>
+        <p:spPr>
+          <a:xfrm>
+            <a:off x="8296383" y="2473523"/>
+            <a:ext cx="3313978" cy="1234083"/>
+          </a:xfrm>
+          <a:prstGeom prst="rect">
+            <a:avLst/>
+          </a:prstGeom>
+          <a:noFill/>
+          <a:ln/>
+        </p:spPr>
+        <p:txBody>
+          <a:bodyPr wrap="square" lIns="0" tIns="0" rIns="0" bIns="0" rtlCol="0" anchor="t"/>
+          <a:lstStyle/>
+          <a:p>
+            <a:pPr algn="l" indent="0" marL="0">
+              <a:lnSpc>
+                <a:spcPts val="3240"/>
+              </a:lnSpc>
+              <a:buNone/>
+            </a:pPr>
+            <a:r>
+              <a:rPr lang="en-US" sz="2000" dirty="0">
+                <a:solidFill>
+                  <a:srgbClr val="5C6470"/>
+                </a:solidFill>
+                <a:latin typeface="Pretendard" pitchFamily="34" charset="0"/>
+                <a:ea typeface="Pretendard" pitchFamily="34" charset="-122"/>
+                <a:cs typeface="Pretendard" pitchFamily="34" charset="-120"/>
+              </a:rPr>
+              <a:t>자동화를 만드는 주체가 개발 조직에서 업무를 가장 잘 아는 담당자로 옮겨간다.</a:t>
+            </a:r>
+            <a:endParaRPr lang="en-US" sz="2000" dirty="0"/>
+          </a:p>
+        </p:txBody>
+      </p:sp>
+      <p:sp>
+        <p:nvSpPr>
+          <p:cNvPr id="27" name="Shape 25"/>
+          <p:cNvSpPr/>
+          <p:nvPr/>
+        </p:nvSpPr>
+        <p:spPr>
+          <a:xfrm>
+            <a:off x="8296383" y="3916958"/>
+            <a:ext cx="3248998" cy="0"/>
+          </a:xfrm>
+          <a:prstGeom prst="line">
+            <a:avLst/>
+          </a:prstGeom>
+          <a:noFill/>
+          <a:ln w="12698">
+            <a:solidFill>
+              <a:srgbClr val="C5D2E3"/>
+            </a:solidFill>
+            <a:prstDash val="solid"/>
+          </a:ln>
+        </p:spPr>
+      </p:sp>
+      <p:sp>
+        <p:nvSpPr>
+          <p:cNvPr id="28" name="Text 26"/>
+          <p:cNvSpPr/>
+          <p:nvPr/>
+        </p:nvSpPr>
+        <p:spPr>
+          <a:xfrm>
+            <a:off x="8296383" y="4109442"/>
+            <a:ext cx="3313978" cy="284361"/>
+          </a:xfrm>
+          <a:prstGeom prst="rect">
+            <a:avLst/>
+          </a:prstGeom>
+          <a:noFill/>
+          <a:ln/>
+        </p:spPr>
+        <p:txBody>
+          <a:bodyPr wrap="square" lIns="0" tIns="0" rIns="0" bIns="0" rtlCol="0" anchor="t"/>
+          <a:lstStyle/>
+          <a:p>
+            <a:pPr algn="l" indent="0" marL="0">
+              <a:lnSpc>
+                <a:spcPts val="2240"/>
+              </a:lnSpc>
+              <a:spcAft>
+                <a:spcPts val="400"/>
+              </a:spcAft>
+              <a:buNone/>
+            </a:pPr>
+            <a:r>
+              <a:rPr lang="en-US" sz="1600" dirty="0">
+                <a:solidFill>
+                  <a:srgbClr val="5C6470"/>
+                </a:solidFill>
+                <a:latin typeface="Pretendard" pitchFamily="34" charset="0"/>
+                <a:ea typeface="Pretendard" pitchFamily="34" charset="-122"/>
+                <a:cs typeface="Pretendard" pitchFamily="34" charset="-120"/>
+              </a:rPr>
+              <a:t>이동 방향</a:t>
+            </a:r>
+            <a:endParaRPr lang="en-US" sz="1600" dirty="0"/>
+          </a:p>
+        </p:txBody>
+      </p:sp>
+      <p:sp>
+        <p:nvSpPr>
+          <p:cNvPr id="29" name="Text 27"/>
+          <p:cNvSpPr/>
+          <p:nvPr/>
+        </p:nvSpPr>
+        <p:spPr>
+          <a:xfrm>
+            <a:off x="8296383" y="4444603"/>
+            <a:ext cx="3313978" cy="284361"/>
+          </a:xfrm>
+          <a:prstGeom prst="rect">
+            <a:avLst/>
+          </a:prstGeom>
+          <a:noFill/>
+          <a:ln/>
+        </p:spPr>
+        <p:txBody>
+          <a:bodyPr wrap="square" lIns="0" tIns="0" rIns="0" bIns="0" rtlCol="0" anchor="t"/>
+          <a:lstStyle/>
+          <a:p>
+            <a:pPr algn="l" indent="0" marL="0">
+              <a:lnSpc>
+                <a:spcPts val="2240"/>
+              </a:lnSpc>
+              <a:buNone/>
+            </a:pPr>
+            <a:r>
+              <a:rPr lang="en-US" sz="1600" b="1" dirty="0">
+                <a:solidFill>
+                  <a:srgbClr val="0B2C5C"/>
+                </a:solidFill>
+                <a:latin typeface="Pretendard" pitchFamily="34" charset="0"/>
+                <a:ea typeface="Pretendard" pitchFamily="34" charset="-122"/>
+                <a:cs typeface="Pretendard" pitchFamily="34" charset="-120"/>
+              </a:rPr>
+              <a:t>개발 요청 → 현업 구성</a:t>
+            </a:r>
+            <a:endParaRPr lang="en-US" sz="1600" dirty="0"/>
+          </a:p>
+        </p:txBody>
+      </p:sp>
+      <p:sp>
+        <p:nvSpPr>
+          <p:cNvPr id="30" name="Text 28"/>
+          <p:cNvSpPr/>
+          <p:nvPr/>
+        </p:nvSpPr>
+        <p:spPr>
+          <a:xfrm>
+            <a:off x="643174" y="5135364"/>
+            <a:ext cx="10902605" cy="842169"/>
+          </a:xfrm>
+          <a:prstGeom prst="rect">
+            <a:avLst/>
+          </a:prstGeom>
+          <a:solidFill>
+            <a:srgbClr val="E8F1FB"/>
+          </a:solidFill>
+          <a:ln/>
+        </p:spPr>
+        <p:txBody>
+          <a:bodyPr wrap="square" rtlCol="0" anchor="ctr"/>
+          <a:lstStyle/>
+          <a:p>
+            <a:pPr indent="0" marL="0">
+              <a:buNone/>
+            </a:pPr>
+            <a:endParaRPr lang="en-US" dirty="0"/>
+          </a:p>
+        </p:txBody>
+      </p:sp>
+      <p:sp>
+        <p:nvSpPr>
+          <p:cNvPr id="31" name="Shape 29"/>
+          <p:cNvSpPr/>
+          <p:nvPr/>
+        </p:nvSpPr>
+        <p:spPr>
+          <a:xfrm>
+            <a:off x="668567" y="5135364"/>
+            <a:ext cx="0" cy="842169"/>
+          </a:xfrm>
+          <a:prstGeom prst="line">
+            <a:avLst/>
+          </a:prstGeom>
+          <a:noFill/>
+          <a:ln w="50794">
+            <a:solidFill>
+              <a:srgbClr val="1B66C9"/>
+            </a:solidFill>
+            <a:prstDash val="solid"/>
+          </a:ln>
+        </p:spPr>
+      </p:sp>
+      <p:sp>
+        <p:nvSpPr>
+          <p:cNvPr id="32" name="Text 30"/>
+          <p:cNvSpPr/>
+          <p:nvPr/>
+        </p:nvSpPr>
+        <p:spPr>
+          <a:xfrm>
+            <a:off x="998685" y="5372298"/>
+            <a:ext cx="10447217" cy="368300"/>
+          </a:xfrm>
+          <a:prstGeom prst="rect">
+            <a:avLst/>
+          </a:prstGeom>
+          <a:noFill/>
+          <a:ln/>
+        </p:spPr>
+        <p:txBody>
+          <a:bodyPr wrap="square" lIns="0" tIns="0" rIns="0" bIns="0" rtlCol="0" anchor="t"/>
+          <a:lstStyle/>
+          <a:p>
+            <a:pPr algn="l" indent="0" marL="0">
+              <a:lnSpc>
+                <a:spcPts val="2900"/>
+              </a:lnSpc>
+              <a:buNone/>
+            </a:pPr>
+            <a:r>
+              <a:rPr lang="en-US" sz="2000" b="1" dirty="0">
+                <a:solidFill>
+                  <a:srgbClr val="0B2C5C"/>
+                </a:solidFill>
+                <a:latin typeface="Pretendard" pitchFamily="34" charset="0"/>
+                <a:ea typeface="Pretendard" pitchFamily="34" charset="-122"/>
+                <a:cs typeface="Pretendard" pitchFamily="34" charset="-120"/>
+              </a:rPr>
+              <a:t>질문이 바뀌었다. “AI가 무엇을 할 수 있는가”가 아니라 “어떤 업무를 맡길 것인가”.</a:t>
+            </a:r>
+            <a:endParaRPr lang="en-US" sz="2000" dirty="0"/>
+          </a:p>
+        </p:txBody>
+      </p:sp>
     </p:spTree>
   </p:cSld>
   <p:clrMapOvr>
@@ -1308,6 +2853,13 @@
 <file path=ppt/slides/slide3.xml><?xml version="1.0" encoding="utf-8"?>
 <p:sld xmlns:a="http://schemas.openxmlformats.org/drawingml/2006/main" xmlns:r="http://schemas.openxmlformats.org/officeDocument/2006/relationships" xmlns:p="http://schemas.openxmlformats.org/presentationml/2006/main">
   <p:cSld name="Slide 3">
+    <p:bg>
+      <p:bgPr>
+        <a:solidFill>
+          <a:srgbClr val="FFFFFF"/>
+        </a:solidFill>
+      </p:bgPr>
+    </p:bg>
     <p:spTree>
       <p:nvGrpSpPr>
         <p:cNvPr id="1" name=""/>
@@ -1322,30 +2874,1215 @@
           <a:chExt cx="0" cy="0"/>
         </a:xfrm>
       </p:grpSpPr>
+      <p:sp>
+        <p:nvSpPr>
+          <p:cNvPr id="2" name="Text 0"/>
+          <p:cNvSpPr/>
+          <p:nvPr/>
+        </p:nvSpPr>
+        <p:spPr>
+          <a:xfrm>
+            <a:off x="0" y="0"/>
+            <a:ext cx="12188952" cy="822920"/>
+          </a:xfrm>
+          <a:prstGeom prst="rect">
+            <a:avLst/>
+          </a:prstGeom>
+          <a:solidFill>
+            <a:srgbClr val="0B2C5C"/>
+          </a:solidFill>
+          <a:ln/>
+        </p:spPr>
+        <p:txBody>
+          <a:bodyPr wrap="square" rtlCol="0" anchor="ctr"/>
+          <a:lstStyle/>
+          <a:p>
+            <a:pPr indent="0" marL="0">
+              <a:buNone/>
+            </a:pPr>
+            <a:endParaRPr lang="en-US" dirty="0"/>
+          </a:p>
+        </p:txBody>
+      </p:sp>
+      <p:sp>
+        <p:nvSpPr>
+          <p:cNvPr id="3" name="Text 1"/>
+          <p:cNvSpPr/>
+          <p:nvPr/>
+        </p:nvSpPr>
+        <p:spPr>
+          <a:xfrm>
+            <a:off x="643174" y="191294"/>
+            <a:ext cx="440024" cy="440134"/>
+          </a:xfrm>
+          <a:prstGeom prst="rect">
+            <a:avLst/>
+          </a:prstGeom>
+          <a:solidFill>
+            <a:srgbClr val="1B66C9"/>
+          </a:solidFill>
+          <a:ln/>
+        </p:spPr>
+        <p:txBody>
+          <a:bodyPr wrap="square" rtlCol="0" anchor="ctr"/>
+          <a:lstStyle/>
+          <a:p>
+            <a:pPr indent="0" marL="0">
+              <a:buNone/>
+            </a:pPr>
+            <a:endParaRPr lang="en-US" dirty="0"/>
+          </a:p>
+        </p:txBody>
+      </p:sp>
+      <p:sp>
+        <p:nvSpPr>
+          <p:cNvPr id="4" name="Text 2"/>
+          <p:cNvSpPr/>
+          <p:nvPr/>
+        </p:nvSpPr>
+        <p:spPr>
+          <a:xfrm>
+            <a:off x="717172" y="284361"/>
+            <a:ext cx="297868" cy="254000"/>
+          </a:xfrm>
+          <a:prstGeom prst="rect">
+            <a:avLst/>
+          </a:prstGeom>
+          <a:noFill/>
+          <a:ln/>
+        </p:spPr>
+        <p:txBody>
+          <a:bodyPr wrap="square" lIns="0" tIns="0" rIns="0" bIns="0" rtlCol="0" anchor="t"/>
+          <a:lstStyle/>
+          <a:p>
+            <a:pPr algn="l" indent="0" marL="0">
+              <a:buNone/>
+            </a:pPr>
+            <a:r>
+              <a:rPr lang="en-US" sz="1733" b="1" dirty="0">
+                <a:solidFill>
+                  <a:srgbClr val="FFFFFF"/>
+                </a:solidFill>
+                <a:latin typeface="Pretendard" pitchFamily="34" charset="0"/>
+                <a:ea typeface="Pretendard" pitchFamily="34" charset="-122"/>
+                <a:cs typeface="Pretendard" pitchFamily="34" charset="-120"/>
+              </a:rPr>
+              <a:t>02</a:t>
+            </a:r>
+            <a:endParaRPr lang="en-US" sz="1733" dirty="0"/>
+          </a:p>
+        </p:txBody>
+      </p:sp>
+      <p:sp>
+        <p:nvSpPr>
+          <p:cNvPr id="5" name="Text 3"/>
+          <p:cNvSpPr/>
+          <p:nvPr/>
+        </p:nvSpPr>
+        <p:spPr>
+          <a:xfrm>
+            <a:off x="1303210" y="189111"/>
+            <a:ext cx="4584974" cy="444500"/>
+          </a:xfrm>
+          <a:prstGeom prst="rect">
+            <a:avLst/>
+          </a:prstGeom>
+          <a:noFill/>
+          <a:ln/>
+        </p:spPr>
+        <p:txBody>
+          <a:bodyPr wrap="square" lIns="0" tIns="0" rIns="0" bIns="0" rtlCol="0" anchor="t"/>
+          <a:lstStyle/>
+          <a:p>
+            <a:pPr algn="l" indent="0" marL="0">
+              <a:buNone/>
+            </a:pPr>
+            <a:r>
+              <a:rPr lang="en-US" sz="2933" b="1" dirty="0">
+                <a:solidFill>
+                  <a:srgbClr val="FFFFFF"/>
+                </a:solidFill>
+                <a:latin typeface="Pretendard" pitchFamily="34" charset="0"/>
+                <a:ea typeface="Pretendard" pitchFamily="34" charset="-122"/>
+                <a:cs typeface="Pretendard" pitchFamily="34" charset="-120"/>
+              </a:rPr>
+              <a:t>업무 자동화는 3단계로 성숙한다</a:t>
+            </a:r>
+            <a:endParaRPr lang="en-US" sz="2933" dirty="0"/>
+          </a:p>
+        </p:txBody>
+      </p:sp>
+      <p:sp>
+        <p:nvSpPr>
+          <p:cNvPr id="6" name="Text 4"/>
+          <p:cNvSpPr/>
+          <p:nvPr/>
+        </p:nvSpPr>
+        <p:spPr>
+          <a:xfrm>
+            <a:off x="11304539" y="297061"/>
+            <a:ext cx="246064" cy="228600"/>
+          </a:xfrm>
+          <a:prstGeom prst="rect">
+            <a:avLst/>
+          </a:prstGeom>
+          <a:noFill/>
+          <a:ln/>
+        </p:spPr>
+        <p:txBody>
+          <a:bodyPr wrap="square" lIns="0" tIns="0" rIns="0" bIns="0" rtlCol="0" anchor="t"/>
+          <a:lstStyle/>
+          <a:p>
+            <a:pPr algn="l" indent="0" marL="0">
+              <a:buNone/>
+            </a:pPr>
+            <a:r>
+              <a:rPr lang="en-US" sz="1466" b="1" dirty="0">
+                <a:solidFill>
+                  <a:srgbClr val="8FA6C4"/>
+                </a:solidFill>
+                <a:latin typeface="Pretendard" pitchFamily="34" charset="0"/>
+                <a:ea typeface="Pretendard" pitchFamily="34" charset="-122"/>
+                <a:cs typeface="Pretendard" pitchFamily="34" charset="-120"/>
+              </a:rPr>
+              <a:t>03</a:t>
+            </a:r>
+            <a:endParaRPr lang="en-US" sz="1466" dirty="0"/>
+          </a:p>
+        </p:txBody>
+      </p:sp>
+      <p:sp>
+        <p:nvSpPr>
+          <p:cNvPr id="7" name="Text 5"/>
+          <p:cNvSpPr/>
+          <p:nvPr/>
+        </p:nvSpPr>
+        <p:spPr>
+          <a:xfrm>
+            <a:off x="643174" y="1229320"/>
+            <a:ext cx="3282923" cy="3567509"/>
+          </a:xfrm>
+          <a:prstGeom prst="rect">
+            <a:avLst/>
+          </a:prstGeom>
+          <a:solidFill>
+            <a:srgbClr val="FFFFFF"/>
+          </a:solidFill>
+          <a:ln w="12698">
+            <a:solidFill>
+              <a:srgbClr val="C5D2E3"/>
+            </a:solidFill>
+          </a:ln>
+        </p:spPr>
+        <p:txBody>
+          <a:bodyPr wrap="square" rtlCol="0" anchor="ctr"/>
+          <a:lstStyle/>
+          <a:p>
+            <a:pPr indent="0" marL="0">
+              <a:buNone/>
+            </a:pPr>
+            <a:endParaRPr lang="en-US" dirty="0"/>
+          </a:p>
+        </p:txBody>
+      </p:sp>
+      <p:sp>
+        <p:nvSpPr>
+          <p:cNvPr id="8" name="Text 6"/>
+          <p:cNvSpPr/>
+          <p:nvPr/>
+        </p:nvSpPr>
+        <p:spPr>
+          <a:xfrm>
+            <a:off x="926670" y="1546820"/>
+            <a:ext cx="372374" cy="372467"/>
+          </a:xfrm>
+          <a:prstGeom prst="rect">
+            <a:avLst/>
+          </a:prstGeom>
+          <a:solidFill>
+            <a:srgbClr val="1B66C9"/>
+          </a:solidFill>
+          <a:ln/>
+        </p:spPr>
+        <p:txBody>
+          <a:bodyPr wrap="square" rtlCol="0" anchor="ctr"/>
+          <a:lstStyle/>
+          <a:p>
+            <a:pPr indent="0" marL="0">
+              <a:buNone/>
+            </a:pPr>
+            <a:endParaRPr lang="en-US" dirty="0"/>
+          </a:p>
+        </p:txBody>
+      </p:sp>
+      <p:sp>
+        <p:nvSpPr>
+          <p:cNvPr id="9" name="Text 7"/>
+          <p:cNvSpPr/>
+          <p:nvPr/>
+        </p:nvSpPr>
+        <p:spPr>
+          <a:xfrm>
+            <a:off x="1004835" y="1618655"/>
+            <a:ext cx="220163" cy="228600"/>
+          </a:xfrm>
+          <a:prstGeom prst="rect">
+            <a:avLst/>
+          </a:prstGeom>
+          <a:noFill/>
+          <a:ln/>
+        </p:spPr>
+        <p:txBody>
+          <a:bodyPr wrap="square" lIns="0" tIns="0" rIns="0" bIns="0" rtlCol="0" anchor="t"/>
+          <a:lstStyle/>
+          <a:p>
+            <a:pPr algn="l" indent="0" marL="0">
+              <a:buNone/>
+            </a:pPr>
+            <a:r>
+              <a:rPr lang="en-US" sz="1466" b="1" dirty="0">
+                <a:solidFill>
+                  <a:srgbClr val="FFFFFF"/>
+                </a:solidFill>
+                <a:latin typeface="Pretendard" pitchFamily="34" charset="0"/>
+                <a:ea typeface="Pretendard" pitchFamily="34" charset="-122"/>
+                <a:cs typeface="Pretendard" pitchFamily="34" charset="-120"/>
+              </a:rPr>
+              <a:t>01</a:t>
+            </a:r>
+            <a:endParaRPr lang="en-US" sz="1466" dirty="0"/>
+          </a:p>
+        </p:txBody>
+      </p:sp>
+      <p:sp>
+        <p:nvSpPr>
+          <p:cNvPr id="10" name="Text 8"/>
+          <p:cNvSpPr/>
+          <p:nvPr/>
+        </p:nvSpPr>
+        <p:spPr>
+          <a:xfrm>
+            <a:off x="926670" y="2105422"/>
+            <a:ext cx="2770249" cy="342900"/>
+          </a:xfrm>
+          <a:prstGeom prst="rect">
+            <a:avLst/>
+          </a:prstGeom>
+          <a:noFill/>
+          <a:ln/>
+        </p:spPr>
+        <p:txBody>
+          <a:bodyPr wrap="square" lIns="0" tIns="0" rIns="0" bIns="0" rtlCol="0" anchor="t"/>
+          <a:lstStyle/>
+          <a:p>
+            <a:pPr algn="l" indent="0" marL="0">
+              <a:spcAft>
+                <a:spcPts val="1067"/>
+              </a:spcAft>
+              <a:buNone/>
+            </a:pPr>
+            <a:r>
+              <a:rPr lang="en-US" sz="2266" b="1" dirty="0">
+                <a:solidFill>
+                  <a:srgbClr val="0B2C5C"/>
+                </a:solidFill>
+                <a:latin typeface="Pretendard" pitchFamily="34" charset="0"/>
+                <a:ea typeface="Pretendard" pitchFamily="34" charset="-122"/>
+                <a:cs typeface="Pretendard" pitchFamily="34" charset="-120"/>
+              </a:rPr>
+              <a:t>보조</a:t>
+            </a:r>
+            <a:endParaRPr lang="en-US" sz="2266" dirty="0"/>
+          </a:p>
+        </p:txBody>
+      </p:sp>
+      <p:sp>
+        <p:nvSpPr>
+          <p:cNvPr id="11" name="Text 9"/>
+          <p:cNvSpPr/>
+          <p:nvPr/>
+        </p:nvSpPr>
+        <p:spPr>
+          <a:xfrm>
+            <a:off x="926670" y="2583656"/>
+            <a:ext cx="2770249" cy="1303139"/>
+          </a:xfrm>
+          <a:prstGeom prst="rect">
+            <a:avLst/>
+          </a:prstGeom>
+          <a:noFill/>
+          <a:ln/>
+        </p:spPr>
+        <p:txBody>
+          <a:bodyPr wrap="square" lIns="0" tIns="0" rIns="0" bIns="0" rtlCol="0" anchor="t"/>
+          <a:lstStyle/>
+          <a:p>
+            <a:pPr algn="l" indent="0" marL="0">
+              <a:lnSpc>
+                <a:spcPts val="2800"/>
+              </a:lnSpc>
+              <a:buNone/>
+            </a:pPr>
+            <a:r>
+              <a:rPr lang="en-US" sz="1866" dirty="0">
+                <a:solidFill>
+                  <a:srgbClr val="5C6470"/>
+                </a:solidFill>
+                <a:latin typeface="Pretendard" pitchFamily="34" charset="0"/>
+                <a:ea typeface="Pretendard" pitchFamily="34" charset="-122"/>
+                <a:cs typeface="Pretendard" pitchFamily="34" charset="-120"/>
+              </a:rPr>
+              <a:t>사람이 실행하고 AI가 초안과 검색을 돕는다. 산출물의 책임은 사람에게 있다.</a:t>
+            </a:r>
+            <a:endParaRPr lang="en-US" sz="1866" dirty="0"/>
+          </a:p>
+        </p:txBody>
+      </p:sp>
+      <p:sp>
+        <p:nvSpPr>
+          <p:cNvPr id="12" name="Shape 10"/>
+          <p:cNvSpPr/>
+          <p:nvPr/>
+        </p:nvSpPr>
+        <p:spPr>
+          <a:xfrm>
+            <a:off x="926670" y="4079280"/>
+            <a:ext cx="2715930" cy="0"/>
+          </a:xfrm>
+          <a:prstGeom prst="line">
+            <a:avLst/>
+          </a:prstGeom>
+          <a:noFill/>
+          <a:ln w="12698">
+            <a:solidFill>
+              <a:srgbClr val="C5D2E3"/>
+            </a:solidFill>
+            <a:prstDash val="solid"/>
+          </a:ln>
+        </p:spPr>
+      </p:sp>
+      <p:sp>
+        <p:nvSpPr>
+          <p:cNvPr id="13" name="Text 11"/>
+          <p:cNvSpPr/>
+          <p:nvPr/>
+        </p:nvSpPr>
+        <p:spPr>
+          <a:xfrm>
+            <a:off x="926670" y="4238030"/>
+            <a:ext cx="2770249" cy="241300"/>
+          </a:xfrm>
+          <a:prstGeom prst="rect">
+            <a:avLst/>
+          </a:prstGeom>
+          <a:noFill/>
+          <a:ln/>
+        </p:spPr>
+        <p:txBody>
+          <a:bodyPr wrap="square" lIns="0" tIns="0" rIns="0" bIns="0" rtlCol="0" anchor="t"/>
+          <a:lstStyle/>
+          <a:p>
+            <a:pPr algn="l" indent="0" marL="0">
+              <a:buNone/>
+            </a:pPr>
+            <a:r>
+              <a:rPr lang="en-US" sz="1600" dirty="0">
+                <a:solidFill>
+                  <a:srgbClr val="5C6470"/>
+                </a:solidFill>
+                <a:latin typeface="Pretendard" pitchFamily="34" charset="0"/>
+                <a:ea typeface="Pretendard" pitchFamily="34" charset="-122"/>
+                <a:cs typeface="Pretendard" pitchFamily="34" charset="-120"/>
+              </a:rPr>
+              <a:t>사람의 역할</a:t>
+            </a:r>
+            <a:pPr algn="l" indent="0" marL="0">
+              <a:buNone/>
+            </a:pPr>
+            <a:r>
+              <a:rPr lang="en-US" sz="1600" dirty="0">
+                <a:solidFill>
+                  <a:srgbClr val="0B2C5C"/>
+                </a:solidFill>
+                <a:latin typeface="Pretendard" pitchFamily="34" charset="0"/>
+                <a:ea typeface="Pretendard" pitchFamily="34" charset="-122"/>
+                <a:cs typeface="Pretendard" pitchFamily="34" charset="-120"/>
+              </a:rPr>
+              <a:t>실행자</a:t>
+            </a:r>
+            <a:endParaRPr lang="en-US" sz="1600" dirty="0"/>
+          </a:p>
+        </p:txBody>
+      </p:sp>
       <p:pic>
         <p:nvPicPr>
-          <p:cNvPr id="2" name="Image 0" descr="/tmp/slide-1787841981320-nb42ptrsam.png">    </p:cNvPr>
+          <p:cNvPr id="14" name="Image 0" descr="preencoded.png">    </p:cNvPr>
           <p:cNvPicPr>
             <a:picLocks noChangeAspect="1"/>
           </p:cNvPicPr>
           <p:nvPr/>
         </p:nvPicPr>
         <p:blipFill>
-          <a:blip r:embed="rId1"/>
+          <a:blip r:embed="rId1">
+            <a:extLst>
+              <a:ext uri="{96DAC541-7B7A-43D3-8B79-37D633B846F1}">
+                <asvg:svgBlip xmlns:asvg="http://schemas.microsoft.com/office/drawing/2016/SVG/main" r:embed="rId2"/>
+              </a:ext>
+            </a:extLst>
+          </a:blip>
           <a:stretch>
             <a:fillRect/>
           </a:stretch>
         </p:blipFill>
         <p:spPr>
           <a:xfrm>
-            <a:off x="0" y="0"/>
-            <a:ext cx="12188952" cy="6858000"/>
+            <a:off x="3926096" y="2911475"/>
+            <a:ext cx="507873" cy="203200"/>
           </a:xfrm>
           <a:prstGeom prst="rect">
             <a:avLst/>
           </a:prstGeom>
         </p:spPr>
       </p:pic>
+      <p:sp>
+        <p:nvSpPr>
+          <p:cNvPr id="15" name="Text 12"/>
+          <p:cNvSpPr/>
+          <p:nvPr/>
+        </p:nvSpPr>
+        <p:spPr>
+          <a:xfrm>
+            <a:off x="4433969" y="1229320"/>
+            <a:ext cx="3321013" cy="3567509"/>
+          </a:xfrm>
+          <a:prstGeom prst="rect">
+            <a:avLst/>
+          </a:prstGeom>
+          <a:solidFill>
+            <a:srgbClr val="E8F1FB"/>
+          </a:solidFill>
+          <a:ln/>
+        </p:spPr>
+        <p:txBody>
+          <a:bodyPr wrap="square" rtlCol="0" anchor="ctr"/>
+          <a:lstStyle/>
+          <a:p>
+            <a:pPr indent="0" marL="0">
+              <a:buNone/>
+            </a:pPr>
+            <a:endParaRPr lang="en-US" dirty="0"/>
+          </a:p>
+        </p:txBody>
+      </p:sp>
+      <p:sp>
+        <p:nvSpPr>
+          <p:cNvPr id="16" name="Shape 13"/>
+          <p:cNvSpPr/>
+          <p:nvPr/>
+        </p:nvSpPr>
+        <p:spPr>
+          <a:xfrm>
+            <a:off x="4433969" y="1235670"/>
+            <a:ext cx="3321013" cy="0"/>
+          </a:xfrm>
+          <a:prstGeom prst="line">
+            <a:avLst/>
+          </a:prstGeom>
+          <a:noFill/>
+          <a:ln w="12698">
+            <a:solidFill>
+              <a:srgbClr val="C5D2E3"/>
+            </a:solidFill>
+            <a:prstDash val="solid"/>
+          </a:ln>
+        </p:spPr>
+      </p:sp>
+      <p:sp>
+        <p:nvSpPr>
+          <p:cNvPr id="17" name="Shape 14"/>
+          <p:cNvSpPr/>
+          <p:nvPr/>
+        </p:nvSpPr>
+        <p:spPr>
+          <a:xfrm>
+            <a:off x="7748634" y="1229320"/>
+            <a:ext cx="0" cy="3567509"/>
+          </a:xfrm>
+          <a:prstGeom prst="line">
+            <a:avLst/>
+          </a:prstGeom>
+          <a:noFill/>
+          <a:ln w="12698">
+            <a:solidFill>
+              <a:srgbClr val="C5D2E3"/>
+            </a:solidFill>
+            <a:prstDash val="solid"/>
+          </a:ln>
+        </p:spPr>
+      </p:sp>
+      <p:sp>
+        <p:nvSpPr>
+          <p:cNvPr id="18" name="Shape 15"/>
+          <p:cNvSpPr/>
+          <p:nvPr/>
+        </p:nvSpPr>
+        <p:spPr>
+          <a:xfrm>
+            <a:off x="4433969" y="4790480"/>
+            <a:ext cx="3321013" cy="0"/>
+          </a:xfrm>
+          <a:prstGeom prst="line">
+            <a:avLst/>
+          </a:prstGeom>
+          <a:noFill/>
+          <a:ln w="12698">
+            <a:solidFill>
+              <a:srgbClr val="C5D2E3"/>
+            </a:solidFill>
+            <a:prstDash val="solid"/>
+          </a:ln>
+        </p:spPr>
+      </p:sp>
+      <p:sp>
+        <p:nvSpPr>
+          <p:cNvPr id="19" name="Shape 16"/>
+          <p:cNvSpPr/>
+          <p:nvPr/>
+        </p:nvSpPr>
+        <p:spPr>
+          <a:xfrm>
+            <a:off x="4459363" y="1229320"/>
+            <a:ext cx="0" cy="3567509"/>
+          </a:xfrm>
+          <a:prstGeom prst="line">
+            <a:avLst/>
+          </a:prstGeom>
+          <a:noFill/>
+          <a:ln w="50794">
+            <a:solidFill>
+              <a:srgbClr val="1B66C9"/>
+            </a:solidFill>
+            <a:prstDash val="solid"/>
+          </a:ln>
+        </p:spPr>
+      </p:sp>
+      <p:sp>
+        <p:nvSpPr>
+          <p:cNvPr id="20" name="Text 17"/>
+          <p:cNvSpPr/>
+          <p:nvPr/>
+        </p:nvSpPr>
+        <p:spPr>
+          <a:xfrm>
+            <a:off x="4755556" y="1546820"/>
+            <a:ext cx="372374" cy="372467"/>
+          </a:xfrm>
+          <a:prstGeom prst="rect">
+            <a:avLst/>
+          </a:prstGeom>
+          <a:solidFill>
+            <a:srgbClr val="1B66C9"/>
+          </a:solidFill>
+          <a:ln/>
+        </p:spPr>
+        <p:txBody>
+          <a:bodyPr wrap="square" rtlCol="0" anchor="ctr"/>
+          <a:lstStyle/>
+          <a:p>
+            <a:pPr indent="0" marL="0">
+              <a:buNone/>
+            </a:pPr>
+            <a:endParaRPr lang="en-US" dirty="0"/>
+          </a:p>
+        </p:txBody>
+      </p:sp>
+      <p:sp>
+        <p:nvSpPr>
+          <p:cNvPr id="21" name="Text 18"/>
+          <p:cNvSpPr/>
+          <p:nvPr/>
+        </p:nvSpPr>
+        <p:spPr>
+          <a:xfrm>
+            <a:off x="4821024" y="1618655"/>
+            <a:ext cx="246064" cy="228600"/>
+          </a:xfrm>
+          <a:prstGeom prst="rect">
+            <a:avLst/>
+          </a:prstGeom>
+          <a:noFill/>
+          <a:ln/>
+        </p:spPr>
+        <p:txBody>
+          <a:bodyPr wrap="square" lIns="0" tIns="0" rIns="0" bIns="0" rtlCol="0" anchor="t"/>
+          <a:lstStyle/>
+          <a:p>
+            <a:pPr algn="l" indent="0" marL="0">
+              <a:buNone/>
+            </a:pPr>
+            <a:r>
+              <a:rPr lang="en-US" sz="1466" b="1" dirty="0">
+                <a:solidFill>
+                  <a:srgbClr val="FFFFFF"/>
+                </a:solidFill>
+                <a:latin typeface="Pretendard" pitchFamily="34" charset="0"/>
+                <a:ea typeface="Pretendard" pitchFamily="34" charset="-122"/>
+                <a:cs typeface="Pretendard" pitchFamily="34" charset="-120"/>
+              </a:rPr>
+              <a:t>02</a:t>
+            </a:r>
+            <a:endParaRPr lang="en-US" sz="1466" dirty="0"/>
+          </a:p>
+        </p:txBody>
+      </p:sp>
+      <p:sp>
+        <p:nvSpPr>
+          <p:cNvPr id="22" name="Text 19"/>
+          <p:cNvSpPr/>
+          <p:nvPr/>
+        </p:nvSpPr>
+        <p:spPr>
+          <a:xfrm>
+            <a:off x="4755556" y="2105422"/>
+            <a:ext cx="2770249" cy="342900"/>
+          </a:xfrm>
+          <a:prstGeom prst="rect">
+            <a:avLst/>
+          </a:prstGeom>
+          <a:noFill/>
+          <a:ln/>
+        </p:spPr>
+        <p:txBody>
+          <a:bodyPr wrap="square" lIns="0" tIns="0" rIns="0" bIns="0" rtlCol="0" anchor="t"/>
+          <a:lstStyle/>
+          <a:p>
+            <a:pPr algn="l" indent="0" marL="0">
+              <a:spcAft>
+                <a:spcPts val="1067"/>
+              </a:spcAft>
+              <a:buNone/>
+            </a:pPr>
+            <a:r>
+              <a:rPr lang="en-US" sz="2266" b="1" dirty="0">
+                <a:solidFill>
+                  <a:srgbClr val="0B2C5C"/>
+                </a:solidFill>
+                <a:latin typeface="Pretendard" pitchFamily="34" charset="0"/>
+                <a:ea typeface="Pretendard" pitchFamily="34" charset="-122"/>
+                <a:cs typeface="Pretendard" pitchFamily="34" charset="-120"/>
+              </a:rPr>
+              <a:t>위임</a:t>
+            </a:r>
+            <a:endParaRPr lang="en-US" sz="2266" dirty="0"/>
+          </a:p>
+        </p:txBody>
+      </p:sp>
+      <p:sp>
+        <p:nvSpPr>
+          <p:cNvPr id="23" name="Text 20"/>
+          <p:cNvSpPr/>
+          <p:nvPr/>
+        </p:nvSpPr>
+        <p:spPr>
+          <a:xfrm>
+            <a:off x="4755556" y="2583656"/>
+            <a:ext cx="2770249" cy="1303139"/>
+          </a:xfrm>
+          <a:prstGeom prst="rect">
+            <a:avLst/>
+          </a:prstGeom>
+          <a:noFill/>
+          <a:ln/>
+        </p:spPr>
+        <p:txBody>
+          <a:bodyPr wrap="square" lIns="0" tIns="0" rIns="0" bIns="0" rtlCol="0" anchor="t"/>
+          <a:lstStyle/>
+          <a:p>
+            <a:pPr algn="l" indent="0" marL="0">
+              <a:lnSpc>
+                <a:spcPts val="2800"/>
+              </a:lnSpc>
+              <a:buNone/>
+            </a:pPr>
+            <a:r>
+              <a:rPr lang="en-US" sz="1866" dirty="0">
+                <a:solidFill>
+                  <a:srgbClr val="5C6470"/>
+                </a:solidFill>
+                <a:latin typeface="Pretendard" pitchFamily="34" charset="0"/>
+                <a:ea typeface="Pretendard" pitchFamily="34" charset="-122"/>
+                <a:cs typeface="Pretendard" pitchFamily="34" charset="-120"/>
+              </a:rPr>
+              <a:t>절차가 고정된 업무를 AI가 실행하고, 사람이 결과를 검수한다.</a:t>
+            </a:r>
+            <a:endParaRPr lang="en-US" sz="1866" dirty="0"/>
+          </a:p>
+        </p:txBody>
+      </p:sp>
+      <p:sp>
+        <p:nvSpPr>
+          <p:cNvPr id="24" name="Shape 21"/>
+          <p:cNvSpPr/>
+          <p:nvPr/>
+        </p:nvSpPr>
+        <p:spPr>
+          <a:xfrm>
+            <a:off x="4755556" y="4079280"/>
+            <a:ext cx="2715930" cy="0"/>
+          </a:xfrm>
+          <a:prstGeom prst="line">
+            <a:avLst/>
+          </a:prstGeom>
+          <a:noFill/>
+          <a:ln w="12698">
+            <a:solidFill>
+              <a:srgbClr val="C5D2E3"/>
+            </a:solidFill>
+            <a:prstDash val="solid"/>
+          </a:ln>
+        </p:spPr>
+      </p:sp>
+      <p:sp>
+        <p:nvSpPr>
+          <p:cNvPr id="25" name="Text 22"/>
+          <p:cNvSpPr/>
+          <p:nvPr/>
+        </p:nvSpPr>
+        <p:spPr>
+          <a:xfrm>
+            <a:off x="4755556" y="4238030"/>
+            <a:ext cx="2770249" cy="241300"/>
+          </a:xfrm>
+          <a:prstGeom prst="rect">
+            <a:avLst/>
+          </a:prstGeom>
+          <a:noFill/>
+          <a:ln/>
+        </p:spPr>
+        <p:txBody>
+          <a:bodyPr wrap="square" lIns="0" tIns="0" rIns="0" bIns="0" rtlCol="0" anchor="t"/>
+          <a:lstStyle/>
+          <a:p>
+            <a:pPr algn="l" indent="0" marL="0">
+              <a:buNone/>
+            </a:pPr>
+            <a:r>
+              <a:rPr lang="en-US" sz="1600" dirty="0">
+                <a:solidFill>
+                  <a:srgbClr val="5C6470"/>
+                </a:solidFill>
+                <a:latin typeface="Pretendard" pitchFamily="34" charset="0"/>
+                <a:ea typeface="Pretendard" pitchFamily="34" charset="-122"/>
+                <a:cs typeface="Pretendard" pitchFamily="34" charset="-120"/>
+              </a:rPr>
+              <a:t>사람의 역할</a:t>
+            </a:r>
+            <a:pPr algn="l" indent="0" marL="0">
+              <a:buNone/>
+            </a:pPr>
+            <a:r>
+              <a:rPr lang="en-US" sz="1600" dirty="0">
+                <a:solidFill>
+                  <a:srgbClr val="0B2C5C"/>
+                </a:solidFill>
+                <a:latin typeface="Pretendard" pitchFamily="34" charset="0"/>
+                <a:ea typeface="Pretendard" pitchFamily="34" charset="-122"/>
+                <a:cs typeface="Pretendard" pitchFamily="34" charset="-120"/>
+              </a:rPr>
+              <a:t>검수자</a:t>
+            </a:r>
+            <a:endParaRPr lang="en-US" sz="1600" dirty="0"/>
+          </a:p>
+        </p:txBody>
+      </p:sp>
+      <p:pic>
+        <p:nvPicPr>
+          <p:cNvPr id="26" name="Image 1" descr="preencoded.png">    </p:cNvPr>
+          <p:cNvPicPr>
+            <a:picLocks noChangeAspect="1"/>
+          </p:cNvPicPr>
+          <p:nvPr/>
+        </p:nvPicPr>
+        <p:blipFill>
+          <a:blip r:embed="rId3">
+            <a:extLst>
+              <a:ext uri="{96DAC541-7B7A-43D3-8B79-37D633B846F1}">
+                <asvg:svgBlip xmlns:asvg="http://schemas.microsoft.com/office/drawing/2016/SVG/main" r:embed="rId4"/>
+              </a:ext>
+            </a:extLst>
+          </a:blip>
+          <a:stretch>
+            <a:fillRect/>
+          </a:stretch>
+        </p:blipFill>
+        <p:spPr>
+          <a:xfrm>
+            <a:off x="7754983" y="2911475"/>
+            <a:ext cx="507873" cy="203200"/>
+          </a:xfrm>
+          <a:prstGeom prst="rect">
+            <a:avLst/>
+          </a:prstGeom>
+        </p:spPr>
+      </p:pic>
+      <p:sp>
+        <p:nvSpPr>
+          <p:cNvPr id="27" name="Text 23"/>
+          <p:cNvSpPr/>
+          <p:nvPr/>
+        </p:nvSpPr>
+        <p:spPr>
+          <a:xfrm>
+            <a:off x="8262856" y="1229320"/>
+            <a:ext cx="3282923" cy="3567509"/>
+          </a:xfrm>
+          <a:prstGeom prst="rect">
+            <a:avLst/>
+          </a:prstGeom>
+          <a:solidFill>
+            <a:srgbClr val="FFFFFF"/>
+          </a:solidFill>
+          <a:ln w="12698">
+            <a:solidFill>
+              <a:srgbClr val="C5D2E3"/>
+            </a:solidFill>
+          </a:ln>
+        </p:spPr>
+        <p:txBody>
+          <a:bodyPr wrap="square" rtlCol="0" anchor="ctr"/>
+          <a:lstStyle/>
+          <a:p>
+            <a:pPr indent="0" marL="0">
+              <a:buNone/>
+            </a:pPr>
+            <a:endParaRPr lang="en-US" dirty="0"/>
+          </a:p>
+        </p:txBody>
+      </p:sp>
+      <p:sp>
+        <p:nvSpPr>
+          <p:cNvPr id="28" name="Text 24"/>
+          <p:cNvSpPr/>
+          <p:nvPr/>
+        </p:nvSpPr>
+        <p:spPr>
+          <a:xfrm>
+            <a:off x="8546352" y="1546820"/>
+            <a:ext cx="372374" cy="372467"/>
+          </a:xfrm>
+          <a:prstGeom prst="rect">
+            <a:avLst/>
+          </a:prstGeom>
+          <a:solidFill>
+            <a:srgbClr val="1B66C9"/>
+          </a:solidFill>
+          <a:ln/>
+        </p:spPr>
+        <p:txBody>
+          <a:bodyPr wrap="square" rtlCol="0" anchor="ctr"/>
+          <a:lstStyle/>
+          <a:p>
+            <a:pPr indent="0" marL="0">
+              <a:buNone/>
+            </a:pPr>
+            <a:endParaRPr lang="en-US" dirty="0"/>
+          </a:p>
+        </p:txBody>
+      </p:sp>
+      <p:sp>
+        <p:nvSpPr>
+          <p:cNvPr id="29" name="Text 25"/>
+          <p:cNvSpPr/>
+          <p:nvPr/>
+        </p:nvSpPr>
+        <p:spPr>
+          <a:xfrm>
+            <a:off x="8611820" y="1618655"/>
+            <a:ext cx="246064" cy="228600"/>
+          </a:xfrm>
+          <a:prstGeom prst="rect">
+            <a:avLst/>
+          </a:prstGeom>
+          <a:noFill/>
+          <a:ln/>
+        </p:spPr>
+        <p:txBody>
+          <a:bodyPr wrap="square" lIns="0" tIns="0" rIns="0" bIns="0" rtlCol="0" anchor="t"/>
+          <a:lstStyle/>
+          <a:p>
+            <a:pPr algn="l" indent="0" marL="0">
+              <a:buNone/>
+            </a:pPr>
+            <a:r>
+              <a:rPr lang="en-US" sz="1466" b="1" dirty="0">
+                <a:solidFill>
+                  <a:srgbClr val="FFFFFF"/>
+                </a:solidFill>
+                <a:latin typeface="Pretendard" pitchFamily="34" charset="0"/>
+                <a:ea typeface="Pretendard" pitchFamily="34" charset="-122"/>
+                <a:cs typeface="Pretendard" pitchFamily="34" charset="-120"/>
+              </a:rPr>
+              <a:t>03</a:t>
+            </a:r>
+            <a:endParaRPr lang="en-US" sz="1466" dirty="0"/>
+          </a:p>
+        </p:txBody>
+      </p:sp>
+      <p:sp>
+        <p:nvSpPr>
+          <p:cNvPr id="30" name="Text 26"/>
+          <p:cNvSpPr/>
+          <p:nvPr/>
+        </p:nvSpPr>
+        <p:spPr>
+          <a:xfrm>
+            <a:off x="8546352" y="2105422"/>
+            <a:ext cx="2770249" cy="342900"/>
+          </a:xfrm>
+          <a:prstGeom prst="rect">
+            <a:avLst/>
+          </a:prstGeom>
+          <a:noFill/>
+          <a:ln/>
+        </p:spPr>
+        <p:txBody>
+          <a:bodyPr wrap="square" lIns="0" tIns="0" rIns="0" bIns="0" rtlCol="0" anchor="t"/>
+          <a:lstStyle/>
+          <a:p>
+            <a:pPr algn="l" indent="0" marL="0">
+              <a:spcAft>
+                <a:spcPts val="1067"/>
+              </a:spcAft>
+              <a:buNone/>
+            </a:pPr>
+            <a:r>
+              <a:rPr lang="en-US" sz="2266" b="1" dirty="0">
+                <a:solidFill>
+                  <a:srgbClr val="0B2C5C"/>
+                </a:solidFill>
+                <a:latin typeface="Pretendard" pitchFamily="34" charset="0"/>
+                <a:ea typeface="Pretendard" pitchFamily="34" charset="-122"/>
+                <a:cs typeface="Pretendard" pitchFamily="34" charset="-120"/>
+              </a:rPr>
+              <a:t>자율</a:t>
+            </a:r>
+            <a:endParaRPr lang="en-US" sz="2266" dirty="0"/>
+          </a:p>
+        </p:txBody>
+      </p:sp>
+      <p:sp>
+        <p:nvSpPr>
+          <p:cNvPr id="31" name="Text 27"/>
+          <p:cNvSpPr/>
+          <p:nvPr/>
+        </p:nvSpPr>
+        <p:spPr>
+          <a:xfrm>
+            <a:off x="8546352" y="2583656"/>
+            <a:ext cx="2770249" cy="1303139"/>
+          </a:xfrm>
+          <a:prstGeom prst="rect">
+            <a:avLst/>
+          </a:prstGeom>
+          <a:noFill/>
+          <a:ln/>
+        </p:spPr>
+        <p:txBody>
+          <a:bodyPr wrap="square" lIns="0" tIns="0" rIns="0" bIns="0" rtlCol="0" anchor="t"/>
+          <a:lstStyle/>
+          <a:p>
+            <a:pPr algn="l" indent="0" marL="0">
+              <a:lnSpc>
+                <a:spcPts val="2800"/>
+              </a:lnSpc>
+              <a:buNone/>
+            </a:pPr>
+            <a:r>
+              <a:rPr lang="en-US" sz="1866" dirty="0">
+                <a:solidFill>
+                  <a:srgbClr val="5C6470"/>
+                </a:solidFill>
+                <a:latin typeface="Pretendard" pitchFamily="34" charset="0"/>
+                <a:ea typeface="Pretendard" pitchFamily="34" charset="-122"/>
+                <a:cs typeface="Pretendard" pitchFamily="34" charset="-120"/>
+              </a:rPr>
+              <a:t>AI가 실행과 판단을 맡고, 사람은 예외와 기준만 관리한다.</a:t>
+            </a:r>
+            <a:endParaRPr lang="en-US" sz="1866" dirty="0"/>
+          </a:p>
+        </p:txBody>
+      </p:sp>
+      <p:sp>
+        <p:nvSpPr>
+          <p:cNvPr id="32" name="Shape 28"/>
+          <p:cNvSpPr/>
+          <p:nvPr/>
+        </p:nvSpPr>
+        <p:spPr>
+          <a:xfrm>
+            <a:off x="8546352" y="4079280"/>
+            <a:ext cx="2715930" cy="0"/>
+          </a:xfrm>
+          <a:prstGeom prst="line">
+            <a:avLst/>
+          </a:prstGeom>
+          <a:noFill/>
+          <a:ln w="12698">
+            <a:solidFill>
+              <a:srgbClr val="C5D2E3"/>
+            </a:solidFill>
+            <a:prstDash val="solid"/>
+          </a:ln>
+        </p:spPr>
+      </p:sp>
+      <p:sp>
+        <p:nvSpPr>
+          <p:cNvPr id="33" name="Text 29"/>
+          <p:cNvSpPr/>
+          <p:nvPr/>
+        </p:nvSpPr>
+        <p:spPr>
+          <a:xfrm>
+            <a:off x="8546352" y="4238030"/>
+            <a:ext cx="2770249" cy="241300"/>
+          </a:xfrm>
+          <a:prstGeom prst="rect">
+            <a:avLst/>
+          </a:prstGeom>
+          <a:noFill/>
+          <a:ln/>
+        </p:spPr>
+        <p:txBody>
+          <a:bodyPr wrap="square" lIns="0" tIns="0" rIns="0" bIns="0" rtlCol="0" anchor="t"/>
+          <a:lstStyle/>
+          <a:p>
+            <a:pPr algn="l" indent="0" marL="0">
+              <a:buNone/>
+            </a:pPr>
+            <a:r>
+              <a:rPr lang="en-US" sz="1600" dirty="0">
+                <a:solidFill>
+                  <a:srgbClr val="5C6470"/>
+                </a:solidFill>
+                <a:latin typeface="Pretendard" pitchFamily="34" charset="0"/>
+                <a:ea typeface="Pretendard" pitchFamily="34" charset="-122"/>
+                <a:cs typeface="Pretendard" pitchFamily="34" charset="-120"/>
+              </a:rPr>
+              <a:t>사람의 역할</a:t>
+            </a:r>
+            <a:pPr algn="l" indent="0" marL="0">
+              <a:buNone/>
+            </a:pPr>
+            <a:r>
+              <a:rPr lang="en-US" sz="1600" dirty="0">
+                <a:solidFill>
+                  <a:srgbClr val="0B2C5C"/>
+                </a:solidFill>
+                <a:latin typeface="Pretendard" pitchFamily="34" charset="0"/>
+                <a:ea typeface="Pretendard" pitchFamily="34" charset="-122"/>
+                <a:cs typeface="Pretendard" pitchFamily="34" charset="-120"/>
+              </a:rPr>
+              <a:t>기준 설계자</a:t>
+            </a:r>
+            <a:endParaRPr lang="en-US" sz="1600" dirty="0"/>
+          </a:p>
+        </p:txBody>
+      </p:sp>
+      <p:sp>
+        <p:nvSpPr>
+          <p:cNvPr id="34" name="Text 30"/>
+          <p:cNvSpPr/>
+          <p:nvPr/>
+        </p:nvSpPr>
+        <p:spPr>
+          <a:xfrm>
+            <a:off x="643174" y="5169297"/>
+            <a:ext cx="10902605" cy="842169"/>
+          </a:xfrm>
+          <a:prstGeom prst="rect">
+            <a:avLst/>
+          </a:prstGeom>
+          <a:solidFill>
+            <a:srgbClr val="E8F1FB"/>
+          </a:solidFill>
+          <a:ln/>
+        </p:spPr>
+        <p:txBody>
+          <a:bodyPr wrap="square" rtlCol="0" anchor="ctr"/>
+          <a:lstStyle/>
+          <a:p>
+            <a:pPr indent="0" marL="0">
+              <a:buNone/>
+            </a:pPr>
+            <a:endParaRPr lang="en-US" dirty="0"/>
+          </a:p>
+        </p:txBody>
+      </p:sp>
+      <p:sp>
+        <p:nvSpPr>
+          <p:cNvPr id="35" name="Shape 31"/>
+          <p:cNvSpPr/>
+          <p:nvPr/>
+        </p:nvSpPr>
+        <p:spPr>
+          <a:xfrm>
+            <a:off x="668567" y="5169297"/>
+            <a:ext cx="0" cy="842169"/>
+          </a:xfrm>
+          <a:prstGeom prst="line">
+            <a:avLst/>
+          </a:prstGeom>
+          <a:noFill/>
+          <a:ln w="50794">
+            <a:solidFill>
+              <a:srgbClr val="1B66C9"/>
+            </a:solidFill>
+            <a:prstDash val="solid"/>
+          </a:ln>
+        </p:spPr>
+      </p:sp>
+      <p:sp>
+        <p:nvSpPr>
+          <p:cNvPr id="36" name="Text 32"/>
+          <p:cNvSpPr/>
+          <p:nvPr/>
+        </p:nvSpPr>
+        <p:spPr>
+          <a:xfrm>
+            <a:off x="998685" y="5406231"/>
+            <a:ext cx="10447217" cy="368300"/>
+          </a:xfrm>
+          <a:prstGeom prst="rect">
+            <a:avLst/>
+          </a:prstGeom>
+          <a:noFill/>
+          <a:ln/>
+        </p:spPr>
+        <p:txBody>
+          <a:bodyPr wrap="square" lIns="0" tIns="0" rIns="0" bIns="0" rtlCol="0" anchor="t"/>
+          <a:lstStyle/>
+          <a:p>
+            <a:pPr algn="l" indent="0" marL="0">
+              <a:lnSpc>
+                <a:spcPts val="2900"/>
+              </a:lnSpc>
+              <a:buNone/>
+            </a:pPr>
+            <a:r>
+              <a:rPr lang="en-US" sz="2000" b="1" dirty="0">
+                <a:solidFill>
+                  <a:srgbClr val="0B2C5C"/>
+                </a:solidFill>
+                <a:latin typeface="Pretendard" pitchFamily="34" charset="0"/>
+                <a:ea typeface="Pretendard" pitchFamily="34" charset="-122"/>
+                <a:cs typeface="Pretendard" pitchFamily="34" charset="-120"/>
+              </a:rPr>
+              <a:t>2단계로 넘어가는 문턱은 모델 성능이 아니라, 검수 기준과 책임 소재를 정의했는지다.</a:t>
+            </a:r>
+            <a:endParaRPr lang="en-US" sz="2000" dirty="0"/>
+          </a:p>
+        </p:txBody>
+      </p:sp>
     </p:spTree>
   </p:cSld>
   <p:clrMapOvr>
@@ -1357,6 +4094,13 @@
 <file path=ppt/slides/slide4.xml><?xml version="1.0" encoding="utf-8"?>
 <p:sld xmlns:a="http://schemas.openxmlformats.org/drawingml/2006/main" xmlns:r="http://schemas.openxmlformats.org/officeDocument/2006/relationships" xmlns:p="http://schemas.openxmlformats.org/presentationml/2006/main">
   <p:cSld name="Slide 4">
+    <p:bg>
+      <p:bgPr>
+        <a:solidFill>
+          <a:srgbClr val="FFFFFF"/>
+        </a:solidFill>
+      </p:bgPr>
+    </p:bg>
     <p:spTree>
       <p:nvGrpSpPr>
         <p:cNvPr id="1" name=""/>
@@ -1371,30 +4115,1294 @@
           <a:chExt cx="0" cy="0"/>
         </a:xfrm>
       </p:grpSpPr>
-      <p:pic>
-        <p:nvPicPr>
-          <p:cNvPr id="2" name="Image 0" descr="/tmp/slide-1787841981789-skex152chal.png">    </p:cNvPr>
-          <p:cNvPicPr>
-            <a:picLocks noChangeAspect="1"/>
-          </p:cNvPicPr>
-          <p:nvPr/>
-        </p:nvPicPr>
-        <p:blipFill>
-          <a:blip r:embed="rId1"/>
-          <a:stretch>
-            <a:fillRect/>
-          </a:stretch>
-        </p:blipFill>
+      <p:sp>
+        <p:nvSpPr>
+          <p:cNvPr id="2" name="Text 0"/>
+          <p:cNvSpPr/>
+          <p:nvPr/>
+        </p:nvSpPr>
         <p:spPr>
           <a:xfrm>
             <a:off x="0" y="0"/>
-            <a:ext cx="12188952" cy="6858000"/>
-          </a:xfrm>
-          <a:prstGeom prst="rect">
-            <a:avLst/>
-          </a:prstGeom>
-        </p:spPr>
-      </p:pic>
+            <a:ext cx="12188952" cy="822920"/>
+          </a:xfrm>
+          <a:prstGeom prst="rect">
+            <a:avLst/>
+          </a:prstGeom>
+          <a:solidFill>
+            <a:srgbClr val="0B2C5C"/>
+          </a:solidFill>
+          <a:ln/>
+        </p:spPr>
+        <p:txBody>
+          <a:bodyPr wrap="square" rtlCol="0" anchor="ctr"/>
+          <a:lstStyle/>
+          <a:p>
+            <a:pPr indent="0" marL="0">
+              <a:buNone/>
+            </a:pPr>
+            <a:endParaRPr lang="en-US" dirty="0"/>
+          </a:p>
+        </p:txBody>
+      </p:sp>
+      <p:sp>
+        <p:nvSpPr>
+          <p:cNvPr id="3" name="Text 1"/>
+          <p:cNvSpPr/>
+          <p:nvPr/>
+        </p:nvSpPr>
+        <p:spPr>
+          <a:xfrm>
+            <a:off x="643174" y="191294"/>
+            <a:ext cx="440024" cy="440134"/>
+          </a:xfrm>
+          <a:prstGeom prst="rect">
+            <a:avLst/>
+          </a:prstGeom>
+          <a:solidFill>
+            <a:srgbClr val="1B66C9"/>
+          </a:solidFill>
+          <a:ln/>
+        </p:spPr>
+        <p:txBody>
+          <a:bodyPr wrap="square" rtlCol="0" anchor="ctr"/>
+          <a:lstStyle/>
+          <a:p>
+            <a:pPr indent="0" marL="0">
+              <a:buNone/>
+            </a:pPr>
+            <a:endParaRPr lang="en-US" dirty="0"/>
+          </a:p>
+        </p:txBody>
+      </p:sp>
+      <p:sp>
+        <p:nvSpPr>
+          <p:cNvPr id="4" name="Text 2"/>
+          <p:cNvSpPr/>
+          <p:nvPr/>
+        </p:nvSpPr>
+        <p:spPr>
+          <a:xfrm>
+            <a:off x="717172" y="284361"/>
+            <a:ext cx="297868" cy="254000"/>
+          </a:xfrm>
+          <a:prstGeom prst="rect">
+            <a:avLst/>
+          </a:prstGeom>
+          <a:noFill/>
+          <a:ln/>
+        </p:spPr>
+        <p:txBody>
+          <a:bodyPr wrap="square" lIns="0" tIns="0" rIns="0" bIns="0" rtlCol="0" anchor="t"/>
+          <a:lstStyle/>
+          <a:p>
+            <a:pPr algn="l" indent="0" marL="0">
+              <a:buNone/>
+            </a:pPr>
+            <a:r>
+              <a:rPr lang="en-US" sz="1733" b="1" dirty="0">
+                <a:solidFill>
+                  <a:srgbClr val="FFFFFF"/>
+                </a:solidFill>
+                <a:latin typeface="Pretendard" pitchFamily="34" charset="0"/>
+                <a:ea typeface="Pretendard" pitchFamily="34" charset="-122"/>
+                <a:cs typeface="Pretendard" pitchFamily="34" charset="-120"/>
+              </a:rPr>
+              <a:t>03</a:t>
+            </a:r>
+            <a:endParaRPr lang="en-US" sz="1733" dirty="0"/>
+          </a:p>
+        </p:txBody>
+      </p:sp>
+      <p:sp>
+        <p:nvSpPr>
+          <p:cNvPr id="5" name="Text 3"/>
+          <p:cNvSpPr/>
+          <p:nvPr/>
+        </p:nvSpPr>
+        <p:spPr>
+          <a:xfrm>
+            <a:off x="1303210" y="189111"/>
+            <a:ext cx="4525684" cy="444500"/>
+          </a:xfrm>
+          <a:prstGeom prst="rect">
+            <a:avLst/>
+          </a:prstGeom>
+          <a:noFill/>
+          <a:ln/>
+        </p:spPr>
+        <p:txBody>
+          <a:bodyPr wrap="square" lIns="0" tIns="0" rIns="0" bIns="0" rtlCol="0" anchor="t"/>
+          <a:lstStyle/>
+          <a:p>
+            <a:pPr algn="l" indent="0" marL="0">
+              <a:buNone/>
+            </a:pPr>
+            <a:r>
+              <a:rPr lang="en-US" sz="2933" b="1" dirty="0">
+                <a:solidFill>
+                  <a:srgbClr val="FFFFFF"/>
+                </a:solidFill>
+                <a:latin typeface="Pretendard" pitchFamily="34" charset="0"/>
+                <a:ea typeface="Pretendard" pitchFamily="34" charset="-122"/>
+                <a:cs typeface="Pretendard" pitchFamily="34" charset="-120"/>
+              </a:rPr>
+              <a:t>도입 조직이 먼저 준비해야 할 것</a:t>
+            </a:r>
+            <a:endParaRPr lang="en-US" sz="2933" dirty="0"/>
+          </a:p>
+        </p:txBody>
+      </p:sp>
+      <p:sp>
+        <p:nvSpPr>
+          <p:cNvPr id="6" name="Text 4"/>
+          <p:cNvSpPr/>
+          <p:nvPr/>
+        </p:nvSpPr>
+        <p:spPr>
+          <a:xfrm>
+            <a:off x="11291842" y="297061"/>
+            <a:ext cx="259015" cy="228600"/>
+          </a:xfrm>
+          <a:prstGeom prst="rect">
+            <a:avLst/>
+          </a:prstGeom>
+          <a:noFill/>
+          <a:ln/>
+        </p:spPr>
+        <p:txBody>
+          <a:bodyPr wrap="square" lIns="0" tIns="0" rIns="0" bIns="0" rtlCol="0" anchor="t"/>
+          <a:lstStyle/>
+          <a:p>
+            <a:pPr algn="l" indent="0" marL="0">
+              <a:buNone/>
+            </a:pPr>
+            <a:r>
+              <a:rPr lang="en-US" sz="1466" b="1" dirty="0">
+                <a:solidFill>
+                  <a:srgbClr val="8FA6C4"/>
+                </a:solidFill>
+                <a:latin typeface="Pretendard" pitchFamily="34" charset="0"/>
+                <a:ea typeface="Pretendard" pitchFamily="34" charset="-122"/>
+                <a:cs typeface="Pretendard" pitchFamily="34" charset="-120"/>
+              </a:rPr>
+              <a:t>04</a:t>
+            </a:r>
+            <a:endParaRPr lang="en-US" sz="1466" dirty="0"/>
+          </a:p>
+        </p:txBody>
+      </p:sp>
+      <p:sp>
+        <p:nvSpPr>
+          <p:cNvPr id="7" name="Text 5"/>
+          <p:cNvSpPr/>
+          <p:nvPr/>
+        </p:nvSpPr>
+        <p:spPr>
+          <a:xfrm>
+            <a:off x="643174" y="1229320"/>
+            <a:ext cx="5229108" cy="3499644"/>
+          </a:xfrm>
+          <a:prstGeom prst="rect">
+            <a:avLst/>
+          </a:prstGeom>
+          <a:noFill/>
+          <a:ln w="12698">
+            <a:solidFill>
+              <a:srgbClr val="C5D2E3"/>
+            </a:solidFill>
+          </a:ln>
+        </p:spPr>
+        <p:txBody>
+          <a:bodyPr wrap="square" rtlCol="0" anchor="ctr"/>
+          <a:lstStyle/>
+          <a:p>
+            <a:pPr indent="0" marL="0">
+              <a:buNone/>
+            </a:pPr>
+            <a:endParaRPr lang="en-US" dirty="0"/>
+          </a:p>
+        </p:txBody>
+      </p:sp>
+      <p:sp>
+        <p:nvSpPr>
+          <p:cNvPr id="8" name="Text 6"/>
+          <p:cNvSpPr/>
+          <p:nvPr/>
+        </p:nvSpPr>
+        <p:spPr>
+          <a:xfrm>
+            <a:off x="655870" y="1242020"/>
+            <a:ext cx="5203714" cy="575469"/>
+          </a:xfrm>
+          <a:prstGeom prst="rect">
+            <a:avLst/>
+          </a:prstGeom>
+          <a:solidFill>
+            <a:srgbClr val="0B2C5C"/>
+          </a:solidFill>
+          <a:ln/>
+        </p:spPr>
+        <p:txBody>
+          <a:bodyPr wrap="square" rtlCol="0" anchor="ctr"/>
+          <a:lstStyle/>
+          <a:p>
+            <a:pPr indent="0" marL="0">
+              <a:buNone/>
+            </a:pPr>
+            <a:endParaRPr lang="en-US" dirty="0"/>
+          </a:p>
+        </p:txBody>
+      </p:sp>
+      <p:sp>
+        <p:nvSpPr>
+          <p:cNvPr id="9" name="Text 7"/>
+          <p:cNvSpPr/>
+          <p:nvPr/>
+        </p:nvSpPr>
+        <p:spPr>
+          <a:xfrm>
+            <a:off x="892746" y="1377355"/>
+            <a:ext cx="994780" cy="304800"/>
+          </a:xfrm>
+          <a:prstGeom prst="rect">
+            <a:avLst/>
+          </a:prstGeom>
+          <a:noFill/>
+          <a:ln/>
+        </p:spPr>
+        <p:txBody>
+          <a:bodyPr wrap="square" lIns="0" tIns="0" rIns="0" bIns="0" rtlCol="0" anchor="t"/>
+          <a:lstStyle/>
+          <a:p>
+            <a:pPr algn="l" indent="0" marL="0">
+              <a:buNone/>
+            </a:pPr>
+            <a:r>
+              <a:rPr lang="en-US" sz="2000" b="1" dirty="0">
+                <a:solidFill>
+                  <a:srgbClr val="FFFFFF"/>
+                </a:solidFill>
+                <a:latin typeface="Pretendard" pitchFamily="34" charset="0"/>
+                <a:ea typeface="Pretendard" pitchFamily="34" charset="-122"/>
+                <a:cs typeface="Pretendard" pitchFamily="34" charset="-120"/>
+              </a:rPr>
+              <a:t>먼저 할 일</a:t>
+            </a:r>
+            <a:endParaRPr lang="en-US" sz="2000" dirty="0"/>
+          </a:p>
+        </p:txBody>
+      </p:sp>
+      <p:sp>
+        <p:nvSpPr>
+          <p:cNvPr id="10" name="Text 8"/>
+          <p:cNvSpPr/>
+          <p:nvPr/>
+        </p:nvSpPr>
+        <p:spPr>
+          <a:xfrm>
+            <a:off x="5013262" y="1453555"/>
+            <a:ext cx="621637" cy="203200"/>
+          </a:xfrm>
+          <a:prstGeom prst="rect">
+            <a:avLst/>
+          </a:prstGeom>
+          <a:noFill/>
+          <a:ln/>
+        </p:spPr>
+        <p:txBody>
+          <a:bodyPr wrap="square" lIns="0" tIns="0" rIns="0" bIns="0" rtlCol="0" anchor="t"/>
+          <a:lstStyle/>
+          <a:p>
+            <a:pPr algn="l" indent="0" marL="0">
+              <a:buNone/>
+            </a:pPr>
+            <a:r>
+              <a:rPr lang="en-US" sz="1333" dirty="0">
+                <a:solidFill>
+                  <a:srgbClr val="8FA6C4"/>
+                </a:solidFill>
+                <a:latin typeface="Pretendard" pitchFamily="34" charset="0"/>
+                <a:ea typeface="Pretendard" pitchFamily="34" charset="-122"/>
+                <a:cs typeface="Pretendard" pitchFamily="34" charset="-120"/>
+              </a:rPr>
+              <a:t>우선순위</a:t>
+            </a:r>
+            <a:endParaRPr lang="en-US" sz="1333" dirty="0"/>
+          </a:p>
+        </p:txBody>
+      </p:sp>
+      <p:sp>
+        <p:nvSpPr>
+          <p:cNvPr id="11" name="Text 9"/>
+          <p:cNvSpPr/>
+          <p:nvPr/>
+        </p:nvSpPr>
+        <p:spPr>
+          <a:xfrm>
+            <a:off x="655870" y="1817489"/>
+            <a:ext cx="5203714" cy="2898775"/>
+          </a:xfrm>
+          <a:prstGeom prst="rect">
+            <a:avLst/>
+          </a:prstGeom>
+          <a:noFill/>
+          <a:ln/>
+        </p:spPr>
+        <p:txBody>
+          <a:bodyPr wrap="square" lIns="135450" tIns="0" rIns="0" bIns="0" rtlCol="0" anchor="t"/>
+          <a:lstStyle/>
+          <a:p>
+            <a:pPr algn="l" marL="135450" indent="-135450">
+              <a:buSzPct val="100000"/>
+              <a:buChar char="•"/>
+            </a:pPr>
+            <a:r>
+              <a:rPr lang="en-US" sz="1600" dirty="0">
+                <a:solidFill>
+                  <a:srgbClr val="1A1A1A"/>
+                </a:solidFill>
+                <a:latin typeface="Pretendard" pitchFamily="34" charset="0"/>
+                <a:ea typeface="Pretendard" pitchFamily="34" charset="-122"/>
+                <a:cs typeface="Pretendard" pitchFamily="34" charset="-120"/>
+              </a:rPr>
+              <a:t>반복도와 규칙성이 높은 업무부터 목록화한다</a:t>
+            </a:r>
+            <a:endParaRPr lang="en-US" sz="1600" dirty="0"/>
+          </a:p>
+          <a:p>
+            <a:pPr algn="l" marL="135450" indent="-135450">
+              <a:buSzPct val="100000"/>
+              <a:buChar char="•"/>
+            </a:pPr>
+            <a:r>
+              <a:rPr lang="en-US" sz="1600" dirty="0">
+                <a:solidFill>
+                  <a:srgbClr val="1A1A1A"/>
+                </a:solidFill>
+                <a:latin typeface="Pretendard" pitchFamily="34" charset="0"/>
+                <a:ea typeface="Pretendard" pitchFamily="34" charset="-122"/>
+                <a:cs typeface="Pretendard" pitchFamily="34" charset="-120"/>
+              </a:rPr>
+              <a:t>사람이 최종 확인할 지점을 업무마다 정한다</a:t>
+            </a:r>
+            <a:endParaRPr lang="en-US" sz="1600" dirty="0"/>
+          </a:p>
+          <a:p>
+            <a:pPr algn="l" marL="135450" indent="-135450">
+              <a:buSzPct val="100000"/>
+              <a:buChar char="•"/>
+            </a:pPr>
+            <a:r>
+              <a:rPr lang="en-US" sz="1600" dirty="0">
+                <a:solidFill>
+                  <a:srgbClr val="1A1A1A"/>
+                </a:solidFill>
+                <a:latin typeface="Pretendard" pitchFamily="34" charset="0"/>
+                <a:ea typeface="Pretendard" pitchFamily="34" charset="-122"/>
+                <a:cs typeface="Pretendard" pitchFamily="34" charset="-120"/>
+              </a:rPr>
+              <a:t>잘못 실행됐을 때 되돌릴 절차를 함께 만든다</a:t>
+            </a:r>
+            <a:endParaRPr lang="en-US" sz="1600" dirty="0"/>
+          </a:p>
+        </p:txBody>
+      </p:sp>
+      <p:sp>
+        <p:nvSpPr>
+          <p:cNvPr id="12" name="Text 10"/>
+          <p:cNvSpPr/>
+          <p:nvPr/>
+        </p:nvSpPr>
+        <p:spPr>
+          <a:xfrm>
+            <a:off x="926670" y="2492177"/>
+            <a:ext cx="101575" cy="101600"/>
+          </a:xfrm>
+          <a:prstGeom prst="rect">
+            <a:avLst/>
+          </a:prstGeom>
+          <a:solidFill>
+            <a:srgbClr val="1B66C9"/>
+          </a:solidFill>
+          <a:ln/>
+        </p:spPr>
+        <p:txBody>
+          <a:bodyPr wrap="square" rtlCol="0" anchor="ctr"/>
+          <a:lstStyle/>
+          <a:p>
+            <a:pPr indent="0" marL="0">
+              <a:buNone/>
+            </a:pPr>
+            <a:endParaRPr lang="en-US" dirty="0"/>
+          </a:p>
+        </p:txBody>
+      </p:sp>
+      <p:sp>
+        <p:nvSpPr>
+          <p:cNvPr id="13" name="Text 11"/>
+          <p:cNvSpPr/>
+          <p:nvPr/>
+        </p:nvSpPr>
+        <p:spPr>
+          <a:xfrm>
+            <a:off x="1197469" y="2373709"/>
+            <a:ext cx="4442111" cy="393700"/>
+          </a:xfrm>
+          <a:prstGeom prst="rect">
+            <a:avLst/>
+          </a:prstGeom>
+          <a:noFill/>
+          <a:ln/>
+        </p:spPr>
+        <p:txBody>
+          <a:bodyPr wrap="square" lIns="0" tIns="0" rIns="0" bIns="0" rtlCol="0" anchor="t"/>
+          <a:lstStyle/>
+          <a:p>
+            <a:pPr algn="l" indent="0" marL="0">
+              <a:lnSpc>
+                <a:spcPts val="3100"/>
+              </a:lnSpc>
+              <a:buNone/>
+            </a:pPr>
+            <a:r>
+              <a:rPr lang="en-US" sz="2000" dirty="0">
+                <a:solidFill>
+                  <a:srgbClr val="1A1A1A"/>
+                </a:solidFill>
+                <a:latin typeface="Pretendard" pitchFamily="34" charset="0"/>
+                <a:ea typeface="Pretendard" pitchFamily="34" charset="-122"/>
+                <a:cs typeface="Pretendard" pitchFamily="34" charset="-120"/>
+              </a:rPr>
+              <a:t>반복도와 규칙성이 높은 업무부터 목록화한다</a:t>
+            </a:r>
+            <a:endParaRPr lang="en-US" sz="2000" dirty="0"/>
+          </a:p>
+        </p:txBody>
+      </p:sp>
+      <p:sp>
+        <p:nvSpPr>
+          <p:cNvPr id="14" name="Text 12"/>
+          <p:cNvSpPr/>
+          <p:nvPr/>
+        </p:nvSpPr>
+        <p:spPr>
+          <a:xfrm>
+            <a:off x="926670" y="3171230"/>
+            <a:ext cx="101575" cy="101600"/>
+          </a:xfrm>
+          <a:prstGeom prst="rect">
+            <a:avLst/>
+          </a:prstGeom>
+          <a:solidFill>
+            <a:srgbClr val="1B66C9"/>
+          </a:solidFill>
+          <a:ln/>
+        </p:spPr>
+        <p:txBody>
+          <a:bodyPr wrap="square" rtlCol="0" anchor="ctr"/>
+          <a:lstStyle/>
+          <a:p>
+            <a:pPr indent="0" marL="0">
+              <a:buNone/>
+            </a:pPr>
+            <a:endParaRPr lang="en-US" dirty="0"/>
+          </a:p>
+        </p:txBody>
+      </p:sp>
+      <p:sp>
+        <p:nvSpPr>
+          <p:cNvPr id="15" name="Text 13"/>
+          <p:cNvSpPr/>
+          <p:nvPr/>
+        </p:nvSpPr>
+        <p:spPr>
+          <a:xfrm>
+            <a:off x="1197469" y="3052763"/>
+            <a:ext cx="4286702" cy="393700"/>
+          </a:xfrm>
+          <a:prstGeom prst="rect">
+            <a:avLst/>
+          </a:prstGeom>
+          <a:noFill/>
+          <a:ln/>
+        </p:spPr>
+        <p:txBody>
+          <a:bodyPr wrap="square" lIns="0" tIns="0" rIns="0" bIns="0" rtlCol="0" anchor="t"/>
+          <a:lstStyle/>
+          <a:p>
+            <a:pPr algn="l" indent="0" marL="0">
+              <a:lnSpc>
+                <a:spcPts val="3100"/>
+              </a:lnSpc>
+              <a:buNone/>
+            </a:pPr>
+            <a:r>
+              <a:rPr lang="en-US" sz="2000" dirty="0">
+                <a:solidFill>
+                  <a:srgbClr val="1A1A1A"/>
+                </a:solidFill>
+                <a:latin typeface="Pretendard" pitchFamily="34" charset="0"/>
+                <a:ea typeface="Pretendard" pitchFamily="34" charset="-122"/>
+                <a:cs typeface="Pretendard" pitchFamily="34" charset="-120"/>
+              </a:rPr>
+              <a:t>사람이 최종 확인할 지점을 업무마다 정한다</a:t>
+            </a:r>
+            <a:endParaRPr lang="en-US" sz="2000" dirty="0"/>
+          </a:p>
+        </p:txBody>
+      </p:sp>
+      <p:sp>
+        <p:nvSpPr>
+          <p:cNvPr id="16" name="Text 14"/>
+          <p:cNvSpPr/>
+          <p:nvPr/>
+        </p:nvSpPr>
+        <p:spPr>
+          <a:xfrm>
+            <a:off x="926670" y="3850283"/>
+            <a:ext cx="101575" cy="101600"/>
+          </a:xfrm>
+          <a:prstGeom prst="rect">
+            <a:avLst/>
+          </a:prstGeom>
+          <a:solidFill>
+            <a:srgbClr val="1B66C9"/>
+          </a:solidFill>
+          <a:ln/>
+        </p:spPr>
+        <p:txBody>
+          <a:bodyPr wrap="square" rtlCol="0" anchor="ctr"/>
+          <a:lstStyle/>
+          <a:p>
+            <a:pPr indent="0" marL="0">
+              <a:buNone/>
+            </a:pPr>
+            <a:endParaRPr lang="en-US" dirty="0"/>
+          </a:p>
+        </p:txBody>
+      </p:sp>
+      <p:sp>
+        <p:nvSpPr>
+          <p:cNvPr id="17" name="Text 15"/>
+          <p:cNvSpPr/>
+          <p:nvPr/>
+        </p:nvSpPr>
+        <p:spPr>
+          <a:xfrm>
+            <a:off x="1197469" y="3731816"/>
+            <a:ext cx="4351456" cy="393700"/>
+          </a:xfrm>
+          <a:prstGeom prst="rect">
+            <a:avLst/>
+          </a:prstGeom>
+          <a:noFill/>
+          <a:ln/>
+        </p:spPr>
+        <p:txBody>
+          <a:bodyPr wrap="square" lIns="0" tIns="0" rIns="0" bIns="0" rtlCol="0" anchor="t"/>
+          <a:lstStyle/>
+          <a:p>
+            <a:pPr algn="l" indent="0" marL="0">
+              <a:lnSpc>
+                <a:spcPts val="3100"/>
+              </a:lnSpc>
+              <a:buNone/>
+            </a:pPr>
+            <a:r>
+              <a:rPr lang="en-US" sz="2000" dirty="0">
+                <a:solidFill>
+                  <a:srgbClr val="1A1A1A"/>
+                </a:solidFill>
+                <a:latin typeface="Pretendard" pitchFamily="34" charset="0"/>
+                <a:ea typeface="Pretendard" pitchFamily="34" charset="-122"/>
+                <a:cs typeface="Pretendard" pitchFamily="34" charset="-120"/>
+              </a:rPr>
+              <a:t>잘못 실행됐을 때 되돌릴 절차를 함께 만든다</a:t>
+            </a:r>
+            <a:endParaRPr lang="en-US" sz="2000" dirty="0"/>
+          </a:p>
+        </p:txBody>
+      </p:sp>
+      <p:sp>
+        <p:nvSpPr>
+          <p:cNvPr id="18" name="Shape 16"/>
+          <p:cNvSpPr/>
+          <p:nvPr/>
+        </p:nvSpPr>
+        <p:spPr>
+          <a:xfrm>
+            <a:off x="6278580" y="1235670"/>
+            <a:ext cx="5267198" cy="0"/>
+          </a:xfrm>
+          <a:prstGeom prst="line">
+            <a:avLst/>
+          </a:prstGeom>
+          <a:noFill/>
+          <a:ln w="12698">
+            <a:solidFill>
+              <a:srgbClr val="C5D2E3"/>
+            </a:solidFill>
+            <a:prstDash val="solid"/>
+          </a:ln>
+        </p:spPr>
+      </p:sp>
+      <p:sp>
+        <p:nvSpPr>
+          <p:cNvPr id="19" name="Shape 17"/>
+          <p:cNvSpPr/>
+          <p:nvPr/>
+        </p:nvSpPr>
+        <p:spPr>
+          <a:xfrm>
+            <a:off x="11539430" y="1229320"/>
+            <a:ext cx="0" cy="3499644"/>
+          </a:xfrm>
+          <a:prstGeom prst="line">
+            <a:avLst/>
+          </a:prstGeom>
+          <a:noFill/>
+          <a:ln w="12698">
+            <a:solidFill>
+              <a:srgbClr val="C5D2E3"/>
+            </a:solidFill>
+            <a:prstDash val="solid"/>
+          </a:ln>
+        </p:spPr>
+      </p:sp>
+      <p:sp>
+        <p:nvSpPr>
+          <p:cNvPr id="20" name="Shape 18"/>
+          <p:cNvSpPr/>
+          <p:nvPr/>
+        </p:nvSpPr>
+        <p:spPr>
+          <a:xfrm>
+            <a:off x="6278580" y="4722614"/>
+            <a:ext cx="5267198" cy="0"/>
+          </a:xfrm>
+          <a:prstGeom prst="line">
+            <a:avLst/>
+          </a:prstGeom>
+          <a:noFill/>
+          <a:ln w="12698">
+            <a:solidFill>
+              <a:srgbClr val="C5D2E3"/>
+            </a:solidFill>
+            <a:prstDash val="solid"/>
+          </a:ln>
+        </p:spPr>
+      </p:sp>
+      <p:sp>
+        <p:nvSpPr>
+          <p:cNvPr id="21" name="Shape 19"/>
+          <p:cNvSpPr/>
+          <p:nvPr/>
+        </p:nvSpPr>
+        <p:spPr>
+          <a:xfrm>
+            <a:off x="6303974" y="1229320"/>
+            <a:ext cx="0" cy="3499644"/>
+          </a:xfrm>
+          <a:prstGeom prst="line">
+            <a:avLst/>
+          </a:prstGeom>
+          <a:noFill/>
+          <a:ln w="50794">
+            <a:solidFill>
+              <a:srgbClr val="E03B3B"/>
+            </a:solidFill>
+            <a:prstDash val="solid"/>
+          </a:ln>
+        </p:spPr>
+      </p:sp>
+      <p:sp>
+        <p:nvSpPr>
+          <p:cNvPr id="22" name="Text 20"/>
+          <p:cNvSpPr/>
+          <p:nvPr/>
+        </p:nvSpPr>
+        <p:spPr>
+          <a:xfrm>
+            <a:off x="6329367" y="1242020"/>
+            <a:ext cx="5203714" cy="575469"/>
+          </a:xfrm>
+          <a:prstGeom prst="rect">
+            <a:avLst/>
+          </a:prstGeom>
+          <a:solidFill>
+            <a:srgbClr val="0B2C5C"/>
+          </a:solidFill>
+          <a:ln/>
+        </p:spPr>
+        <p:txBody>
+          <a:bodyPr wrap="square" rtlCol="0" anchor="ctr"/>
+          <a:lstStyle/>
+          <a:p>
+            <a:pPr indent="0" marL="0">
+              <a:buNone/>
+            </a:pPr>
+            <a:endParaRPr lang="en-US" dirty="0"/>
+          </a:p>
+        </p:txBody>
+      </p:sp>
+      <p:sp>
+        <p:nvSpPr>
+          <p:cNvPr id="23" name="Text 21"/>
+          <p:cNvSpPr/>
+          <p:nvPr/>
+        </p:nvSpPr>
+        <p:spPr>
+          <a:xfrm>
+            <a:off x="6566242" y="1377355"/>
+            <a:ext cx="1647377" cy="304800"/>
+          </a:xfrm>
+          <a:prstGeom prst="rect">
+            <a:avLst/>
+          </a:prstGeom>
+          <a:noFill/>
+          <a:ln/>
+        </p:spPr>
+        <p:txBody>
+          <a:bodyPr wrap="square" lIns="0" tIns="0" rIns="0" bIns="0" rtlCol="0" anchor="t"/>
+          <a:lstStyle/>
+          <a:p>
+            <a:pPr algn="l" indent="0" marL="0">
+              <a:buNone/>
+            </a:pPr>
+            <a:r>
+              <a:rPr lang="en-US" sz="2000" b="1" dirty="0">
+                <a:solidFill>
+                  <a:srgbClr val="FFFFFF"/>
+                </a:solidFill>
+                <a:latin typeface="Pretendard" pitchFamily="34" charset="0"/>
+                <a:ea typeface="Pretendard" pitchFamily="34" charset="-122"/>
+                <a:cs typeface="Pretendard" pitchFamily="34" charset="-120"/>
+              </a:rPr>
+              <a:t>미루면 위험한 것</a:t>
+            </a:r>
+            <a:endParaRPr lang="en-US" sz="2000" dirty="0"/>
+          </a:p>
+        </p:txBody>
+      </p:sp>
+      <p:sp>
+        <p:nvSpPr>
+          <p:cNvPr id="24" name="Text 22"/>
+          <p:cNvSpPr/>
+          <p:nvPr/>
+        </p:nvSpPr>
+        <p:spPr>
+          <a:xfrm>
+            <a:off x="10991483" y="1453555"/>
+            <a:ext cx="310818" cy="203200"/>
+          </a:xfrm>
+          <a:prstGeom prst="rect">
+            <a:avLst/>
+          </a:prstGeom>
+          <a:noFill/>
+          <a:ln/>
+        </p:spPr>
+        <p:txBody>
+          <a:bodyPr wrap="square" lIns="0" tIns="0" rIns="0" bIns="0" rtlCol="0" anchor="t"/>
+          <a:lstStyle/>
+          <a:p>
+            <a:pPr algn="l" indent="0" marL="0">
+              <a:buNone/>
+            </a:pPr>
+            <a:r>
+              <a:rPr lang="en-US" sz="1333" dirty="0">
+                <a:solidFill>
+                  <a:srgbClr val="8FA6C4"/>
+                </a:solidFill>
+                <a:latin typeface="Pretendard" pitchFamily="34" charset="0"/>
+                <a:ea typeface="Pretendard" pitchFamily="34" charset="-122"/>
+                <a:cs typeface="Pretendard" pitchFamily="34" charset="-120"/>
+              </a:rPr>
+              <a:t>위험</a:t>
+            </a:r>
+            <a:endParaRPr lang="en-US" sz="1333" dirty="0"/>
+          </a:p>
+        </p:txBody>
+      </p:sp>
+      <p:sp>
+        <p:nvSpPr>
+          <p:cNvPr id="25" name="Text 23"/>
+          <p:cNvSpPr/>
+          <p:nvPr/>
+        </p:nvSpPr>
+        <p:spPr>
+          <a:xfrm>
+            <a:off x="6329367" y="1817489"/>
+            <a:ext cx="5203714" cy="2898775"/>
+          </a:xfrm>
+          <a:prstGeom prst="rect">
+            <a:avLst/>
+          </a:prstGeom>
+          <a:noFill/>
+          <a:ln/>
+        </p:spPr>
+        <p:txBody>
+          <a:bodyPr wrap="square" lIns="135450" tIns="0" rIns="0" bIns="0" rtlCol="0" anchor="t"/>
+          <a:lstStyle/>
+          <a:p>
+            <a:pPr algn="l" marL="135450" indent="-135450">
+              <a:buSzPct val="100000"/>
+              <a:buChar char="•"/>
+            </a:pPr>
+            <a:r>
+              <a:rPr lang="en-US" sz="1600" dirty="0">
+                <a:solidFill>
+                  <a:srgbClr val="1A1A1A"/>
+                </a:solidFill>
+                <a:latin typeface="Pretendard" pitchFamily="34" charset="0"/>
+                <a:ea typeface="Pretendard" pitchFamily="34" charset="-122"/>
+                <a:cs typeface="Pretendard" pitchFamily="34" charset="-120"/>
+              </a:rPr>
+              <a:t>검수 지점 없이 전체 업무에 한꺼번에 적용</a:t>
+            </a:r>
+            <a:endParaRPr lang="en-US" sz="1600" dirty="0"/>
+          </a:p>
+          <a:p>
+            <a:pPr algn="l" marL="135450" indent="-135450">
+              <a:buSzPct val="100000"/>
+              <a:buChar char="•"/>
+            </a:pPr>
+            <a:r>
+              <a:rPr lang="en-US" sz="1600" dirty="0">
+                <a:solidFill>
+                  <a:srgbClr val="1A1A1A"/>
+                </a:solidFill>
+                <a:latin typeface="Pretendard" pitchFamily="34" charset="0"/>
+                <a:ea typeface="Pretendard" pitchFamily="34" charset="-122"/>
+                <a:cs typeface="Pretendard" pitchFamily="34" charset="-120"/>
+              </a:rPr>
+              <a:t>실행 근거와 기록을 남기지 않는 자동화</a:t>
+            </a:r>
+            <a:endParaRPr lang="en-US" sz="1600" dirty="0"/>
+          </a:p>
+          <a:p>
+            <a:pPr algn="l" marL="135450" indent="-135450">
+              <a:buSzPct val="100000"/>
+              <a:buChar char="•"/>
+            </a:pPr>
+            <a:r>
+              <a:rPr lang="en-US" sz="1600" dirty="0">
+                <a:solidFill>
+                  <a:srgbClr val="1A1A1A"/>
+                </a:solidFill>
+                <a:latin typeface="Pretendard" pitchFamily="34" charset="0"/>
+                <a:ea typeface="Pretendard" pitchFamily="34" charset="-122"/>
+                <a:cs typeface="Pretendard" pitchFamily="34" charset="-120"/>
+              </a:rPr>
+              <a:t>직무 재설계 없이 도구만 먼저 도입</a:t>
+            </a:r>
+            <a:endParaRPr lang="en-US" sz="1600" dirty="0"/>
+          </a:p>
+        </p:txBody>
+      </p:sp>
+      <p:sp>
+        <p:nvSpPr>
+          <p:cNvPr id="26" name="Text 24"/>
+          <p:cNvSpPr/>
+          <p:nvPr/>
+        </p:nvSpPr>
+        <p:spPr>
+          <a:xfrm>
+            <a:off x="6600167" y="2492177"/>
+            <a:ext cx="101575" cy="101600"/>
+          </a:xfrm>
+          <a:prstGeom prst="rect">
+            <a:avLst/>
+          </a:prstGeom>
+          <a:solidFill>
+            <a:srgbClr val="1B66C9"/>
+          </a:solidFill>
+          <a:ln/>
+        </p:spPr>
+        <p:txBody>
+          <a:bodyPr wrap="square" rtlCol="0" anchor="ctr"/>
+          <a:lstStyle/>
+          <a:p>
+            <a:pPr indent="0" marL="0">
+              <a:buNone/>
+            </a:pPr>
+            <a:endParaRPr lang="en-US" dirty="0"/>
+          </a:p>
+        </p:txBody>
+      </p:sp>
+      <p:sp>
+        <p:nvSpPr>
+          <p:cNvPr id="27" name="Text 25"/>
+          <p:cNvSpPr/>
+          <p:nvPr/>
+        </p:nvSpPr>
+        <p:spPr>
+          <a:xfrm>
+            <a:off x="6870966" y="2373709"/>
+            <a:ext cx="4131293" cy="393700"/>
+          </a:xfrm>
+          <a:prstGeom prst="rect">
+            <a:avLst/>
+          </a:prstGeom>
+          <a:noFill/>
+          <a:ln/>
+        </p:spPr>
+        <p:txBody>
+          <a:bodyPr wrap="square" lIns="0" tIns="0" rIns="0" bIns="0" rtlCol="0" anchor="t"/>
+          <a:lstStyle/>
+          <a:p>
+            <a:pPr algn="l" indent="0" marL="0">
+              <a:lnSpc>
+                <a:spcPts val="3100"/>
+              </a:lnSpc>
+              <a:buNone/>
+            </a:pPr>
+            <a:r>
+              <a:rPr lang="en-US" sz="2000" dirty="0">
+                <a:solidFill>
+                  <a:srgbClr val="1A1A1A"/>
+                </a:solidFill>
+                <a:latin typeface="Pretendard" pitchFamily="34" charset="0"/>
+                <a:ea typeface="Pretendard" pitchFamily="34" charset="-122"/>
+                <a:cs typeface="Pretendard" pitchFamily="34" charset="-120"/>
+              </a:rPr>
+              <a:t>검수 지점 없이 전체 업무에 한꺼번에 적용</a:t>
+            </a:r>
+            <a:endParaRPr lang="en-US" sz="2000" dirty="0"/>
+          </a:p>
+        </p:txBody>
+      </p:sp>
+      <p:sp>
+        <p:nvSpPr>
+          <p:cNvPr id="28" name="Text 26"/>
+          <p:cNvSpPr/>
+          <p:nvPr/>
+        </p:nvSpPr>
+        <p:spPr>
+          <a:xfrm>
+            <a:off x="6600167" y="3171230"/>
+            <a:ext cx="101575" cy="101600"/>
+          </a:xfrm>
+          <a:prstGeom prst="rect">
+            <a:avLst/>
+          </a:prstGeom>
+          <a:solidFill>
+            <a:srgbClr val="1B66C9"/>
+          </a:solidFill>
+          <a:ln/>
+        </p:spPr>
+        <p:txBody>
+          <a:bodyPr wrap="square" rtlCol="0" anchor="ctr"/>
+          <a:lstStyle/>
+          <a:p>
+            <a:pPr indent="0" marL="0">
+              <a:buNone/>
+            </a:pPr>
+            <a:endParaRPr lang="en-US" dirty="0"/>
+          </a:p>
+        </p:txBody>
+      </p:sp>
+      <p:sp>
+        <p:nvSpPr>
+          <p:cNvPr id="29" name="Text 27"/>
+          <p:cNvSpPr/>
+          <p:nvPr/>
+        </p:nvSpPr>
+        <p:spPr>
+          <a:xfrm>
+            <a:off x="6870966" y="3052763"/>
+            <a:ext cx="3846376" cy="393700"/>
+          </a:xfrm>
+          <a:prstGeom prst="rect">
+            <a:avLst/>
+          </a:prstGeom>
+          <a:noFill/>
+          <a:ln/>
+        </p:spPr>
+        <p:txBody>
+          <a:bodyPr wrap="square" lIns="0" tIns="0" rIns="0" bIns="0" rtlCol="0" anchor="t"/>
+          <a:lstStyle/>
+          <a:p>
+            <a:pPr algn="l" indent="0" marL="0">
+              <a:lnSpc>
+                <a:spcPts val="3100"/>
+              </a:lnSpc>
+              <a:buNone/>
+            </a:pPr>
+            <a:r>
+              <a:rPr lang="en-US" sz="2000" dirty="0">
+                <a:solidFill>
+                  <a:srgbClr val="1A1A1A"/>
+                </a:solidFill>
+                <a:latin typeface="Pretendard" pitchFamily="34" charset="0"/>
+                <a:ea typeface="Pretendard" pitchFamily="34" charset="-122"/>
+                <a:cs typeface="Pretendard" pitchFamily="34" charset="-120"/>
+              </a:rPr>
+              <a:t>실행 근거와 기록을 남기지 않는 자동화</a:t>
+            </a:r>
+            <a:endParaRPr lang="en-US" sz="2000" dirty="0"/>
+          </a:p>
+        </p:txBody>
+      </p:sp>
+      <p:sp>
+        <p:nvSpPr>
+          <p:cNvPr id="30" name="Text 28"/>
+          <p:cNvSpPr/>
+          <p:nvPr/>
+        </p:nvSpPr>
+        <p:spPr>
+          <a:xfrm>
+            <a:off x="6600167" y="3850283"/>
+            <a:ext cx="101575" cy="101600"/>
+          </a:xfrm>
+          <a:prstGeom prst="rect">
+            <a:avLst/>
+          </a:prstGeom>
+          <a:solidFill>
+            <a:srgbClr val="1B66C9"/>
+          </a:solidFill>
+          <a:ln/>
+        </p:spPr>
+        <p:txBody>
+          <a:bodyPr wrap="square" rtlCol="0" anchor="ctr"/>
+          <a:lstStyle/>
+          <a:p>
+            <a:pPr indent="0" marL="0">
+              <a:buNone/>
+            </a:pPr>
+            <a:endParaRPr lang="en-US" dirty="0"/>
+          </a:p>
+        </p:txBody>
+      </p:sp>
+      <p:sp>
+        <p:nvSpPr>
+          <p:cNvPr id="31" name="Text 29"/>
+          <p:cNvSpPr/>
+          <p:nvPr/>
+        </p:nvSpPr>
+        <p:spPr>
+          <a:xfrm>
+            <a:off x="6870966" y="3731816"/>
+            <a:ext cx="3406050" cy="393700"/>
+          </a:xfrm>
+          <a:prstGeom prst="rect">
+            <a:avLst/>
+          </a:prstGeom>
+          <a:noFill/>
+          <a:ln/>
+        </p:spPr>
+        <p:txBody>
+          <a:bodyPr wrap="square" lIns="0" tIns="0" rIns="0" bIns="0" rtlCol="0" anchor="t"/>
+          <a:lstStyle/>
+          <a:p>
+            <a:pPr algn="l" indent="0" marL="0">
+              <a:lnSpc>
+                <a:spcPts val="3100"/>
+              </a:lnSpc>
+              <a:buNone/>
+            </a:pPr>
+            <a:r>
+              <a:rPr lang="en-US" sz="2000" dirty="0">
+                <a:solidFill>
+                  <a:srgbClr val="1A1A1A"/>
+                </a:solidFill>
+                <a:latin typeface="Pretendard" pitchFamily="34" charset="0"/>
+                <a:ea typeface="Pretendard" pitchFamily="34" charset="-122"/>
+                <a:cs typeface="Pretendard" pitchFamily="34" charset="-120"/>
+              </a:rPr>
+              <a:t>직무 재설계 없이 도구만 먼저 도입</a:t>
+            </a:r>
+            <a:endParaRPr lang="en-US" sz="2000" dirty="0"/>
+          </a:p>
+        </p:txBody>
+      </p:sp>
+      <p:sp>
+        <p:nvSpPr>
+          <p:cNvPr id="32" name="Text 30"/>
+          <p:cNvSpPr/>
+          <p:nvPr/>
+        </p:nvSpPr>
+        <p:spPr>
+          <a:xfrm>
+            <a:off x="643174" y="5101431"/>
+            <a:ext cx="10902605" cy="910034"/>
+          </a:xfrm>
+          <a:prstGeom prst="rect">
+            <a:avLst/>
+          </a:prstGeom>
+          <a:solidFill>
+            <a:srgbClr val="E8F1FB"/>
+          </a:solidFill>
+          <a:ln/>
+        </p:spPr>
+        <p:txBody>
+          <a:bodyPr wrap="square" rtlCol="0" anchor="ctr"/>
+          <a:lstStyle/>
+          <a:p>
+            <a:pPr indent="0" marL="0">
+              <a:buNone/>
+            </a:pPr>
+            <a:endParaRPr lang="en-US" dirty="0"/>
+          </a:p>
+        </p:txBody>
+      </p:sp>
+      <p:sp>
+        <p:nvSpPr>
+          <p:cNvPr id="33" name="Shape 31"/>
+          <p:cNvSpPr/>
+          <p:nvPr/>
+        </p:nvSpPr>
+        <p:spPr>
+          <a:xfrm>
+            <a:off x="643174" y="5126831"/>
+            <a:ext cx="10902605" cy="0"/>
+          </a:xfrm>
+          <a:prstGeom prst="line">
+            <a:avLst/>
+          </a:prstGeom>
+          <a:noFill/>
+          <a:ln w="50794">
+            <a:solidFill>
+              <a:srgbClr val="0B2C5C"/>
+            </a:solidFill>
+            <a:prstDash val="solid"/>
+          </a:ln>
+        </p:spPr>
+      </p:sp>
+      <p:sp>
+        <p:nvSpPr>
+          <p:cNvPr id="34" name="Shape 32"/>
+          <p:cNvSpPr/>
+          <p:nvPr/>
+        </p:nvSpPr>
+        <p:spPr>
+          <a:xfrm>
+            <a:off x="643174" y="5986066"/>
+            <a:ext cx="10902605" cy="0"/>
+          </a:xfrm>
+          <a:prstGeom prst="line">
+            <a:avLst/>
+          </a:prstGeom>
+          <a:noFill/>
+          <a:ln w="50794">
+            <a:solidFill>
+              <a:srgbClr val="0B2C5C"/>
+            </a:solidFill>
+            <a:prstDash val="solid"/>
+          </a:ln>
+        </p:spPr>
+      </p:sp>
+      <p:sp>
+        <p:nvSpPr>
+          <p:cNvPr id="35" name="Text 33"/>
+          <p:cNvSpPr/>
+          <p:nvPr/>
+        </p:nvSpPr>
+        <p:spPr>
+          <a:xfrm>
+            <a:off x="913973" y="5374481"/>
+            <a:ext cx="683645" cy="363934"/>
+          </a:xfrm>
+          <a:prstGeom prst="rect">
+            <a:avLst/>
+          </a:prstGeom>
+          <a:solidFill>
+            <a:srgbClr val="0B2C5C"/>
+          </a:solidFill>
+          <a:ln/>
+        </p:spPr>
+        <p:txBody>
+          <a:bodyPr wrap="square" rtlCol="0" anchor="ctr"/>
+          <a:lstStyle/>
+          <a:p>
+            <a:pPr indent="0" marL="0">
+              <a:buNone/>
+            </a:pPr>
+            <a:endParaRPr lang="en-US" dirty="0"/>
+          </a:p>
+        </p:txBody>
+      </p:sp>
+      <p:sp>
+        <p:nvSpPr>
+          <p:cNvPr id="36" name="Text 34"/>
+          <p:cNvSpPr/>
+          <p:nvPr/>
+        </p:nvSpPr>
+        <p:spPr>
+          <a:xfrm>
+            <a:off x="1083198" y="5442148"/>
+            <a:ext cx="352099" cy="228600"/>
+          </a:xfrm>
+          <a:prstGeom prst="rect">
+            <a:avLst/>
+          </a:prstGeom>
+          <a:noFill/>
+          <a:ln/>
+        </p:spPr>
+        <p:txBody>
+          <a:bodyPr wrap="square" lIns="0" tIns="0" rIns="0" bIns="0" rtlCol="0" anchor="t"/>
+          <a:lstStyle/>
+          <a:p>
+            <a:pPr algn="l" indent="0" marL="0">
+              <a:buNone/>
+            </a:pPr>
+            <a:r>
+              <a:rPr lang="en-US" sz="1466" b="1" dirty="0">
+                <a:solidFill>
+                  <a:srgbClr val="FFFFFF"/>
+                </a:solidFill>
+                <a:latin typeface="Pretendard" pitchFamily="34" charset="0"/>
+                <a:ea typeface="Pretendard" pitchFamily="34" charset="-122"/>
+                <a:cs typeface="Pretendard" pitchFamily="34" charset="-120"/>
+              </a:rPr>
+              <a:t>요약</a:t>
+            </a:r>
+            <a:endParaRPr lang="en-US" sz="1466" dirty="0"/>
+          </a:p>
+        </p:txBody>
+      </p:sp>
+      <p:sp>
+        <p:nvSpPr>
+          <p:cNvPr id="37" name="Text 35"/>
+          <p:cNvSpPr/>
+          <p:nvPr/>
+        </p:nvSpPr>
+        <p:spPr>
+          <a:xfrm>
+            <a:off x="1834493" y="5372298"/>
+            <a:ext cx="7770457" cy="368300"/>
+          </a:xfrm>
+          <a:prstGeom prst="rect">
+            <a:avLst/>
+          </a:prstGeom>
+          <a:noFill/>
+          <a:ln/>
+        </p:spPr>
+        <p:txBody>
+          <a:bodyPr wrap="square" lIns="0" tIns="0" rIns="0" bIns="0" rtlCol="0" anchor="t"/>
+          <a:lstStyle/>
+          <a:p>
+            <a:pPr algn="l" indent="0" marL="0">
+              <a:lnSpc>
+                <a:spcPts val="2900"/>
+              </a:lnSpc>
+              <a:buNone/>
+            </a:pPr>
+            <a:r>
+              <a:rPr lang="en-US" sz="2000" b="1" dirty="0">
+                <a:solidFill>
+                  <a:srgbClr val="0B2C5C"/>
+                </a:solidFill>
+                <a:latin typeface="Pretendard" pitchFamily="34" charset="0"/>
+                <a:ea typeface="Pretendard" pitchFamily="34" charset="-122"/>
+                <a:cs typeface="Pretendard" pitchFamily="34" charset="-120"/>
+              </a:rPr>
+              <a:t>성패는 모델 성능이 아니라, 사람이 어디서 개입할지를 정하는 설계에서 갈린다.</a:t>
+            </a:r>
+            <a:endParaRPr lang="en-US" sz="2000" dirty="0"/>
+          </a:p>
+        </p:txBody>
+      </p:sp>
     </p:spTree>
   </p:cSld>
   <p:clrMapOvr>
@@ -1406,6 +5414,13 @@
 <file path=ppt/slides/slide5.xml><?xml version="1.0" encoding="utf-8"?>
 <p:sld xmlns:a="http://schemas.openxmlformats.org/drawingml/2006/main" xmlns:r="http://schemas.openxmlformats.org/officeDocument/2006/relationships" xmlns:p="http://schemas.openxmlformats.org/presentationml/2006/main">
   <p:cSld name="Slide 5">
+    <p:bg>
+      <p:bgPr>
+        <a:solidFill>
+          <a:srgbClr val="0B2C5C"/>
+        </a:solidFill>
+      </p:bgPr>
+    </p:bg>
     <p:spTree>
       <p:nvGrpSpPr>
         <p:cNvPr id="1" name=""/>
@@ -1420,30 +5435,813 @@
           <a:chExt cx="0" cy="0"/>
         </a:xfrm>
       </p:grpSpPr>
-      <p:pic>
-        <p:nvPicPr>
-          <p:cNvPr id="2" name="Image 0" descr="/tmp/slide-1787841982292-oy1q9yxez4.png">    </p:cNvPr>
-          <p:cNvPicPr>
-            <a:picLocks noChangeAspect="1"/>
-          </p:cNvPicPr>
-          <p:nvPr/>
-        </p:nvPicPr>
-        <p:blipFill>
-          <a:blip r:embed="rId1"/>
-          <a:stretch>
-            <a:fillRect/>
-          </a:stretch>
-        </p:blipFill>
-        <p:spPr>
-          <a:xfrm>
-            <a:off x="0" y="0"/>
-            <a:ext cx="12188952" cy="6858000"/>
-          </a:xfrm>
-          <a:prstGeom prst="rect">
-            <a:avLst/>
-          </a:prstGeom>
-        </p:spPr>
-      </p:pic>
+      <p:sp>
+        <p:nvSpPr>
+          <p:cNvPr id="2" name="Text 0"/>
+          <p:cNvSpPr/>
+          <p:nvPr/>
+        </p:nvSpPr>
+        <p:spPr>
+          <a:xfrm>
+            <a:off x="643174" y="575667"/>
+            <a:ext cx="724711" cy="397669"/>
+          </a:xfrm>
+          <a:prstGeom prst="rect">
+            <a:avLst/>
+          </a:prstGeom>
+          <a:solidFill>
+            <a:srgbClr val="1B66C9"/>
+          </a:solidFill>
+          <a:ln/>
+        </p:spPr>
+        <p:txBody>
+          <a:bodyPr wrap="square" rtlCol="0" anchor="ctr"/>
+          <a:lstStyle/>
+          <a:p>
+            <a:pPr indent="0" marL="0">
+              <a:buNone/>
+            </a:pPr>
+            <a:endParaRPr lang="en-US" dirty="0"/>
+          </a:p>
+        </p:txBody>
+      </p:sp>
+      <p:sp>
+        <p:nvSpPr>
+          <p:cNvPr id="3" name="Text 1"/>
+          <p:cNvSpPr/>
+          <p:nvPr/>
+        </p:nvSpPr>
+        <p:spPr>
+          <a:xfrm>
+            <a:off x="829261" y="660202"/>
+            <a:ext cx="359586" cy="228600"/>
+          </a:xfrm>
+          <a:prstGeom prst="rect">
+            <a:avLst/>
+          </a:prstGeom>
+          <a:noFill/>
+          <a:ln/>
+        </p:spPr>
+        <p:txBody>
+          <a:bodyPr wrap="square" lIns="0" tIns="0" rIns="0" bIns="0" rtlCol="0" anchor="t"/>
+          <a:lstStyle/>
+          <a:p>
+            <a:pPr algn="l" indent="0" marL="0">
+              <a:buNone/>
+            </a:pPr>
+            <a:r>
+              <a:rPr lang="en-US" sz="1466" b="1" dirty="0">
+                <a:solidFill>
+                  <a:srgbClr val="FFFFFF"/>
+                </a:solidFill>
+                <a:latin typeface="Pretendard" pitchFamily="34" charset="0"/>
+                <a:ea typeface="Pretendard" pitchFamily="34" charset="-122"/>
+                <a:cs typeface="Pretendard" pitchFamily="34" charset="-120"/>
+              </a:rPr>
+              <a:t>논의</a:t>
+            </a:r>
+            <a:endParaRPr lang="en-US" sz="1466" dirty="0"/>
+          </a:p>
+        </p:txBody>
+      </p:sp>
+      <p:sp>
+        <p:nvSpPr>
+          <p:cNvPr id="4" name="Text 2"/>
+          <p:cNvSpPr/>
+          <p:nvPr/>
+        </p:nvSpPr>
+        <p:spPr>
+          <a:xfrm>
+            <a:off x="643174" y="2315567"/>
+            <a:ext cx="67650" cy="2222103"/>
+          </a:xfrm>
+          <a:prstGeom prst="rect">
+            <a:avLst/>
+          </a:prstGeom>
+          <a:solidFill>
+            <a:srgbClr val="1B66C9"/>
+          </a:solidFill>
+          <a:ln/>
+        </p:spPr>
+        <p:txBody>
+          <a:bodyPr wrap="square" rtlCol="0" anchor="ctr"/>
+          <a:lstStyle/>
+          <a:p>
+            <a:pPr indent="0" marL="0">
+              <a:buNone/>
+            </a:pPr>
+            <a:endParaRPr lang="en-US" dirty="0"/>
+          </a:p>
+        </p:txBody>
+      </p:sp>
+      <p:sp>
+        <p:nvSpPr>
+          <p:cNvPr id="5" name="Text 3"/>
+          <p:cNvSpPr/>
+          <p:nvPr/>
+        </p:nvSpPr>
+        <p:spPr>
+          <a:xfrm>
+            <a:off x="1421846" y="2315567"/>
+            <a:ext cx="4006035" cy="1097161"/>
+          </a:xfrm>
+          <a:prstGeom prst="rect">
+            <a:avLst/>
+          </a:prstGeom>
+          <a:noFill/>
+          <a:ln/>
+        </p:spPr>
+        <p:txBody>
+          <a:bodyPr wrap="square" lIns="0" tIns="0" rIns="0" bIns="0" rtlCol="0" anchor="t"/>
+          <a:lstStyle/>
+          <a:p>
+            <a:pPr algn="l" indent="0" marL="0">
+              <a:lnSpc>
+                <a:spcPts val="8639"/>
+              </a:lnSpc>
+              <a:buNone/>
+            </a:pPr>
+            <a:r>
+              <a:rPr lang="en-US" sz="7199" b="1" dirty="0">
+                <a:solidFill>
+                  <a:srgbClr val="FFFFFF"/>
+                </a:solidFill>
+                <a:latin typeface="Pretendard" pitchFamily="34" charset="0"/>
+                <a:ea typeface="Pretendard" pitchFamily="34" charset="-122"/>
+                <a:cs typeface="Pretendard" pitchFamily="34" charset="-120"/>
+              </a:rPr>
+              <a:t>Q&amp;A</a:t>
+            </a:r>
+            <a:endParaRPr lang="en-US" sz="7199" dirty="0"/>
+          </a:p>
+        </p:txBody>
+      </p:sp>
+      <p:sp>
+        <p:nvSpPr>
+          <p:cNvPr id="6" name="Text 4"/>
+          <p:cNvSpPr/>
+          <p:nvPr/>
+        </p:nvSpPr>
+        <p:spPr>
+          <a:xfrm>
+            <a:off x="1421846" y="3649663"/>
+            <a:ext cx="4006035" cy="381000"/>
+          </a:xfrm>
+          <a:prstGeom prst="rect">
+            <a:avLst/>
+          </a:prstGeom>
+          <a:noFill/>
+          <a:ln/>
+        </p:spPr>
+        <p:txBody>
+          <a:bodyPr wrap="square" lIns="0" tIns="0" rIns="0" bIns="0" rtlCol="0" anchor="t"/>
+          <a:lstStyle/>
+          <a:p>
+            <a:pPr algn="l" indent="0" marL="0">
+              <a:lnSpc>
+                <a:spcPts val="3000"/>
+              </a:lnSpc>
+              <a:spcBef>
+                <a:spcPts val="1866"/>
+              </a:spcBef>
+              <a:buNone/>
+            </a:pPr>
+            <a:r>
+              <a:rPr lang="en-US" sz="2000" dirty="0">
+                <a:solidFill>
+                  <a:srgbClr val="C5D2E3"/>
+                </a:solidFill>
+                <a:latin typeface="Pretendard" pitchFamily="34" charset="0"/>
+                <a:ea typeface="Pretendard" pitchFamily="34" charset="-122"/>
+                <a:cs typeface="Pretendard" pitchFamily="34" charset="-120"/>
+              </a:rPr>
+              <a:t>함께 정하고 싶은 세 가지</a:t>
+            </a:r>
+            <a:endParaRPr lang="en-US" sz="2000" dirty="0"/>
+          </a:p>
+        </p:txBody>
+      </p:sp>
+      <p:sp>
+        <p:nvSpPr>
+          <p:cNvPr id="7" name="Text 5"/>
+          <p:cNvSpPr/>
+          <p:nvPr/>
+        </p:nvSpPr>
+        <p:spPr>
+          <a:xfrm>
+            <a:off x="6060353" y="2315567"/>
+            <a:ext cx="5485425" cy="2222103"/>
+          </a:xfrm>
+          <a:prstGeom prst="rect">
+            <a:avLst/>
+          </a:prstGeom>
+          <a:noFill/>
+          <a:ln/>
+        </p:spPr>
+        <p:txBody>
+          <a:bodyPr wrap="square" lIns="0" tIns="0" rIns="0" bIns="0" rtlCol="0" anchor="t"/>
+          <a:lstStyle/>
+          <a:p>
+            <a:pPr algn="l" marL="342900" indent="-342900">
+              <a:buSzPct val="100000"/>
+              <a:buChar char="•"/>
+            </a:pPr>
+            <a:r>
+              <a:rPr lang="en-US" sz="1600" dirty="0">
+                <a:solidFill>
+                  <a:srgbClr val="FFFFFF"/>
+                </a:solidFill>
+                <a:latin typeface="Pretendard" pitchFamily="34" charset="0"/>
+                <a:ea typeface="Pretendard" pitchFamily="34" charset="-122"/>
+                <a:cs typeface="Pretendard" pitchFamily="34" charset="-120"/>
+              </a:rPr>
+              <a:t>01</a:t>
+            </a:r>
+            <a:pPr algn="l" indent="0" marL="0">
+              <a:buNone/>
+            </a:pPr>
+            <a:r>
+              <a:rPr lang="en-US" sz="1600" dirty="0">
+                <a:solidFill>
+                  <a:srgbClr val="E8F1FB"/>
+                </a:solidFill>
+                <a:latin typeface="Pretendard" pitchFamily="34" charset="0"/>
+                <a:ea typeface="Pretendard" pitchFamily="34" charset="-122"/>
+                <a:cs typeface="Pretendard" pitchFamily="34" charset="-120"/>
+              </a:rPr>
+              <a:t>우리 조직에서 가장 먼저 맡길 업무는 무엇인가</a:t>
+            </a:r>
+            <a:endParaRPr lang="en-US" sz="1600" dirty="0"/>
+          </a:p>
+          <a:p>
+            <a:pPr algn="l" marL="342900" indent="-342900">
+              <a:buSzPct val="100000"/>
+              <a:buChar char="•"/>
+            </a:pPr>
+            <a:r>
+              <a:rPr lang="en-US" sz="1600" dirty="0">
+                <a:solidFill>
+                  <a:srgbClr val="FFFFFF"/>
+                </a:solidFill>
+                <a:latin typeface="Pretendard" pitchFamily="34" charset="0"/>
+                <a:ea typeface="Pretendard" pitchFamily="34" charset="-122"/>
+                <a:cs typeface="Pretendard" pitchFamily="34" charset="-120"/>
+              </a:rPr>
+              <a:t>02</a:t>
+            </a:r>
+            <a:pPr algn="l" indent="0" marL="0">
+              <a:buNone/>
+            </a:pPr>
+            <a:r>
+              <a:rPr lang="en-US" sz="1600" dirty="0">
+                <a:solidFill>
+                  <a:srgbClr val="E8F1FB"/>
+                </a:solidFill>
+                <a:latin typeface="Pretendard" pitchFamily="34" charset="0"/>
+                <a:ea typeface="Pretendard" pitchFamily="34" charset="-122"/>
+                <a:cs typeface="Pretendard" pitchFamily="34" charset="-120"/>
+              </a:rPr>
+              <a:t>사람이 반드시 확인해야 하는 지점은 어디인가</a:t>
+            </a:r>
+            <a:endParaRPr lang="en-US" sz="1600" dirty="0"/>
+          </a:p>
+          <a:p>
+            <a:pPr algn="l" marL="342900" indent="-342900">
+              <a:buSzPct val="100000"/>
+              <a:buChar char="•"/>
+            </a:pPr>
+            <a:r>
+              <a:rPr lang="en-US" sz="1600" dirty="0">
+                <a:solidFill>
+                  <a:srgbClr val="FFFFFF"/>
+                </a:solidFill>
+                <a:latin typeface="Pretendard" pitchFamily="34" charset="0"/>
+                <a:ea typeface="Pretendard" pitchFamily="34" charset="-122"/>
+                <a:cs typeface="Pretendard" pitchFamily="34" charset="-120"/>
+              </a:rPr>
+              <a:t>03</a:t>
+            </a:r>
+            <a:pPr algn="l" indent="0" marL="0">
+              <a:buNone/>
+            </a:pPr>
+            <a:r>
+              <a:rPr lang="en-US" sz="1600" dirty="0">
+                <a:solidFill>
+                  <a:srgbClr val="E8F1FB"/>
+                </a:solidFill>
+                <a:latin typeface="Pretendard" pitchFamily="34" charset="0"/>
+                <a:ea typeface="Pretendard" pitchFamily="34" charset="-122"/>
+                <a:cs typeface="Pretendard" pitchFamily="34" charset="-120"/>
+              </a:rPr>
+              <a:t>성과는 무엇으로 측정할 것인가</a:t>
+            </a:r>
+            <a:endParaRPr lang="en-US" sz="1600" dirty="0"/>
+          </a:p>
+        </p:txBody>
+      </p:sp>
+      <p:sp>
+        <p:nvSpPr>
+          <p:cNvPr id="8" name="Shape 6"/>
+          <p:cNvSpPr/>
+          <p:nvPr/>
+        </p:nvSpPr>
+        <p:spPr>
+          <a:xfrm>
+            <a:off x="6060353" y="2914452"/>
+            <a:ext cx="5485425" cy="0"/>
+          </a:xfrm>
+          <a:prstGeom prst="line">
+            <a:avLst/>
+          </a:prstGeom>
+          <a:noFill/>
+          <a:ln w="12698">
+            <a:solidFill>
+              <a:srgbClr val="3A5B87"/>
+            </a:solidFill>
+            <a:prstDash val="solid"/>
+          </a:ln>
+        </p:spPr>
+      </p:sp>
+      <p:sp>
+        <p:nvSpPr>
+          <p:cNvPr id="9" name="Text 7"/>
+          <p:cNvSpPr/>
+          <p:nvPr/>
+        </p:nvSpPr>
+        <p:spPr>
+          <a:xfrm>
+            <a:off x="6060353" y="2315567"/>
+            <a:ext cx="372374" cy="372467"/>
+          </a:xfrm>
+          <a:prstGeom prst="rect">
+            <a:avLst/>
+          </a:prstGeom>
+          <a:solidFill>
+            <a:srgbClr val="1B66C9"/>
+          </a:solidFill>
+          <a:ln/>
+        </p:spPr>
+        <p:txBody>
+          <a:bodyPr wrap="square" rtlCol="0" anchor="ctr"/>
+          <a:lstStyle/>
+          <a:p>
+            <a:pPr indent="0" marL="0">
+              <a:buNone/>
+            </a:pPr>
+            <a:endParaRPr lang="en-US" dirty="0"/>
+          </a:p>
+        </p:txBody>
+      </p:sp>
+      <p:sp>
+        <p:nvSpPr>
+          <p:cNvPr id="10" name="Text 8"/>
+          <p:cNvSpPr/>
+          <p:nvPr/>
+        </p:nvSpPr>
+        <p:spPr>
+          <a:xfrm>
+            <a:off x="6138518" y="2387402"/>
+            <a:ext cx="220163" cy="228600"/>
+          </a:xfrm>
+          <a:prstGeom prst="rect">
+            <a:avLst/>
+          </a:prstGeom>
+          <a:noFill/>
+          <a:ln/>
+        </p:spPr>
+        <p:txBody>
+          <a:bodyPr wrap="square" lIns="0" tIns="0" rIns="0" bIns="0" rtlCol="0" anchor="t"/>
+          <a:lstStyle/>
+          <a:p>
+            <a:pPr algn="l" indent="0" marL="0">
+              <a:buNone/>
+            </a:pPr>
+            <a:r>
+              <a:rPr lang="en-US" sz="1466" b="1" dirty="0">
+                <a:solidFill>
+                  <a:srgbClr val="FFFFFF"/>
+                </a:solidFill>
+                <a:latin typeface="Pretendard" pitchFamily="34" charset="0"/>
+                <a:ea typeface="Pretendard" pitchFamily="34" charset="-122"/>
+                <a:cs typeface="Pretendard" pitchFamily="34" charset="-120"/>
+              </a:rPr>
+              <a:t>01</a:t>
+            </a:r>
+            <a:endParaRPr lang="en-US" sz="1466" dirty="0"/>
+          </a:p>
+        </p:txBody>
+      </p:sp>
+      <p:sp>
+        <p:nvSpPr>
+          <p:cNvPr id="11" name="Text 9"/>
+          <p:cNvSpPr/>
+          <p:nvPr/>
+        </p:nvSpPr>
+        <p:spPr>
+          <a:xfrm>
+            <a:off x="6635877" y="2315567"/>
+            <a:ext cx="4571619" cy="389334"/>
+          </a:xfrm>
+          <a:prstGeom prst="rect">
+            <a:avLst/>
+          </a:prstGeom>
+          <a:noFill/>
+          <a:ln/>
+        </p:spPr>
+        <p:txBody>
+          <a:bodyPr wrap="square" lIns="0" tIns="33862" rIns="0" bIns="0" rtlCol="0" anchor="t"/>
+          <a:lstStyle/>
+          <a:p>
+            <a:pPr algn="l" indent="0" marL="0">
+              <a:lnSpc>
+                <a:spcPts val="2800"/>
+              </a:lnSpc>
+              <a:buNone/>
+            </a:pPr>
+            <a:r>
+              <a:rPr lang="en-US" sz="2000" b="1" dirty="0">
+                <a:solidFill>
+                  <a:srgbClr val="E8F1FB"/>
+                </a:solidFill>
+                <a:latin typeface="Pretendard" pitchFamily="34" charset="0"/>
+                <a:ea typeface="Pretendard" pitchFamily="34" charset="-122"/>
+                <a:cs typeface="Pretendard" pitchFamily="34" charset="-120"/>
+              </a:rPr>
+              <a:t>우리 조직에서 가장 먼저 맡길 업무는 무엇인가</a:t>
+            </a:r>
+            <a:endParaRPr lang="en-US" sz="2000" dirty="0"/>
+          </a:p>
+        </p:txBody>
+      </p:sp>
+      <p:sp>
+        <p:nvSpPr>
+          <p:cNvPr id="12" name="Shape 10"/>
+          <p:cNvSpPr/>
+          <p:nvPr/>
+        </p:nvSpPr>
+        <p:spPr>
+          <a:xfrm>
+            <a:off x="6060353" y="3722886"/>
+            <a:ext cx="5485425" cy="0"/>
+          </a:xfrm>
+          <a:prstGeom prst="line">
+            <a:avLst/>
+          </a:prstGeom>
+          <a:noFill/>
+          <a:ln w="12698">
+            <a:solidFill>
+              <a:srgbClr val="3A5B87"/>
+            </a:solidFill>
+            <a:prstDash val="solid"/>
+          </a:ln>
+        </p:spPr>
+      </p:sp>
+      <p:sp>
+        <p:nvSpPr>
+          <p:cNvPr id="13" name="Text 11"/>
+          <p:cNvSpPr/>
+          <p:nvPr/>
+        </p:nvSpPr>
+        <p:spPr>
+          <a:xfrm>
+            <a:off x="6060353" y="3124002"/>
+            <a:ext cx="372374" cy="372467"/>
+          </a:xfrm>
+          <a:prstGeom prst="rect">
+            <a:avLst/>
+          </a:prstGeom>
+          <a:solidFill>
+            <a:srgbClr val="1B66C9"/>
+          </a:solidFill>
+          <a:ln/>
+        </p:spPr>
+        <p:txBody>
+          <a:bodyPr wrap="square" rtlCol="0" anchor="ctr"/>
+          <a:lstStyle/>
+          <a:p>
+            <a:pPr indent="0" marL="0">
+              <a:buNone/>
+            </a:pPr>
+            <a:endParaRPr lang="en-US" dirty="0"/>
+          </a:p>
+        </p:txBody>
+      </p:sp>
+      <p:sp>
+        <p:nvSpPr>
+          <p:cNvPr id="14" name="Text 12"/>
+          <p:cNvSpPr/>
+          <p:nvPr/>
+        </p:nvSpPr>
+        <p:spPr>
+          <a:xfrm>
+            <a:off x="6125821" y="3195836"/>
+            <a:ext cx="246064" cy="228600"/>
+          </a:xfrm>
+          <a:prstGeom prst="rect">
+            <a:avLst/>
+          </a:prstGeom>
+          <a:noFill/>
+          <a:ln/>
+        </p:spPr>
+        <p:txBody>
+          <a:bodyPr wrap="square" lIns="0" tIns="0" rIns="0" bIns="0" rtlCol="0" anchor="t"/>
+          <a:lstStyle/>
+          <a:p>
+            <a:pPr algn="l" indent="0" marL="0">
+              <a:buNone/>
+            </a:pPr>
+            <a:r>
+              <a:rPr lang="en-US" sz="1466" b="1" dirty="0">
+                <a:solidFill>
+                  <a:srgbClr val="FFFFFF"/>
+                </a:solidFill>
+                <a:latin typeface="Pretendard" pitchFamily="34" charset="0"/>
+                <a:ea typeface="Pretendard" pitchFamily="34" charset="-122"/>
+                <a:cs typeface="Pretendard" pitchFamily="34" charset="-120"/>
+              </a:rPr>
+              <a:t>02</a:t>
+            </a:r>
+            <a:endParaRPr lang="en-US" sz="1466" dirty="0"/>
+          </a:p>
+        </p:txBody>
+      </p:sp>
+      <p:sp>
+        <p:nvSpPr>
+          <p:cNvPr id="15" name="Text 13"/>
+          <p:cNvSpPr/>
+          <p:nvPr/>
+        </p:nvSpPr>
+        <p:spPr>
+          <a:xfrm>
+            <a:off x="6635877" y="3124002"/>
+            <a:ext cx="4506865" cy="389334"/>
+          </a:xfrm>
+          <a:prstGeom prst="rect">
+            <a:avLst/>
+          </a:prstGeom>
+          <a:noFill/>
+          <a:ln/>
+        </p:spPr>
+        <p:txBody>
+          <a:bodyPr wrap="square" lIns="0" tIns="33862" rIns="0" bIns="0" rtlCol="0" anchor="t"/>
+          <a:lstStyle/>
+          <a:p>
+            <a:pPr algn="l" indent="0" marL="0">
+              <a:lnSpc>
+                <a:spcPts val="2800"/>
+              </a:lnSpc>
+              <a:buNone/>
+            </a:pPr>
+            <a:r>
+              <a:rPr lang="en-US" sz="2000" b="1" dirty="0">
+                <a:solidFill>
+                  <a:srgbClr val="E8F1FB"/>
+                </a:solidFill>
+                <a:latin typeface="Pretendard" pitchFamily="34" charset="0"/>
+                <a:ea typeface="Pretendard" pitchFamily="34" charset="-122"/>
+                <a:cs typeface="Pretendard" pitchFamily="34" charset="-120"/>
+              </a:rPr>
+              <a:t>사람이 반드시 확인해야 하는 지점은 어디인가</a:t>
+            </a:r>
+            <a:endParaRPr lang="en-US" sz="2000" dirty="0"/>
+          </a:p>
+        </p:txBody>
+      </p:sp>
+      <p:sp>
+        <p:nvSpPr>
+          <p:cNvPr id="16" name="Shape 14"/>
+          <p:cNvSpPr/>
+          <p:nvPr/>
+        </p:nvSpPr>
+        <p:spPr>
+          <a:xfrm>
+            <a:off x="6060353" y="4531320"/>
+            <a:ext cx="5485425" cy="0"/>
+          </a:xfrm>
+          <a:prstGeom prst="line">
+            <a:avLst/>
+          </a:prstGeom>
+          <a:noFill/>
+          <a:ln w="12698">
+            <a:solidFill>
+              <a:srgbClr val="3A5B87"/>
+            </a:solidFill>
+            <a:prstDash val="solid"/>
+          </a:ln>
+        </p:spPr>
+      </p:sp>
+      <p:sp>
+        <p:nvSpPr>
+          <p:cNvPr id="17" name="Text 15"/>
+          <p:cNvSpPr/>
+          <p:nvPr/>
+        </p:nvSpPr>
+        <p:spPr>
+          <a:xfrm>
+            <a:off x="6060353" y="3932436"/>
+            <a:ext cx="372374" cy="372467"/>
+          </a:xfrm>
+          <a:prstGeom prst="rect">
+            <a:avLst/>
+          </a:prstGeom>
+          <a:solidFill>
+            <a:srgbClr val="1B66C9"/>
+          </a:solidFill>
+          <a:ln/>
+        </p:spPr>
+        <p:txBody>
+          <a:bodyPr wrap="square" rtlCol="0" anchor="ctr"/>
+          <a:lstStyle/>
+          <a:p>
+            <a:pPr indent="0" marL="0">
+              <a:buNone/>
+            </a:pPr>
+            <a:endParaRPr lang="en-US" dirty="0"/>
+          </a:p>
+        </p:txBody>
+      </p:sp>
+      <p:sp>
+        <p:nvSpPr>
+          <p:cNvPr id="18" name="Text 16"/>
+          <p:cNvSpPr/>
+          <p:nvPr/>
+        </p:nvSpPr>
+        <p:spPr>
+          <a:xfrm>
+            <a:off x="6125821" y="4004270"/>
+            <a:ext cx="246064" cy="228600"/>
+          </a:xfrm>
+          <a:prstGeom prst="rect">
+            <a:avLst/>
+          </a:prstGeom>
+          <a:noFill/>
+          <a:ln/>
+        </p:spPr>
+        <p:txBody>
+          <a:bodyPr wrap="square" lIns="0" tIns="0" rIns="0" bIns="0" rtlCol="0" anchor="t"/>
+          <a:lstStyle/>
+          <a:p>
+            <a:pPr algn="l" indent="0" marL="0">
+              <a:buNone/>
+            </a:pPr>
+            <a:r>
+              <a:rPr lang="en-US" sz="1466" b="1" dirty="0">
+                <a:solidFill>
+                  <a:srgbClr val="FFFFFF"/>
+                </a:solidFill>
+                <a:latin typeface="Pretendard" pitchFamily="34" charset="0"/>
+                <a:ea typeface="Pretendard" pitchFamily="34" charset="-122"/>
+                <a:cs typeface="Pretendard" pitchFamily="34" charset="-120"/>
+              </a:rPr>
+              <a:t>03</a:t>
+            </a:r>
+            <a:endParaRPr lang="en-US" sz="1466" dirty="0"/>
+          </a:p>
+        </p:txBody>
+      </p:sp>
+      <p:sp>
+        <p:nvSpPr>
+          <p:cNvPr id="19" name="Text 17"/>
+          <p:cNvSpPr/>
+          <p:nvPr/>
+        </p:nvSpPr>
+        <p:spPr>
+          <a:xfrm>
+            <a:off x="6635877" y="3932436"/>
+            <a:ext cx="3056380" cy="389334"/>
+          </a:xfrm>
+          <a:prstGeom prst="rect">
+            <a:avLst/>
+          </a:prstGeom>
+          <a:noFill/>
+          <a:ln/>
+        </p:spPr>
+        <p:txBody>
+          <a:bodyPr wrap="square" lIns="0" tIns="33862" rIns="0" bIns="0" rtlCol="0" anchor="t"/>
+          <a:lstStyle/>
+          <a:p>
+            <a:pPr algn="l" indent="0" marL="0">
+              <a:lnSpc>
+                <a:spcPts val="2800"/>
+              </a:lnSpc>
+              <a:buNone/>
+            </a:pPr>
+            <a:r>
+              <a:rPr lang="en-US" sz="2000" b="1" dirty="0">
+                <a:solidFill>
+                  <a:srgbClr val="E8F1FB"/>
+                </a:solidFill>
+                <a:latin typeface="Pretendard" pitchFamily="34" charset="0"/>
+                <a:ea typeface="Pretendard" pitchFamily="34" charset="-122"/>
+                <a:cs typeface="Pretendard" pitchFamily="34" charset="-120"/>
+              </a:rPr>
+              <a:t>성과는 무엇으로 측정할 것인가</a:t>
+            </a:r>
+            <a:endParaRPr lang="en-US" sz="2000" dirty="0"/>
+          </a:p>
+        </p:txBody>
+      </p:sp>
+      <p:sp>
+        <p:nvSpPr>
+          <p:cNvPr id="20" name="Shape 18"/>
+          <p:cNvSpPr/>
+          <p:nvPr/>
+        </p:nvSpPr>
+        <p:spPr>
+          <a:xfrm>
+            <a:off x="643174" y="5886252"/>
+            <a:ext cx="10902605" cy="0"/>
+          </a:xfrm>
+          <a:prstGeom prst="line">
+            <a:avLst/>
+          </a:prstGeom>
+          <a:noFill/>
+          <a:ln w="12698">
+            <a:solidFill>
+              <a:srgbClr val="3A5B87"/>
+            </a:solidFill>
+            <a:prstDash val="solid"/>
+          </a:ln>
+        </p:spPr>
+      </p:sp>
+      <p:sp>
+        <p:nvSpPr>
+          <p:cNvPr id="21" name="Text 19"/>
+          <p:cNvSpPr/>
+          <p:nvPr/>
+        </p:nvSpPr>
+        <p:spPr>
+          <a:xfrm>
+            <a:off x="643174" y="6095802"/>
+            <a:ext cx="960178" cy="254000"/>
+          </a:xfrm>
+          <a:prstGeom prst="rect">
+            <a:avLst/>
+          </a:prstGeom>
+          <a:noFill/>
+          <a:ln/>
+        </p:spPr>
+        <p:txBody>
+          <a:bodyPr wrap="square" lIns="0" tIns="0" rIns="0" bIns="0" rtlCol="0" anchor="t"/>
+          <a:lstStyle/>
+          <a:p>
+            <a:pPr algn="l" indent="0" marL="0">
+              <a:buNone/>
+            </a:pPr>
+            <a:r>
+              <a:rPr lang="en-US" sz="1733" b="1" dirty="0">
+                <a:solidFill>
+                  <a:srgbClr val="FFFFFF"/>
+                </a:solidFill>
+                <a:latin typeface="Pretendard" pitchFamily="34" charset="0"/>
+                <a:ea typeface="Pretendard" pitchFamily="34" charset="-122"/>
+                <a:cs typeface="Pretendard" pitchFamily="34" charset="-120"/>
+              </a:rPr>
+              <a:t>감사합니다</a:t>
+            </a:r>
+            <a:endParaRPr lang="en-US" sz="1733" dirty="0"/>
+          </a:p>
+        </p:txBody>
+      </p:sp>
+      <p:sp>
+        <p:nvSpPr>
+          <p:cNvPr id="22" name="Text 20"/>
+          <p:cNvSpPr/>
+          <p:nvPr/>
+        </p:nvSpPr>
+        <p:spPr>
+          <a:xfrm>
+            <a:off x="10568123" y="6121202"/>
+            <a:ext cx="997209" cy="228600"/>
+          </a:xfrm>
+          <a:prstGeom prst="rect">
+            <a:avLst/>
+          </a:prstGeom>
+          <a:noFill/>
+          <a:ln/>
+        </p:spPr>
+        <p:txBody>
+          <a:bodyPr wrap="square" lIns="0" tIns="0" rIns="0" bIns="0" rtlCol="0" anchor="t"/>
+          <a:lstStyle/>
+          <a:p>
+            <a:pPr algn="l" indent="0" marL="0">
+              <a:buNone/>
+            </a:pPr>
+            <a:r>
+              <a:rPr lang="en-US" sz="1466" dirty="0">
+                <a:solidFill>
+                  <a:srgbClr val="8FA6C4"/>
+                </a:solidFill>
+                <a:latin typeface="Pretendard" pitchFamily="34" charset="0"/>
+                <a:ea typeface="Pretendard" pitchFamily="34" charset="-122"/>
+                <a:cs typeface="Pretendard" pitchFamily="34" charset="-120"/>
+              </a:rPr>
+              <a:t>발표자 · 소속</a:t>
+            </a:r>
+            <a:endParaRPr lang="en-US" sz="1466" dirty="0"/>
+          </a:p>
+        </p:txBody>
+      </p:sp>
     </p:spTree>
   </p:cSld>
   <p:clrMapOvr>

--- a/decks/test-deck/ai-automation-deck.pptx
+++ b/decks/test-deck/ai-automation-deck.pptx
@@ -1279,7 +1279,7 @@
           <a:ln/>
         </p:spPr>
         <p:txBody>
-          <a:bodyPr wrap="square" lIns="0" tIns="0" rIns="0" bIns="0" rtlCol="0" anchor="t"/>
+          <a:bodyPr wrap="none" lIns="0" tIns="0" rIns="0" bIns="0" rtlCol="0" anchor="t"/>
           <a:lstStyle/>
           <a:p>
             <a:pPr algn="l" indent="0" marL="0">
@@ -1348,7 +1348,9 @@
           <a:ln/>
         </p:spPr>
         <p:txBody>
-          <a:bodyPr wrap="square" lIns="0" tIns="0" rIns="0" bIns="0" rtlCol="0" anchor="t"/>
+          <a:bodyPr wrap="square" lIns="0" tIns="0" rIns="0" bIns="0" rtlCol="0" anchor="t">
+            <a:normAutofit/>
+          </a:bodyPr>
           <a:lstStyle/>
           <a:p>
             <a:pPr algn="l" indent="0" marL="0">
@@ -1410,7 +1412,7 @@
           <a:ln/>
         </p:spPr>
         <p:txBody>
-          <a:bodyPr wrap="square" lIns="0" tIns="0" rIns="0" bIns="0" rtlCol="0" anchor="t"/>
+          <a:bodyPr wrap="none" lIns="0" tIns="0" rIns="0" bIns="0" rtlCol="0" anchor="t"/>
           <a:lstStyle/>
           <a:p>
             <a:pPr algn="l" indent="0" marL="0">
@@ -1459,6 +1461,10 @@
             <a:prstDash val="solid"/>
           </a:ln>
         </p:spPr>
+        <p:txBody>
+          <a:bodyPr/>
+          <a:p/>
+        </p:txBody>
       </p:sp>
       <p:sp>
         <p:nvSpPr>
@@ -1478,7 +1484,7 @@
           <a:ln/>
         </p:spPr>
         <p:txBody>
-          <a:bodyPr wrap="square" lIns="0" tIns="0" rIns="0" bIns="0" rtlCol="0" anchor="t"/>
+          <a:bodyPr wrap="none" lIns="0" tIns="0" rIns="0" bIns="0" rtlCol="0" anchor="t"/>
           <a:lstStyle/>
           <a:p>
             <a:pPr algn="l" indent="0" marL="0">
@@ -1520,7 +1526,7 @@
           <a:ln/>
         </p:spPr>
         <p:txBody>
-          <a:bodyPr wrap="square" lIns="0" tIns="0" rIns="0" bIns="0" rtlCol="0" anchor="t"/>
+          <a:bodyPr wrap="none" lIns="0" tIns="0" rIns="0" bIns="0" rtlCol="0" anchor="t"/>
           <a:lstStyle/>
           <a:p>
             <a:pPr algn="l" indent="0" marL="0">
@@ -1559,7 +1565,7 @@
           <a:ln/>
         </p:spPr>
         <p:txBody>
-          <a:bodyPr wrap="square" lIns="0" tIns="0" rIns="0" bIns="0" rtlCol="0" anchor="t"/>
+          <a:bodyPr wrap="none" lIns="0" tIns="0" rIns="0" bIns="0" rtlCol="0" anchor="t"/>
           <a:lstStyle/>
           <a:p>
             <a:pPr algn="l" indent="0" marL="0">
@@ -1601,7 +1607,7 @@
           <a:ln/>
         </p:spPr>
         <p:txBody>
-          <a:bodyPr wrap="square" lIns="0" tIns="0" rIns="0" bIns="0" rtlCol="0" anchor="t"/>
+          <a:bodyPr wrap="none" lIns="0" tIns="0" rIns="0" bIns="0" rtlCol="0" anchor="t"/>
           <a:lstStyle/>
           <a:p>
             <a:pPr algn="l" indent="0" marL="0">
@@ -1640,7 +1646,7 @@
           <a:ln/>
         </p:spPr>
         <p:txBody>
-          <a:bodyPr wrap="square" lIns="0" tIns="0" rIns="0" bIns="0" rtlCol="0" anchor="t"/>
+          <a:bodyPr wrap="none" lIns="0" tIns="0" rIns="0" bIns="0" rtlCol="0" anchor="t"/>
           <a:lstStyle/>
           <a:p>
             <a:pPr algn="l" indent="0" marL="0">
@@ -1682,7 +1688,7 @@
           <a:ln/>
         </p:spPr>
         <p:txBody>
-          <a:bodyPr wrap="square" lIns="0" tIns="0" rIns="0" bIns="0" rtlCol="0" anchor="t"/>
+          <a:bodyPr wrap="none" lIns="0" tIns="0" rIns="0" bIns="0" rtlCol="0" anchor="t"/>
           <a:lstStyle/>
           <a:p>
             <a:pPr algn="l" indent="0" marL="0">
@@ -1813,7 +1819,7 @@
           <a:ln/>
         </p:spPr>
         <p:txBody>
-          <a:bodyPr wrap="square" lIns="0" tIns="0" rIns="0" bIns="0" rtlCol="0" anchor="t"/>
+          <a:bodyPr wrap="none" lIns="0" tIns="0" rIns="0" bIns="0" rtlCol="0" anchor="t"/>
           <a:lstStyle/>
           <a:p>
             <a:pPr algn="l" indent="0" marL="0">
@@ -1852,7 +1858,7 @@
           <a:ln/>
         </p:spPr>
         <p:txBody>
-          <a:bodyPr wrap="square" lIns="0" tIns="0" rIns="0" bIns="0" rtlCol="0" anchor="t"/>
+          <a:bodyPr wrap="none" lIns="0" tIns="0" rIns="0" bIns="0" rtlCol="0" anchor="t"/>
           <a:lstStyle/>
           <a:p>
             <a:pPr algn="l" indent="0" marL="0">
@@ -1891,7 +1897,7 @@
           <a:ln/>
         </p:spPr>
         <p:txBody>
-          <a:bodyPr wrap="square" lIns="0" tIns="0" rIns="0" bIns="0" rtlCol="0" anchor="t"/>
+          <a:bodyPr wrap="none" lIns="0" tIns="0" rIns="0" bIns="0" rtlCol="0" anchor="t"/>
           <a:lstStyle/>
           <a:p>
             <a:pPr algn="l" indent="0" marL="0">
@@ -1960,7 +1966,7 @@
           <a:ln/>
         </p:spPr>
         <p:txBody>
-          <a:bodyPr wrap="square" lIns="0" tIns="0" rIns="0" bIns="0" rtlCol="0" anchor="t"/>
+          <a:bodyPr wrap="none" lIns="0" tIns="0" rIns="0" bIns="0" rtlCol="0" anchor="t"/>
           <a:lstStyle/>
           <a:p>
             <a:pPr algn="l" indent="0" marL="0">
@@ -1999,7 +2005,7 @@
           <a:ln/>
         </p:spPr>
         <p:txBody>
-          <a:bodyPr wrap="square" lIns="0" tIns="0" rIns="0" bIns="0" rtlCol="0" anchor="t"/>
+          <a:bodyPr wrap="none" lIns="0" tIns="0" rIns="0" bIns="0" rtlCol="0" anchor="t"/>
           <a:lstStyle/>
           <a:p>
             <a:pPr algn="l" indent="0" marL="0">
@@ -2041,7 +2047,9 @@
           <a:ln/>
         </p:spPr>
         <p:txBody>
-          <a:bodyPr wrap="square" lIns="0" tIns="0" rIns="0" bIns="0" rtlCol="0" anchor="t"/>
+          <a:bodyPr wrap="square" lIns="0" tIns="0" rIns="0" bIns="0" rtlCol="0" anchor="t">
+            <a:normAutofit/>
+          </a:bodyPr>
           <a:lstStyle/>
           <a:p>
             <a:pPr algn="l" indent="0" marL="0">
@@ -2087,6 +2095,10 @@
             <a:prstDash val="solid"/>
           </a:ln>
         </p:spPr>
+        <p:txBody>
+          <a:bodyPr/>
+          <a:p/>
+        </p:txBody>
       </p:sp>
       <p:sp>
         <p:nvSpPr>
@@ -2106,7 +2118,7 @@
           <a:ln/>
         </p:spPr>
         <p:txBody>
-          <a:bodyPr wrap="square" lIns="0" tIns="0" rIns="0" bIns="0" rtlCol="0" anchor="t"/>
+          <a:bodyPr wrap="none" lIns="0" tIns="0" rIns="0" bIns="0" rtlCol="0" anchor="t"/>
           <a:lstStyle/>
           <a:p>
             <a:pPr algn="l" indent="0" marL="0">
@@ -2151,7 +2163,7 @@
           <a:ln/>
         </p:spPr>
         <p:txBody>
-          <a:bodyPr wrap="square" lIns="0" tIns="0" rIns="0" bIns="0" rtlCol="0" anchor="t"/>
+          <a:bodyPr wrap="none" lIns="0" tIns="0" rIns="0" bIns="0" rtlCol="0" anchor="t"/>
           <a:lstStyle/>
           <a:p>
             <a:pPr algn="l" indent="0" marL="0">
@@ -2197,6 +2209,10 @@
             <a:prstDash val="solid"/>
           </a:ln>
         </p:spPr>
+        <p:txBody>
+          <a:bodyPr/>
+          <a:p/>
+        </p:txBody>
       </p:sp>
       <p:sp>
         <p:nvSpPr>
@@ -2246,7 +2262,7 @@
           <a:ln/>
         </p:spPr>
         <p:txBody>
-          <a:bodyPr wrap="square" lIns="0" tIns="0" rIns="0" bIns="0" rtlCol="0" anchor="t"/>
+          <a:bodyPr wrap="none" lIns="0" tIns="0" rIns="0" bIns="0" rtlCol="0" anchor="t"/>
           <a:lstStyle/>
           <a:p>
             <a:pPr algn="l" indent="0" marL="0">
@@ -2285,7 +2301,7 @@
           <a:ln/>
         </p:spPr>
         <p:txBody>
-          <a:bodyPr wrap="square" lIns="0" tIns="0" rIns="0" bIns="0" rtlCol="0" anchor="t"/>
+          <a:bodyPr wrap="none" lIns="0" tIns="0" rIns="0" bIns="0" rtlCol="0" anchor="t"/>
           <a:lstStyle/>
           <a:p>
             <a:pPr algn="l" indent="0" marL="0">
@@ -2327,7 +2343,9 @@
           <a:ln/>
         </p:spPr>
         <p:txBody>
-          <a:bodyPr wrap="square" lIns="0" tIns="0" rIns="0" bIns="0" rtlCol="0" anchor="t"/>
+          <a:bodyPr wrap="square" lIns="0" tIns="0" rIns="0" bIns="0" rtlCol="0" anchor="t">
+            <a:normAutofit/>
+          </a:bodyPr>
           <a:lstStyle/>
           <a:p>
             <a:pPr algn="l" indent="0" marL="0">
@@ -2373,6 +2391,10 @@
             <a:prstDash val="solid"/>
           </a:ln>
         </p:spPr>
+        <p:txBody>
+          <a:bodyPr/>
+          <a:p/>
+        </p:txBody>
       </p:sp>
       <p:sp>
         <p:nvSpPr>
@@ -2392,7 +2414,7 @@
           <a:ln/>
         </p:spPr>
         <p:txBody>
-          <a:bodyPr wrap="square" lIns="0" tIns="0" rIns="0" bIns="0" rtlCol="0" anchor="t"/>
+          <a:bodyPr wrap="none" lIns="0" tIns="0" rIns="0" bIns="0" rtlCol="0" anchor="t"/>
           <a:lstStyle/>
           <a:p>
             <a:pPr algn="l" indent="0" marL="0">
@@ -2437,7 +2459,7 @@
           <a:ln/>
         </p:spPr>
         <p:txBody>
-          <a:bodyPr wrap="square" lIns="0" tIns="0" rIns="0" bIns="0" rtlCol="0" anchor="t"/>
+          <a:bodyPr wrap="none" lIns="0" tIns="0" rIns="0" bIns="0" rtlCol="0" anchor="t"/>
           <a:lstStyle/>
           <a:p>
             <a:pPr algn="l" indent="0" marL="0">
@@ -2483,6 +2505,10 @@
             <a:prstDash val="solid"/>
           </a:ln>
         </p:spPr>
+        <p:txBody>
+          <a:bodyPr/>
+          <a:p/>
+        </p:txBody>
       </p:sp>
       <p:sp>
         <p:nvSpPr>
@@ -2532,7 +2558,7 @@
           <a:ln/>
         </p:spPr>
         <p:txBody>
-          <a:bodyPr wrap="square" lIns="0" tIns="0" rIns="0" bIns="0" rtlCol="0" anchor="t"/>
+          <a:bodyPr wrap="none" lIns="0" tIns="0" rIns="0" bIns="0" rtlCol="0" anchor="t"/>
           <a:lstStyle/>
           <a:p>
             <a:pPr algn="l" indent="0" marL="0">
@@ -2571,7 +2597,7 @@
           <a:ln/>
         </p:spPr>
         <p:txBody>
-          <a:bodyPr wrap="square" lIns="0" tIns="0" rIns="0" bIns="0" rtlCol="0" anchor="t"/>
+          <a:bodyPr wrap="none" lIns="0" tIns="0" rIns="0" bIns="0" rtlCol="0" anchor="t"/>
           <a:lstStyle/>
           <a:p>
             <a:pPr algn="l" indent="0" marL="0">
@@ -2613,7 +2639,9 @@
           <a:ln/>
         </p:spPr>
         <p:txBody>
-          <a:bodyPr wrap="square" lIns="0" tIns="0" rIns="0" bIns="0" rtlCol="0" anchor="t"/>
+          <a:bodyPr wrap="square" lIns="0" tIns="0" rIns="0" bIns="0" rtlCol="0" anchor="t">
+            <a:normAutofit/>
+          </a:bodyPr>
           <a:lstStyle/>
           <a:p>
             <a:pPr algn="l" indent="0" marL="0">
@@ -2659,6 +2687,10 @@
             <a:prstDash val="solid"/>
           </a:ln>
         </p:spPr>
+        <p:txBody>
+          <a:bodyPr/>
+          <a:p/>
+        </p:txBody>
       </p:sp>
       <p:sp>
         <p:nvSpPr>
@@ -2678,7 +2710,7 @@
           <a:ln/>
         </p:spPr>
         <p:txBody>
-          <a:bodyPr wrap="square" lIns="0" tIns="0" rIns="0" bIns="0" rtlCol="0" anchor="t"/>
+          <a:bodyPr wrap="none" lIns="0" tIns="0" rIns="0" bIns="0" rtlCol="0" anchor="t"/>
           <a:lstStyle/>
           <a:p>
             <a:pPr algn="l" indent="0" marL="0">
@@ -2723,7 +2755,7 @@
           <a:ln/>
         </p:spPr>
         <p:txBody>
-          <a:bodyPr wrap="square" lIns="0" tIns="0" rIns="0" bIns="0" rtlCol="0" anchor="t"/>
+          <a:bodyPr wrap="none" lIns="0" tIns="0" rIns="0" bIns="0" rtlCol="0" anchor="t"/>
           <a:lstStyle/>
           <a:p>
             <a:pPr algn="l" indent="0" marL="0">
@@ -2799,6 +2831,10 @@
             <a:prstDash val="solid"/>
           </a:ln>
         </p:spPr>
+        <p:txBody>
+          <a:bodyPr/>
+          <a:p/>
+        </p:txBody>
       </p:sp>
       <p:sp>
         <p:nvSpPr>
@@ -2818,7 +2854,7 @@
           <a:ln/>
         </p:spPr>
         <p:txBody>
-          <a:bodyPr wrap="square" lIns="0" tIns="0" rIns="0" bIns="0" rtlCol="0" anchor="t"/>
+          <a:bodyPr wrap="none" lIns="0" tIns="0" rIns="0" bIns="0" rtlCol="0" anchor="t"/>
           <a:lstStyle/>
           <a:p>
             <a:pPr algn="l" indent="0" marL="0">
@@ -2952,7 +2988,7 @@
           <a:ln/>
         </p:spPr>
         <p:txBody>
-          <a:bodyPr wrap="square" lIns="0" tIns="0" rIns="0" bIns="0" rtlCol="0" anchor="t"/>
+          <a:bodyPr wrap="none" lIns="0" tIns="0" rIns="0" bIns="0" rtlCol="0" anchor="t"/>
           <a:lstStyle/>
           <a:p>
             <a:pPr algn="l" indent="0" marL="0">
@@ -2991,7 +3027,7 @@
           <a:ln/>
         </p:spPr>
         <p:txBody>
-          <a:bodyPr wrap="square" lIns="0" tIns="0" rIns="0" bIns="0" rtlCol="0" anchor="t"/>
+          <a:bodyPr wrap="none" lIns="0" tIns="0" rIns="0" bIns="0" rtlCol="0" anchor="t"/>
           <a:lstStyle/>
           <a:p>
             <a:pPr algn="l" indent="0" marL="0">
@@ -3030,7 +3066,7 @@
           <a:ln/>
         </p:spPr>
         <p:txBody>
-          <a:bodyPr wrap="square" lIns="0" tIns="0" rIns="0" bIns="0" rtlCol="0" anchor="t"/>
+          <a:bodyPr wrap="none" lIns="0" tIns="0" rIns="0" bIns="0" rtlCol="0" anchor="t"/>
           <a:lstStyle/>
           <a:p>
             <a:pPr algn="l" indent="0" marL="0">
@@ -3133,7 +3169,7 @@
           <a:ln/>
         </p:spPr>
         <p:txBody>
-          <a:bodyPr wrap="square" lIns="0" tIns="0" rIns="0" bIns="0" rtlCol="0" anchor="t"/>
+          <a:bodyPr wrap="none" lIns="0" tIns="0" rIns="0" bIns="0" rtlCol="0" anchor="t"/>
           <a:lstStyle/>
           <a:p>
             <a:pPr algn="l" indent="0" marL="0">
@@ -3172,7 +3208,7 @@
           <a:ln/>
         </p:spPr>
         <p:txBody>
-          <a:bodyPr wrap="square" lIns="0" tIns="0" rIns="0" bIns="0" rtlCol="0" anchor="t"/>
+          <a:bodyPr wrap="none" lIns="0" tIns="0" rIns="0" bIns="0" rtlCol="0" anchor="t"/>
           <a:lstStyle/>
           <a:p>
             <a:pPr algn="l" indent="0" marL="0">
@@ -3260,6 +3296,10 @@
             <a:prstDash val="solid"/>
           </a:ln>
         </p:spPr>
+        <p:txBody>
+          <a:bodyPr/>
+          <a:p/>
+        </p:txBody>
       </p:sp>
       <p:sp>
         <p:nvSpPr>
@@ -3279,7 +3319,7 @@
           <a:ln/>
         </p:spPr>
         <p:txBody>
-          <a:bodyPr wrap="square" lIns="0" tIns="0" rIns="0" bIns="0" rtlCol="0" anchor="t"/>
+          <a:bodyPr wrap="none" lIns="0" tIns="0" rIns="0" bIns="0" rtlCol="0" anchor="t"/>
           <a:lstStyle/>
           <a:p>
             <a:pPr algn="l" indent="0" marL="0">
@@ -3396,6 +3436,10 @@
             <a:prstDash val="solid"/>
           </a:ln>
         </p:spPr>
+        <p:txBody>
+          <a:bodyPr/>
+          <a:p/>
+        </p:txBody>
       </p:sp>
       <p:sp>
         <p:nvSpPr>
@@ -3419,6 +3463,10 @@
             <a:prstDash val="solid"/>
           </a:ln>
         </p:spPr>
+        <p:txBody>
+          <a:bodyPr/>
+          <a:p/>
+        </p:txBody>
       </p:sp>
       <p:sp>
         <p:nvSpPr>
@@ -3442,6 +3490,10 @@
             <a:prstDash val="solid"/>
           </a:ln>
         </p:spPr>
+        <p:txBody>
+          <a:bodyPr/>
+          <a:p/>
+        </p:txBody>
       </p:sp>
       <p:sp>
         <p:nvSpPr>
@@ -3465,6 +3517,10 @@
             <a:prstDash val="solid"/>
           </a:ln>
         </p:spPr>
+        <p:txBody>
+          <a:bodyPr/>
+          <a:p/>
+        </p:txBody>
       </p:sp>
       <p:sp>
         <p:nvSpPr>
@@ -3514,7 +3570,7 @@
           <a:ln/>
         </p:spPr>
         <p:txBody>
-          <a:bodyPr wrap="square" lIns="0" tIns="0" rIns="0" bIns="0" rtlCol="0" anchor="t"/>
+          <a:bodyPr wrap="none" lIns="0" tIns="0" rIns="0" bIns="0" rtlCol="0" anchor="t"/>
           <a:lstStyle/>
           <a:p>
             <a:pPr algn="l" indent="0" marL="0">
@@ -3553,7 +3609,7 @@
           <a:ln/>
         </p:spPr>
         <p:txBody>
-          <a:bodyPr wrap="square" lIns="0" tIns="0" rIns="0" bIns="0" rtlCol="0" anchor="t"/>
+          <a:bodyPr wrap="none" lIns="0" tIns="0" rIns="0" bIns="0" rtlCol="0" anchor="t"/>
           <a:lstStyle/>
           <a:p>
             <a:pPr algn="l" indent="0" marL="0">
@@ -3641,6 +3697,10 @@
             <a:prstDash val="solid"/>
           </a:ln>
         </p:spPr>
+        <p:txBody>
+          <a:bodyPr/>
+          <a:p/>
+        </p:txBody>
       </p:sp>
       <p:sp>
         <p:nvSpPr>
@@ -3660,7 +3720,7 @@
           <a:ln/>
         </p:spPr>
         <p:txBody>
-          <a:bodyPr wrap="square" lIns="0" tIns="0" rIns="0" bIns="0" rtlCol="0" anchor="t"/>
+          <a:bodyPr wrap="none" lIns="0" tIns="0" rIns="0" bIns="0" rtlCol="0" anchor="t"/>
           <a:lstStyle/>
           <a:p>
             <a:pPr algn="l" indent="0" marL="0">
@@ -3807,7 +3867,7 @@
           <a:ln/>
         </p:spPr>
         <p:txBody>
-          <a:bodyPr wrap="square" lIns="0" tIns="0" rIns="0" bIns="0" rtlCol="0" anchor="t"/>
+          <a:bodyPr wrap="none" lIns="0" tIns="0" rIns="0" bIns="0" rtlCol="0" anchor="t"/>
           <a:lstStyle/>
           <a:p>
             <a:pPr algn="l" indent="0" marL="0">
@@ -3846,7 +3906,7 @@
           <a:ln/>
         </p:spPr>
         <p:txBody>
-          <a:bodyPr wrap="square" lIns="0" tIns="0" rIns="0" bIns="0" rtlCol="0" anchor="t"/>
+          <a:bodyPr wrap="none" lIns="0" tIns="0" rIns="0" bIns="0" rtlCol="0" anchor="t"/>
           <a:lstStyle/>
           <a:p>
             <a:pPr algn="l" indent="0" marL="0">
@@ -3934,6 +3994,10 @@
             <a:prstDash val="solid"/>
           </a:ln>
         </p:spPr>
+        <p:txBody>
+          <a:bodyPr/>
+          <a:p/>
+        </p:txBody>
       </p:sp>
       <p:sp>
         <p:nvSpPr>
@@ -3953,7 +4017,7 @@
           <a:ln/>
         </p:spPr>
         <p:txBody>
-          <a:bodyPr wrap="square" lIns="0" tIns="0" rIns="0" bIns="0" rtlCol="0" anchor="t"/>
+          <a:bodyPr wrap="none" lIns="0" tIns="0" rIns="0" bIns="0" rtlCol="0" anchor="t"/>
           <a:lstStyle/>
           <a:p>
             <a:pPr algn="l" indent="0" marL="0">
@@ -4040,6 +4104,10 @@
             <a:prstDash val="solid"/>
           </a:ln>
         </p:spPr>
+        <p:txBody>
+          <a:bodyPr/>
+          <a:p/>
+        </p:txBody>
       </p:sp>
       <p:sp>
         <p:nvSpPr>
@@ -4059,7 +4127,7 @@
           <a:ln/>
         </p:spPr>
         <p:txBody>
-          <a:bodyPr wrap="square" lIns="0" tIns="0" rIns="0" bIns="0" rtlCol="0" anchor="t"/>
+          <a:bodyPr wrap="none" lIns="0" tIns="0" rIns="0" bIns="0" rtlCol="0" anchor="t"/>
           <a:lstStyle/>
           <a:p>
             <a:pPr algn="l" indent="0" marL="0">
@@ -4193,7 +4261,7 @@
           <a:ln/>
         </p:spPr>
         <p:txBody>
-          <a:bodyPr wrap="square" lIns="0" tIns="0" rIns="0" bIns="0" rtlCol="0" anchor="t"/>
+          <a:bodyPr wrap="none" lIns="0" tIns="0" rIns="0" bIns="0" rtlCol="0" anchor="t"/>
           <a:lstStyle/>
           <a:p>
             <a:pPr algn="l" indent="0" marL="0">
@@ -4232,7 +4300,7 @@
           <a:ln/>
         </p:spPr>
         <p:txBody>
-          <a:bodyPr wrap="square" lIns="0" tIns="0" rIns="0" bIns="0" rtlCol="0" anchor="t"/>
+          <a:bodyPr wrap="none" lIns="0" tIns="0" rIns="0" bIns="0" rtlCol="0" anchor="t"/>
           <a:lstStyle/>
           <a:p>
             <a:pPr algn="l" indent="0" marL="0">
@@ -4271,7 +4339,7 @@
           <a:ln/>
         </p:spPr>
         <p:txBody>
-          <a:bodyPr wrap="square" lIns="0" tIns="0" rIns="0" bIns="0" rtlCol="0" anchor="t"/>
+          <a:bodyPr wrap="none" lIns="0" tIns="0" rIns="0" bIns="0" rtlCol="0" anchor="t"/>
           <a:lstStyle/>
           <a:p>
             <a:pPr algn="l" indent="0" marL="0">
@@ -4372,7 +4440,7 @@
           <a:ln/>
         </p:spPr>
         <p:txBody>
-          <a:bodyPr wrap="square" lIns="0" tIns="0" rIns="0" bIns="0" rtlCol="0" anchor="t"/>
+          <a:bodyPr wrap="none" lIns="0" tIns="0" rIns="0" bIns="0" rtlCol="0" anchor="t"/>
           <a:lstStyle/>
           <a:p>
             <a:pPr algn="l" indent="0" marL="0">
@@ -4411,7 +4479,7 @@
           <a:ln/>
         </p:spPr>
         <p:txBody>
-          <a:bodyPr wrap="square" lIns="0" tIns="0" rIns="0" bIns="0" rtlCol="0" anchor="t"/>
+          <a:bodyPr wrap="none" lIns="0" tIns="0" rIns="0" bIns="0" rtlCol="0" anchor="t"/>
           <a:lstStyle/>
           <a:p>
             <a:pPr algn="l" indent="0" marL="0">
@@ -4435,82 +4503,6 @@
       <p:sp>
         <p:nvSpPr>
           <p:cNvPr id="11" name="Text 9"/>
-          <p:cNvSpPr/>
-          <p:nvPr/>
-        </p:nvSpPr>
-        <p:spPr>
-          <a:xfrm>
-            <a:off x="655870" y="1817489"/>
-            <a:ext cx="5203714" cy="2898775"/>
-          </a:xfrm>
-          <a:prstGeom prst="rect">
-            <a:avLst/>
-          </a:prstGeom>
-          <a:noFill/>
-          <a:ln/>
-        </p:spPr>
-        <p:txBody>
-          <a:bodyPr wrap="square" lIns="135450" tIns="0" rIns="0" bIns="0" rtlCol="0" anchor="t"/>
-          <a:lstStyle/>
-          <a:p>
-            <a:pPr algn="l" marL="135450" indent="-135450">
-              <a:buSzPct val="100000"/>
-              <a:buChar char="•"/>
-            </a:pPr>
-            <a:r>
-              <a:rPr lang="en-US" sz="1600" dirty="0">
-                <a:solidFill>
-                  <a:srgbClr val="1A1A1A"/>
-                </a:solidFill>
-                <a:latin typeface="Pretendard" pitchFamily="34" charset="0"/>
-                <a:ea typeface="Pretendard" pitchFamily="34" charset="-122"/>
-                <a:cs typeface="Pretendard" pitchFamily="34" charset="-120"/>
-              </a:rPr>
-              <a:t>반복도와 규칙성이 높은 업무부터 목록화한다</a:t>
-            </a:r>
-            <a:endParaRPr lang="en-US" sz="1600" dirty="0"/>
-          </a:p>
-          <a:p>
-            <a:pPr algn="l" marL="135450" indent="-135450">
-              <a:buSzPct val="100000"/>
-              <a:buChar char="•"/>
-            </a:pPr>
-            <a:r>
-              <a:rPr lang="en-US" sz="1600" dirty="0">
-                <a:solidFill>
-                  <a:srgbClr val="1A1A1A"/>
-                </a:solidFill>
-                <a:latin typeface="Pretendard" pitchFamily="34" charset="0"/>
-                <a:ea typeface="Pretendard" pitchFamily="34" charset="-122"/>
-                <a:cs typeface="Pretendard" pitchFamily="34" charset="-120"/>
-              </a:rPr>
-              <a:t>사람이 최종 확인할 지점을 업무마다 정한다</a:t>
-            </a:r>
-            <a:endParaRPr lang="en-US" sz="1600" dirty="0"/>
-          </a:p>
-          <a:p>
-            <a:pPr algn="l" marL="135450" indent="-135450">
-              <a:buSzPct val="100000"/>
-              <a:buChar char="•"/>
-            </a:pPr>
-            <a:r>
-              <a:rPr lang="en-US" sz="1600" dirty="0">
-                <a:solidFill>
-                  <a:srgbClr val="1A1A1A"/>
-                </a:solidFill>
-                <a:latin typeface="Pretendard" pitchFamily="34" charset="0"/>
-                <a:ea typeface="Pretendard" pitchFamily="34" charset="-122"/>
-                <a:cs typeface="Pretendard" pitchFamily="34" charset="-120"/>
-              </a:rPr>
-              <a:t>잘못 실행됐을 때 되돌릴 절차를 함께 만든다</a:t>
-            </a:r>
-            <a:endParaRPr lang="en-US" sz="1600" dirty="0"/>
-          </a:p>
-        </p:txBody>
-      </p:sp>
-      <p:sp>
-        <p:nvSpPr>
-          <p:cNvPr id="12" name="Text 10"/>
           <p:cNvSpPr/>
           <p:nvPr/>
         </p:nvSpPr>
@@ -4540,7 +4532,7 @@
       </p:sp>
       <p:sp>
         <p:nvSpPr>
-          <p:cNvPr id="13" name="Text 11"/>
+          <p:cNvPr id="12" name="Text 10"/>
           <p:cNvSpPr/>
           <p:nvPr/>
         </p:nvSpPr>
@@ -4556,7 +4548,7 @@
           <a:ln/>
         </p:spPr>
         <p:txBody>
-          <a:bodyPr wrap="square" lIns="0" tIns="0" rIns="0" bIns="0" rtlCol="0" anchor="t"/>
+          <a:bodyPr wrap="none" lIns="0" tIns="0" rIns="0" bIns="0" rtlCol="0" anchor="t"/>
           <a:lstStyle/>
           <a:p>
             <a:pPr algn="l" indent="0" marL="0">
@@ -4582,7 +4574,7 @@
       </p:sp>
       <p:sp>
         <p:nvSpPr>
-          <p:cNvPr id="14" name="Text 12"/>
+          <p:cNvPr id="13" name="Text 11"/>
           <p:cNvSpPr/>
           <p:nvPr/>
         </p:nvSpPr>
@@ -4612,7 +4604,7 @@
       </p:sp>
       <p:sp>
         <p:nvSpPr>
-          <p:cNvPr id="15" name="Text 13"/>
+          <p:cNvPr id="14" name="Text 12"/>
           <p:cNvSpPr/>
           <p:nvPr/>
         </p:nvSpPr>
@@ -4628,7 +4620,7 @@
           <a:ln/>
         </p:spPr>
         <p:txBody>
-          <a:bodyPr wrap="square" lIns="0" tIns="0" rIns="0" bIns="0" rtlCol="0" anchor="t"/>
+          <a:bodyPr wrap="none" lIns="0" tIns="0" rIns="0" bIns="0" rtlCol="0" anchor="t"/>
           <a:lstStyle/>
           <a:p>
             <a:pPr algn="l" indent="0" marL="0">
@@ -4654,7 +4646,7 @@
       </p:sp>
       <p:sp>
         <p:nvSpPr>
-          <p:cNvPr id="16" name="Text 14"/>
+          <p:cNvPr id="15" name="Text 13"/>
           <p:cNvSpPr/>
           <p:nvPr/>
         </p:nvSpPr>
@@ -4684,7 +4676,7 @@
       </p:sp>
       <p:sp>
         <p:nvSpPr>
-          <p:cNvPr id="17" name="Text 15"/>
+          <p:cNvPr id="16" name="Text 14"/>
           <p:cNvSpPr/>
           <p:nvPr/>
         </p:nvSpPr>
@@ -4700,7 +4692,7 @@
           <a:ln/>
         </p:spPr>
         <p:txBody>
-          <a:bodyPr wrap="square" lIns="0" tIns="0" rIns="0" bIns="0" rtlCol="0" anchor="t"/>
+          <a:bodyPr wrap="none" lIns="0" tIns="0" rIns="0" bIns="0" rtlCol="0" anchor="t"/>
           <a:lstStyle/>
           <a:p>
             <a:pPr algn="l" indent="0" marL="0">
@@ -4726,7 +4718,7 @@
       </p:sp>
       <p:sp>
         <p:nvSpPr>
-          <p:cNvPr id="18" name="Shape 16"/>
+          <p:cNvPr id="17" name="Shape 15"/>
           <p:cNvSpPr/>
           <p:nvPr/>
         </p:nvSpPr>
@@ -4746,10 +4738,14 @@
             <a:prstDash val="solid"/>
           </a:ln>
         </p:spPr>
-      </p:sp>
-      <p:sp>
-        <p:nvSpPr>
-          <p:cNvPr id="19" name="Shape 17"/>
+        <p:txBody>
+          <a:bodyPr/>
+          <a:p/>
+        </p:txBody>
+      </p:sp>
+      <p:sp>
+        <p:nvSpPr>
+          <p:cNvPr id="18" name="Shape 16"/>
           <p:cNvSpPr/>
           <p:nvPr/>
         </p:nvSpPr>
@@ -4769,10 +4765,14 @@
             <a:prstDash val="solid"/>
           </a:ln>
         </p:spPr>
-      </p:sp>
-      <p:sp>
-        <p:nvSpPr>
-          <p:cNvPr id="20" name="Shape 18"/>
+        <p:txBody>
+          <a:bodyPr/>
+          <a:p/>
+        </p:txBody>
+      </p:sp>
+      <p:sp>
+        <p:nvSpPr>
+          <p:cNvPr id="19" name="Shape 17"/>
           <p:cNvSpPr/>
           <p:nvPr/>
         </p:nvSpPr>
@@ -4792,10 +4792,14 @@
             <a:prstDash val="solid"/>
           </a:ln>
         </p:spPr>
-      </p:sp>
-      <p:sp>
-        <p:nvSpPr>
-          <p:cNvPr id="21" name="Shape 19"/>
+        <p:txBody>
+          <a:bodyPr/>
+          <a:p/>
+        </p:txBody>
+      </p:sp>
+      <p:sp>
+        <p:nvSpPr>
+          <p:cNvPr id="20" name="Shape 18"/>
           <p:cNvSpPr/>
           <p:nvPr/>
         </p:nvSpPr>
@@ -4815,10 +4819,14 @@
             <a:prstDash val="solid"/>
           </a:ln>
         </p:spPr>
-      </p:sp>
-      <p:sp>
-        <p:nvSpPr>
-          <p:cNvPr id="22" name="Text 20"/>
+        <p:txBody>
+          <a:bodyPr/>
+          <a:p/>
+        </p:txBody>
+      </p:sp>
+      <p:sp>
+        <p:nvSpPr>
+          <p:cNvPr id="21" name="Text 19"/>
           <p:cNvSpPr/>
           <p:nvPr/>
         </p:nvSpPr>
@@ -4848,7 +4856,7 @@
       </p:sp>
       <p:sp>
         <p:nvSpPr>
-          <p:cNvPr id="23" name="Text 21"/>
+          <p:cNvPr id="22" name="Text 20"/>
           <p:cNvSpPr/>
           <p:nvPr/>
         </p:nvSpPr>
@@ -4864,7 +4872,7 @@
           <a:ln/>
         </p:spPr>
         <p:txBody>
-          <a:bodyPr wrap="square" lIns="0" tIns="0" rIns="0" bIns="0" rtlCol="0" anchor="t"/>
+          <a:bodyPr wrap="none" lIns="0" tIns="0" rIns="0" bIns="0" rtlCol="0" anchor="t"/>
           <a:lstStyle/>
           <a:p>
             <a:pPr algn="l" indent="0" marL="0">
@@ -4887,7 +4895,7 @@
       </p:sp>
       <p:sp>
         <p:nvSpPr>
-          <p:cNvPr id="24" name="Text 22"/>
+          <p:cNvPr id="23" name="Text 21"/>
           <p:cNvSpPr/>
           <p:nvPr/>
         </p:nvSpPr>
@@ -4903,7 +4911,7 @@
           <a:ln/>
         </p:spPr>
         <p:txBody>
-          <a:bodyPr wrap="square" lIns="0" tIns="0" rIns="0" bIns="0" rtlCol="0" anchor="t"/>
+          <a:bodyPr wrap="none" lIns="0" tIns="0" rIns="0" bIns="0" rtlCol="0" anchor="t"/>
           <a:lstStyle/>
           <a:p>
             <a:pPr algn="l" indent="0" marL="0">
@@ -4926,83 +4934,7 @@
       </p:sp>
       <p:sp>
         <p:nvSpPr>
-          <p:cNvPr id="25" name="Text 23"/>
-          <p:cNvSpPr/>
-          <p:nvPr/>
-        </p:nvSpPr>
-        <p:spPr>
-          <a:xfrm>
-            <a:off x="6329367" y="1817489"/>
-            <a:ext cx="5203714" cy="2898775"/>
-          </a:xfrm>
-          <a:prstGeom prst="rect">
-            <a:avLst/>
-          </a:prstGeom>
-          <a:noFill/>
-          <a:ln/>
-        </p:spPr>
-        <p:txBody>
-          <a:bodyPr wrap="square" lIns="135450" tIns="0" rIns="0" bIns="0" rtlCol="0" anchor="t"/>
-          <a:lstStyle/>
-          <a:p>
-            <a:pPr algn="l" marL="135450" indent="-135450">
-              <a:buSzPct val="100000"/>
-              <a:buChar char="•"/>
-            </a:pPr>
-            <a:r>
-              <a:rPr lang="en-US" sz="1600" dirty="0">
-                <a:solidFill>
-                  <a:srgbClr val="1A1A1A"/>
-                </a:solidFill>
-                <a:latin typeface="Pretendard" pitchFamily="34" charset="0"/>
-                <a:ea typeface="Pretendard" pitchFamily="34" charset="-122"/>
-                <a:cs typeface="Pretendard" pitchFamily="34" charset="-120"/>
-              </a:rPr>
-              <a:t>검수 지점 없이 전체 업무에 한꺼번에 적용</a:t>
-            </a:r>
-            <a:endParaRPr lang="en-US" sz="1600" dirty="0"/>
-          </a:p>
-          <a:p>
-            <a:pPr algn="l" marL="135450" indent="-135450">
-              <a:buSzPct val="100000"/>
-              <a:buChar char="•"/>
-            </a:pPr>
-            <a:r>
-              <a:rPr lang="en-US" sz="1600" dirty="0">
-                <a:solidFill>
-                  <a:srgbClr val="1A1A1A"/>
-                </a:solidFill>
-                <a:latin typeface="Pretendard" pitchFamily="34" charset="0"/>
-                <a:ea typeface="Pretendard" pitchFamily="34" charset="-122"/>
-                <a:cs typeface="Pretendard" pitchFamily="34" charset="-120"/>
-              </a:rPr>
-              <a:t>실행 근거와 기록을 남기지 않는 자동화</a:t>
-            </a:r>
-            <a:endParaRPr lang="en-US" sz="1600" dirty="0"/>
-          </a:p>
-          <a:p>
-            <a:pPr algn="l" marL="135450" indent="-135450">
-              <a:buSzPct val="100000"/>
-              <a:buChar char="•"/>
-            </a:pPr>
-            <a:r>
-              <a:rPr lang="en-US" sz="1600" dirty="0">
-                <a:solidFill>
-                  <a:srgbClr val="1A1A1A"/>
-                </a:solidFill>
-                <a:latin typeface="Pretendard" pitchFamily="34" charset="0"/>
-                <a:ea typeface="Pretendard" pitchFamily="34" charset="-122"/>
-                <a:cs typeface="Pretendard" pitchFamily="34" charset="-120"/>
-              </a:rPr>
-              <a:t>직무 재설계 없이 도구만 먼저 도입</a:t>
-            </a:r>
-            <a:endParaRPr lang="en-US" sz="1600" dirty="0"/>
-          </a:p>
-        </p:txBody>
-      </p:sp>
-      <p:sp>
-        <p:nvSpPr>
-          <p:cNvPr id="26" name="Text 24"/>
+          <p:cNvPr id="24" name="Text 22"/>
           <p:cNvSpPr/>
           <p:nvPr/>
         </p:nvSpPr>
@@ -5032,7 +4964,7 @@
       </p:sp>
       <p:sp>
         <p:nvSpPr>
-          <p:cNvPr id="27" name="Text 25"/>
+          <p:cNvPr id="25" name="Text 23"/>
           <p:cNvSpPr/>
           <p:nvPr/>
         </p:nvSpPr>
@@ -5048,7 +4980,7 @@
           <a:ln/>
         </p:spPr>
         <p:txBody>
-          <a:bodyPr wrap="square" lIns="0" tIns="0" rIns="0" bIns="0" rtlCol="0" anchor="t"/>
+          <a:bodyPr wrap="none" lIns="0" tIns="0" rIns="0" bIns="0" rtlCol="0" anchor="t"/>
           <a:lstStyle/>
           <a:p>
             <a:pPr algn="l" indent="0" marL="0">
@@ -5074,7 +5006,7 @@
       </p:sp>
       <p:sp>
         <p:nvSpPr>
-          <p:cNvPr id="28" name="Text 26"/>
+          <p:cNvPr id="26" name="Text 24"/>
           <p:cNvSpPr/>
           <p:nvPr/>
         </p:nvSpPr>
@@ -5104,7 +5036,7 @@
       </p:sp>
       <p:sp>
         <p:nvSpPr>
-          <p:cNvPr id="29" name="Text 27"/>
+          <p:cNvPr id="27" name="Text 25"/>
           <p:cNvSpPr/>
           <p:nvPr/>
         </p:nvSpPr>
@@ -5120,7 +5052,7 @@
           <a:ln/>
         </p:spPr>
         <p:txBody>
-          <a:bodyPr wrap="square" lIns="0" tIns="0" rIns="0" bIns="0" rtlCol="0" anchor="t"/>
+          <a:bodyPr wrap="none" lIns="0" tIns="0" rIns="0" bIns="0" rtlCol="0" anchor="t"/>
           <a:lstStyle/>
           <a:p>
             <a:pPr algn="l" indent="0" marL="0">
@@ -5146,7 +5078,7 @@
       </p:sp>
       <p:sp>
         <p:nvSpPr>
-          <p:cNvPr id="30" name="Text 28"/>
+          <p:cNvPr id="28" name="Text 26"/>
           <p:cNvSpPr/>
           <p:nvPr/>
         </p:nvSpPr>
@@ -5176,7 +5108,7 @@
       </p:sp>
       <p:sp>
         <p:nvSpPr>
-          <p:cNvPr id="31" name="Text 29"/>
+          <p:cNvPr id="29" name="Text 27"/>
           <p:cNvSpPr/>
           <p:nvPr/>
         </p:nvSpPr>
@@ -5192,7 +5124,7 @@
           <a:ln/>
         </p:spPr>
         <p:txBody>
-          <a:bodyPr wrap="square" lIns="0" tIns="0" rIns="0" bIns="0" rtlCol="0" anchor="t"/>
+          <a:bodyPr wrap="none" lIns="0" tIns="0" rIns="0" bIns="0" rtlCol="0" anchor="t"/>
           <a:lstStyle/>
           <a:p>
             <a:pPr algn="l" indent="0" marL="0">
@@ -5218,7 +5150,7 @@
       </p:sp>
       <p:sp>
         <p:nvSpPr>
-          <p:cNvPr id="32" name="Text 30"/>
+          <p:cNvPr id="30" name="Text 28"/>
           <p:cNvSpPr/>
           <p:nvPr/>
         </p:nvSpPr>
@@ -5248,7 +5180,7 @@
       </p:sp>
       <p:sp>
         <p:nvSpPr>
-          <p:cNvPr id="33" name="Shape 31"/>
+          <p:cNvPr id="31" name="Shape 29"/>
           <p:cNvSpPr/>
           <p:nvPr/>
         </p:nvSpPr>
@@ -5268,10 +5200,14 @@
             <a:prstDash val="solid"/>
           </a:ln>
         </p:spPr>
-      </p:sp>
-      <p:sp>
-        <p:nvSpPr>
-          <p:cNvPr id="34" name="Shape 32"/>
+        <p:txBody>
+          <a:bodyPr/>
+          <a:p/>
+        </p:txBody>
+      </p:sp>
+      <p:sp>
+        <p:nvSpPr>
+          <p:cNvPr id="32" name="Shape 30"/>
           <p:cNvSpPr/>
           <p:nvPr/>
         </p:nvSpPr>
@@ -5291,10 +5227,14 @@
             <a:prstDash val="solid"/>
           </a:ln>
         </p:spPr>
-      </p:sp>
-      <p:sp>
-        <p:nvSpPr>
-          <p:cNvPr id="35" name="Text 33"/>
+        <p:txBody>
+          <a:bodyPr/>
+          <a:p/>
+        </p:txBody>
+      </p:sp>
+      <p:sp>
+        <p:nvSpPr>
+          <p:cNvPr id="33" name="Text 31"/>
           <p:cNvSpPr/>
           <p:nvPr/>
         </p:nvSpPr>
@@ -5324,7 +5264,7 @@
       </p:sp>
       <p:sp>
         <p:nvSpPr>
-          <p:cNvPr id="36" name="Text 34"/>
+          <p:cNvPr id="34" name="Text 32"/>
           <p:cNvSpPr/>
           <p:nvPr/>
         </p:nvSpPr>
@@ -5340,7 +5280,7 @@
           <a:ln/>
         </p:spPr>
         <p:txBody>
-          <a:bodyPr wrap="square" lIns="0" tIns="0" rIns="0" bIns="0" rtlCol="0" anchor="t"/>
+          <a:bodyPr wrap="none" lIns="0" tIns="0" rIns="0" bIns="0" rtlCol="0" anchor="t"/>
           <a:lstStyle/>
           <a:p>
             <a:pPr algn="l" indent="0" marL="0">
@@ -5363,7 +5303,7 @@
       </p:sp>
       <p:sp>
         <p:nvSpPr>
-          <p:cNvPr id="37" name="Text 35"/>
+          <p:cNvPr id="35" name="Text 33"/>
           <p:cNvSpPr/>
           <p:nvPr/>
         </p:nvSpPr>
@@ -5379,7 +5319,7 @@
           <a:ln/>
         </p:spPr>
         <p:txBody>
-          <a:bodyPr wrap="square" lIns="0" tIns="0" rIns="0" bIns="0" rtlCol="0" anchor="t"/>
+          <a:bodyPr wrap="none" lIns="0" tIns="0" rIns="0" bIns="0" rtlCol="0" anchor="t"/>
           <a:lstStyle/>
           <a:p>
             <a:pPr algn="l" indent="0" marL="0">
@@ -5483,7 +5423,7 @@
           <a:ln/>
         </p:spPr>
         <p:txBody>
-          <a:bodyPr wrap="square" lIns="0" tIns="0" rIns="0" bIns="0" rtlCol="0" anchor="t"/>
+          <a:bodyPr wrap="none" lIns="0" tIns="0" rIns="0" bIns="0" rtlCol="0" anchor="t"/>
           <a:lstStyle/>
           <a:p>
             <a:pPr algn="l" indent="0" marL="0">
@@ -5552,7 +5492,7 @@
           <a:ln/>
         </p:spPr>
         <p:txBody>
-          <a:bodyPr wrap="square" lIns="0" tIns="0" rIns="0" bIns="0" rtlCol="0" anchor="t"/>
+          <a:bodyPr wrap="none" lIns="0" tIns="0" rIns="0" bIns="0" rtlCol="0" anchor="t"/>
           <a:lstStyle/>
           <a:p>
             <a:pPr algn="l" indent="0" marL="0">
@@ -5594,7 +5534,7 @@
           <a:ln/>
         </p:spPr>
         <p:txBody>
-          <a:bodyPr wrap="square" lIns="0" tIns="0" rIns="0" bIns="0" rtlCol="0" anchor="t"/>
+          <a:bodyPr wrap="none" lIns="0" tIns="0" rIns="0" bIns="0" rtlCol="0" anchor="t"/>
           <a:lstStyle/>
           <a:p>
             <a:pPr algn="l" indent="0" marL="0">
@@ -5623,125 +5563,7 @@
       </p:sp>
       <p:sp>
         <p:nvSpPr>
-          <p:cNvPr id="7" name="Text 5"/>
-          <p:cNvSpPr/>
-          <p:nvPr/>
-        </p:nvSpPr>
-        <p:spPr>
-          <a:xfrm>
-            <a:off x="6060353" y="2315567"/>
-            <a:ext cx="5485425" cy="2222103"/>
-          </a:xfrm>
-          <a:prstGeom prst="rect">
-            <a:avLst/>
-          </a:prstGeom>
-          <a:noFill/>
-          <a:ln/>
-        </p:spPr>
-        <p:txBody>
-          <a:bodyPr wrap="square" lIns="0" tIns="0" rIns="0" bIns="0" rtlCol="0" anchor="t"/>
-          <a:lstStyle/>
-          <a:p>
-            <a:pPr algn="l" marL="342900" indent="-342900">
-              <a:buSzPct val="100000"/>
-              <a:buChar char="•"/>
-            </a:pPr>
-            <a:r>
-              <a:rPr lang="en-US" sz="1600" dirty="0">
-                <a:solidFill>
-                  <a:srgbClr val="FFFFFF"/>
-                </a:solidFill>
-                <a:latin typeface="Pretendard" pitchFamily="34" charset="0"/>
-                <a:ea typeface="Pretendard" pitchFamily="34" charset="-122"/>
-                <a:cs typeface="Pretendard" pitchFamily="34" charset="-120"/>
-              </a:rPr>
-              <a:t>01</a:t>
-            </a:r>
-            <a:pPr algn="l" indent="0" marL="0">
-              <a:buNone/>
-            </a:pPr>
-            <a:r>
-              <a:rPr lang="en-US" sz="1600" dirty="0">
-                <a:solidFill>
-                  <a:srgbClr val="E8F1FB"/>
-                </a:solidFill>
-                <a:latin typeface="Pretendard" pitchFamily="34" charset="0"/>
-                <a:ea typeface="Pretendard" pitchFamily="34" charset="-122"/>
-                <a:cs typeface="Pretendard" pitchFamily="34" charset="-120"/>
-              </a:rPr>
-              <a:t>우리 조직에서 가장 먼저 맡길 업무는 무엇인가</a:t>
-            </a:r>
-            <a:endParaRPr lang="en-US" sz="1600" dirty="0"/>
-          </a:p>
-          <a:p>
-            <a:pPr algn="l" marL="342900" indent="-342900">
-              <a:buSzPct val="100000"/>
-              <a:buChar char="•"/>
-            </a:pPr>
-            <a:r>
-              <a:rPr lang="en-US" sz="1600" dirty="0">
-                <a:solidFill>
-                  <a:srgbClr val="FFFFFF"/>
-                </a:solidFill>
-                <a:latin typeface="Pretendard" pitchFamily="34" charset="0"/>
-                <a:ea typeface="Pretendard" pitchFamily="34" charset="-122"/>
-                <a:cs typeface="Pretendard" pitchFamily="34" charset="-120"/>
-              </a:rPr>
-              <a:t>02</a:t>
-            </a:r>
-            <a:pPr algn="l" indent="0" marL="0">
-              <a:buNone/>
-            </a:pPr>
-            <a:r>
-              <a:rPr lang="en-US" sz="1600" dirty="0">
-                <a:solidFill>
-                  <a:srgbClr val="E8F1FB"/>
-                </a:solidFill>
-                <a:latin typeface="Pretendard" pitchFamily="34" charset="0"/>
-                <a:ea typeface="Pretendard" pitchFamily="34" charset="-122"/>
-                <a:cs typeface="Pretendard" pitchFamily="34" charset="-120"/>
-              </a:rPr>
-              <a:t>사람이 반드시 확인해야 하는 지점은 어디인가</a:t>
-            </a:r>
-            <a:endParaRPr lang="en-US" sz="1600" dirty="0"/>
-          </a:p>
-          <a:p>
-            <a:pPr algn="l" marL="342900" indent="-342900">
-              <a:buSzPct val="100000"/>
-              <a:buChar char="•"/>
-            </a:pPr>
-            <a:r>
-              <a:rPr lang="en-US" sz="1600" dirty="0">
-                <a:solidFill>
-                  <a:srgbClr val="FFFFFF"/>
-                </a:solidFill>
-                <a:latin typeface="Pretendard" pitchFamily="34" charset="0"/>
-                <a:ea typeface="Pretendard" pitchFamily="34" charset="-122"/>
-                <a:cs typeface="Pretendard" pitchFamily="34" charset="-120"/>
-              </a:rPr>
-              <a:t>03</a:t>
-            </a:r>
-            <a:pPr algn="l" indent="0" marL="0">
-              <a:buNone/>
-            </a:pPr>
-            <a:r>
-              <a:rPr lang="en-US" sz="1600" dirty="0">
-                <a:solidFill>
-                  <a:srgbClr val="E8F1FB"/>
-                </a:solidFill>
-                <a:latin typeface="Pretendard" pitchFamily="34" charset="0"/>
-                <a:ea typeface="Pretendard" pitchFamily="34" charset="-122"/>
-                <a:cs typeface="Pretendard" pitchFamily="34" charset="-120"/>
-              </a:rPr>
-              <a:t>성과는 무엇으로 측정할 것인가</a:t>
-            </a:r>
-            <a:endParaRPr lang="en-US" sz="1600" dirty="0"/>
-          </a:p>
-        </p:txBody>
-      </p:sp>
-      <p:sp>
-        <p:nvSpPr>
-          <p:cNvPr id="8" name="Shape 6"/>
+          <p:cNvPr id="7" name="Shape 5"/>
           <p:cNvSpPr/>
           <p:nvPr/>
         </p:nvSpPr>
@@ -5761,10 +5583,14 @@
             <a:prstDash val="solid"/>
           </a:ln>
         </p:spPr>
-      </p:sp>
-      <p:sp>
-        <p:nvSpPr>
-          <p:cNvPr id="9" name="Text 7"/>
+        <p:txBody>
+          <a:bodyPr/>
+          <a:p/>
+        </p:txBody>
+      </p:sp>
+      <p:sp>
+        <p:nvSpPr>
+          <p:cNvPr id="8" name="Text 6"/>
           <p:cNvSpPr/>
           <p:nvPr/>
         </p:nvSpPr>
@@ -5794,7 +5620,7 @@
       </p:sp>
       <p:sp>
         <p:nvSpPr>
-          <p:cNvPr id="10" name="Text 8"/>
+          <p:cNvPr id="9" name="Text 7"/>
           <p:cNvSpPr/>
           <p:nvPr/>
         </p:nvSpPr>
@@ -5810,7 +5636,7 @@
           <a:ln/>
         </p:spPr>
         <p:txBody>
-          <a:bodyPr wrap="square" lIns="0" tIns="0" rIns="0" bIns="0" rtlCol="0" anchor="t"/>
+          <a:bodyPr wrap="none" lIns="0" tIns="0" rIns="0" bIns="0" rtlCol="0" anchor="t"/>
           <a:lstStyle/>
           <a:p>
             <a:pPr algn="l" indent="0" marL="0">
@@ -5833,7 +5659,7 @@
       </p:sp>
       <p:sp>
         <p:nvSpPr>
-          <p:cNvPr id="11" name="Text 9"/>
+          <p:cNvPr id="10" name="Text 8"/>
           <p:cNvSpPr/>
           <p:nvPr/>
         </p:nvSpPr>
@@ -5849,7 +5675,7 @@
           <a:ln/>
         </p:spPr>
         <p:txBody>
-          <a:bodyPr wrap="square" lIns="0" tIns="33862" rIns="0" bIns="0" rtlCol="0" anchor="t"/>
+          <a:bodyPr wrap="none" lIns="0" tIns="33862" rIns="0" bIns="0" rtlCol="0" anchor="t"/>
           <a:lstStyle/>
           <a:p>
             <a:pPr algn="l" indent="0" marL="0">
@@ -5875,7 +5701,7 @@
       </p:sp>
       <p:sp>
         <p:nvSpPr>
-          <p:cNvPr id="12" name="Shape 10"/>
+          <p:cNvPr id="11" name="Shape 9"/>
           <p:cNvSpPr/>
           <p:nvPr/>
         </p:nvSpPr>
@@ -5895,10 +5721,14 @@
             <a:prstDash val="solid"/>
           </a:ln>
         </p:spPr>
-      </p:sp>
-      <p:sp>
-        <p:nvSpPr>
-          <p:cNvPr id="13" name="Text 11"/>
+        <p:txBody>
+          <a:bodyPr/>
+          <a:p/>
+        </p:txBody>
+      </p:sp>
+      <p:sp>
+        <p:nvSpPr>
+          <p:cNvPr id="12" name="Text 10"/>
           <p:cNvSpPr/>
           <p:nvPr/>
         </p:nvSpPr>
@@ -5928,7 +5758,7 @@
       </p:sp>
       <p:sp>
         <p:nvSpPr>
-          <p:cNvPr id="14" name="Text 12"/>
+          <p:cNvPr id="13" name="Text 11"/>
           <p:cNvSpPr/>
           <p:nvPr/>
         </p:nvSpPr>
@@ -5944,7 +5774,7 @@
           <a:ln/>
         </p:spPr>
         <p:txBody>
-          <a:bodyPr wrap="square" lIns="0" tIns="0" rIns="0" bIns="0" rtlCol="0" anchor="t"/>
+          <a:bodyPr wrap="none" lIns="0" tIns="0" rIns="0" bIns="0" rtlCol="0" anchor="t"/>
           <a:lstStyle/>
           <a:p>
             <a:pPr algn="l" indent="0" marL="0">
@@ -5967,7 +5797,7 @@
       </p:sp>
       <p:sp>
         <p:nvSpPr>
-          <p:cNvPr id="15" name="Text 13"/>
+          <p:cNvPr id="14" name="Text 12"/>
           <p:cNvSpPr/>
           <p:nvPr/>
         </p:nvSpPr>
@@ -5983,7 +5813,7 @@
           <a:ln/>
         </p:spPr>
         <p:txBody>
-          <a:bodyPr wrap="square" lIns="0" tIns="33862" rIns="0" bIns="0" rtlCol="0" anchor="t"/>
+          <a:bodyPr wrap="none" lIns="0" tIns="33862" rIns="0" bIns="0" rtlCol="0" anchor="t"/>
           <a:lstStyle/>
           <a:p>
             <a:pPr algn="l" indent="0" marL="0">
@@ -6009,7 +5839,7 @@
       </p:sp>
       <p:sp>
         <p:nvSpPr>
-          <p:cNvPr id="16" name="Shape 14"/>
+          <p:cNvPr id="15" name="Shape 13"/>
           <p:cNvSpPr/>
           <p:nvPr/>
         </p:nvSpPr>
@@ -6029,10 +5859,14 @@
             <a:prstDash val="solid"/>
           </a:ln>
         </p:spPr>
-      </p:sp>
-      <p:sp>
-        <p:nvSpPr>
-          <p:cNvPr id="17" name="Text 15"/>
+        <p:txBody>
+          <a:bodyPr/>
+          <a:p/>
+        </p:txBody>
+      </p:sp>
+      <p:sp>
+        <p:nvSpPr>
+          <p:cNvPr id="16" name="Text 14"/>
           <p:cNvSpPr/>
           <p:nvPr/>
         </p:nvSpPr>
@@ -6062,7 +5896,7 @@
       </p:sp>
       <p:sp>
         <p:nvSpPr>
-          <p:cNvPr id="18" name="Text 16"/>
+          <p:cNvPr id="17" name="Text 15"/>
           <p:cNvSpPr/>
           <p:nvPr/>
         </p:nvSpPr>
@@ -6078,7 +5912,7 @@
           <a:ln/>
         </p:spPr>
         <p:txBody>
-          <a:bodyPr wrap="square" lIns="0" tIns="0" rIns="0" bIns="0" rtlCol="0" anchor="t"/>
+          <a:bodyPr wrap="none" lIns="0" tIns="0" rIns="0" bIns="0" rtlCol="0" anchor="t"/>
           <a:lstStyle/>
           <a:p>
             <a:pPr algn="l" indent="0" marL="0">
@@ -6101,7 +5935,7 @@
       </p:sp>
       <p:sp>
         <p:nvSpPr>
-          <p:cNvPr id="19" name="Text 17"/>
+          <p:cNvPr id="18" name="Text 16"/>
           <p:cNvSpPr/>
           <p:nvPr/>
         </p:nvSpPr>
@@ -6117,7 +5951,7 @@
           <a:ln/>
         </p:spPr>
         <p:txBody>
-          <a:bodyPr wrap="square" lIns="0" tIns="33862" rIns="0" bIns="0" rtlCol="0" anchor="t"/>
+          <a:bodyPr wrap="none" lIns="0" tIns="33862" rIns="0" bIns="0" rtlCol="0" anchor="t"/>
           <a:lstStyle/>
           <a:p>
             <a:pPr algn="l" indent="0" marL="0">
@@ -6143,7 +5977,7 @@
       </p:sp>
       <p:sp>
         <p:nvSpPr>
-          <p:cNvPr id="20" name="Shape 18"/>
+          <p:cNvPr id="19" name="Shape 17"/>
           <p:cNvSpPr/>
           <p:nvPr/>
         </p:nvSpPr>
@@ -6163,10 +5997,14 @@
             <a:prstDash val="solid"/>
           </a:ln>
         </p:spPr>
-      </p:sp>
-      <p:sp>
-        <p:nvSpPr>
-          <p:cNvPr id="21" name="Text 19"/>
+        <p:txBody>
+          <a:bodyPr/>
+          <a:p/>
+        </p:txBody>
+      </p:sp>
+      <p:sp>
+        <p:nvSpPr>
+          <p:cNvPr id="20" name="Text 18"/>
           <p:cNvSpPr/>
           <p:nvPr/>
         </p:nvSpPr>
@@ -6182,7 +6020,7 @@
           <a:ln/>
         </p:spPr>
         <p:txBody>
-          <a:bodyPr wrap="square" lIns="0" tIns="0" rIns="0" bIns="0" rtlCol="0" anchor="t"/>
+          <a:bodyPr wrap="none" lIns="0" tIns="0" rIns="0" bIns="0" rtlCol="0" anchor="t"/>
           <a:lstStyle/>
           <a:p>
             <a:pPr algn="l" indent="0" marL="0">
@@ -6205,7 +6043,7 @@
       </p:sp>
       <p:sp>
         <p:nvSpPr>
-          <p:cNvPr id="22" name="Text 20"/>
+          <p:cNvPr id="21" name="Text 19"/>
           <p:cNvSpPr/>
           <p:nvPr/>
         </p:nvSpPr>
@@ -6221,7 +6059,7 @@
           <a:ln/>
         </p:spPr>
         <p:txBody>
-          <a:bodyPr wrap="square" lIns="0" tIns="0" rIns="0" bIns="0" rtlCol="0" anchor="t"/>
+          <a:bodyPr wrap="none" lIns="0" tIns="0" rIns="0" bIns="0" rtlCol="0" anchor="t"/>
           <a:lstStyle/>
           <a:p>
             <a:pPr algn="l" indent="0" marL="0">

--- a/decks/test-deck/ai-automation-deck.pptx
+++ b/decks/test-deck/ai-automation-deck.pptx
@@ -1348,9 +1348,7 @@
           <a:ln/>
         </p:spPr>
         <p:txBody>
-          <a:bodyPr wrap="square" lIns="0" tIns="0" rIns="0" bIns="0" rtlCol="0" anchor="t">
-            <a:normAutofit/>
-          </a:bodyPr>
+          <a:bodyPr wrap="none" lIns="0" tIns="0" rIns="0" bIns="0" rtlCol="0" anchor="t"/>
           <a:lstStyle/>
           <a:p>
             <a:pPr algn="l" indent="0" marL="0">
